--- a/reports/Acehnese_Indonesian_Translator_Presentation.pptx
+++ b/reports/Acehnese_Indonesian_Translator_Presentation.pptx
@@ -130,19 +130,19 @@
   <p:extLst>
     <p:ext uri="{521415D9-36F7-43E2-AB2F-B90AF26B5E84}">
       <p14:sectionLst xmlns:p14="http://schemas.microsoft.com/office/powerpoint/2010/main">
-        <p14:section name="Introduction" id="{81caefe6-59a8-4750-45e5-7554ba5e7c10}">
+        <p14:section name="Introduction" id="{93fea3a4-c2da-d0d4-abbf-bb5d45aef785}">
           <p14:sldIdLst>
             <p14:sldId id="256"/>
           </p14:sldIdLst>
         </p14:section>
-        <p14:section name="Overview" id="{8570f8bb-6b1a-80f2-7655-156b675fc94c}">
+        <p14:section name="Overview" id="{2703b3f1-066a-ece0-6589-9dd0835549fa}">
           <p14:sldIdLst>
             <p14:sldId id="257"/>
             <p14:sldId id="258"/>
             <p14:sldId id="259"/>
           </p14:sldIdLst>
         </p14:section>
-        <p14:section name="Data" id="{018e2eaf-b8cf-ae24-d99b-c562bd85d685}">
+        <p14:section name="Data" id="{535a50fc-d01c-a57a-1c1e-8d216f873e60}">
           <p14:sldIdLst>
             <p14:sldId id="260"/>
             <p14:sldId id="261"/>
@@ -153,13 +153,13 @@
             <p14:sldId id="266"/>
           </p14:sldIdLst>
         </p14:section>
-        <p14:section name="Method" id="{ef2a73c0-7548-c80b-79ae-97f3856f9481}">
+        <p14:section name="Method" id="{b751d2e5-eaa5-2dfa-97d4-72e28ae5227b}">
           <p14:sldIdLst>
             <p14:sldId id="267"/>
             <p14:sldId id="268"/>
           </p14:sldIdLst>
         </p14:section>
-        <p14:section name="Results" id="{fe718131-dcf2-b71d-12da-3346c761b02e}">
+        <p14:section name="Results" id="{d8113792-42f4-fa60-fbef-a2b0a7953179}">
           <p14:sldIdLst>
             <p14:sldId id="269"/>
             <p14:sldId id="270"/>
@@ -169,14 +169,14 @@
             <p14:sldId id="274"/>
           </p14:sldIdLst>
         </p14:section>
-        <p14:section name="Application" id="{8022efd4-aca2-afd4-24f7-4b6b2a0eddfe}">
+        <p14:section name="Application" id="{dbaf4103-2d41-2e55-014a-9d0c4dc56e33}">
           <p14:sldIdLst>
             <p14:sldId id="275"/>
             <p14:sldId id="276"/>
             <p14:sldId id="277"/>
           </p14:sldIdLst>
         </p14:section>
-        <p14:section name="Close" id="{d62eee8b-61ca-2662-c101-1fc2e82f4441}">
+        <p14:section name="Close" id="{aacdddd5-0171-da64-268c-9cfa106b31de}">
           <p14:sldIdLst>
             <p14:sldId id="278"/>
             <p14:sldId id="279"/>
@@ -189,1279 +189,6 @@
     </p:ext>
   </p:extLst>
 </p:presentation>
-</file>
-
-<file path=ppt/charts/chart1.xml><?xml version="1.0" encoding="utf-8"?>
-<c:chartSpace xmlns:c="http://schemas.openxmlformats.org/drawingml/2006/chart" xmlns:a="http://schemas.openxmlformats.org/drawingml/2006/main" xmlns:r="http://schemas.openxmlformats.org/officeDocument/2006/relationships">
-  <c:date1904 val="0"/>
-  <c:roundedCorners val="1"/>
-  <c:chart>
-    <c:autoTitleDeleted val="1"/>
-    <c:plotArea>
-      <c:layout/>
-      <c:barChart>
-        <c:barDir val="bar"/>
-        <c:grouping val="clustered"/>
-        <c:varyColors val="0"/>
-        <c:ser>
-          <c:idx val="0"/>
-          <c:order val="0"/>
-          <c:tx>
-            <c:strRef>
-              <c:f>Sheet1!$B$1</c:f>
-              <c:strCache>
-                <c:ptCount val="1"/>
-                <c:pt idx="0">
-                  <c:v>Training pairs</c:v>
-                </c:pt>
-              </c:strCache>
-            </c:strRef>
-          </c:tx>
-          <c:spPr>
-            <a:solidFill>
-              <a:srgbClr val="0D9488"/>
-            </a:solidFill>
-            <a:effectLst/>
-          </c:spPr>
-          <c:invertIfNegative val="0"/>
-          <c:dLbls>
-            <c:numFmt formatCode="#,##0" sourceLinked="0"/>
-            <c:txPr>
-              <a:bodyPr/>
-              <a:lstStyle/>
-              <a:p>
-                <a:pPr>
-                  <a:defRPr b="0" i="0" strike="noStrike" sz="1200" u="none">
-                    <a:solidFill>
-                      <a:srgbClr val="12303A"/>
-                    </a:solidFill>
-                    <a:latin typeface="+mn-lt"/>
-                  </a:defRPr>
-                </a:pPr>
-              </a:p>
-            </c:txPr>
-            <c:showLegendKey val="0"/>
-            <c:showVal val="1"/>
-            <c:showCatName val="0"/>
-            <c:showSerName val="0"/>
-            <c:showPercent val="0"/>
-            <c:showBubbleSize val="0"/>
-            <c:showLeaderLines val="0"/>
-          </c:dLbls>
-          <c:cat>
-            <c:multiLvlStrRef>
-              <c:f>Sheet1!$A$2:$A$10</c:f>
-              <c:multiLvlStrCache>
-                <c:ptCount val="9"/>
-                <c:lvl>
-                  <c:pt idx="0">
-                    <c:v>Quran verses</c:v>
-                  </c:pt>
-                  <c:pt idx="1">
-                    <c:v>NLLB-Seed pivot (about)</c:v>
-                  </c:pt>
-                  <c:pt idx="2">
-                    <c:v>Team: Andrie's pairs</c:v>
-                  </c:pt>
-                  <c:pt idx="3">
-                    <c:v>Hikayat Abu Sammah</c:v>
-                  </c:pt>
-                  <c:pt idx="4">
-                    <c:v>FLORES dev</c:v>
-                  </c:pt>
-                  <c:pt idx="5">
-                    <c:v>NusaX train</c:v>
-                  </c:pt>
-                  <c:pt idx="6">
-                    <c:v>Wikipedia</c:v>
-                  </c:pt>
-                  <c:pt idx="7">
-                    <c:v>Hikayat Malik Mawot</c:v>
-                  </c:pt>
-                  <c:pt idx="8">
-                    <c:v>Team: stories</c:v>
-                  </c:pt>
-                </c:lvl>
-              </c:multiLvlStrCache>
-            </c:multiLvlStrRef>
-          </c:cat>
-          <c:val>
-            <c:numRef>
-              <c:f>Sheet1!$B$2:$B$10</c:f>
-              <c:numCache>
-                <c:formatCode>General</c:formatCode>
-                <c:ptCount val="9"/>
-                <c:pt idx="0">
-                  <c:v>5466</c:v>
-                </c:pt>
-                <c:pt idx="1">
-                  <c:v>5733</c:v>
-                </c:pt>
-                <c:pt idx="2">
-                  <c:v>2798</c:v>
-                </c:pt>
-                <c:pt idx="3">
-                  <c:v>1432</c:v>
-                </c:pt>
-                <c:pt idx="4">
-                  <c:v>797</c:v>
-                </c:pt>
-                <c:pt idx="5">
-                  <c:v>500</c:v>
-                </c:pt>
-                <c:pt idx="6">
-                  <c:v>375</c:v>
-                </c:pt>
-                <c:pt idx="7">
-                  <c:v>350</c:v>
-                </c:pt>
-                <c:pt idx="8">
-                  <c:v>96</c:v>
-                </c:pt>
-              </c:numCache>
-            </c:numRef>
-          </c:val>
-        </c:ser>
-        <c:dLbls>
-          <c:numFmt formatCode="#,##0" sourceLinked="0"/>
-          <c:txPr>
-            <a:bodyPr/>
-            <a:lstStyle/>
-            <a:p>
-              <a:pPr>
-                <a:defRPr b="0" i="0" strike="noStrike" sz="1200" u="none">
-                  <a:solidFill>
-                    <a:srgbClr val="12303A"/>
-                  </a:solidFill>
-                  <a:latin typeface="+mn-lt"/>
-                </a:defRPr>
-              </a:pPr>
-            </a:p>
-          </c:txPr>
-          <c:showLegendKey val="0"/>
-          <c:showVal val="1"/>
-          <c:showCatName val="0"/>
-          <c:showSerName val="0"/>
-          <c:showPercent val="0"/>
-          <c:showBubbleSize val="0"/>
-          <c:showLeaderLines val="0"/>
-        </c:dLbls>
-        <c:gapWidth val="45"/>
-        <c:overlap val="0"/>
-        <c:axId val="2094734554"/>
-        <c:axId val="2094734552"/>
-        <c:axId val="2094734556"/>
-      </c:barChart>
-      <c:catAx>
-        <c:axId val="2094734554"/>
-        <c:scaling>
-          <c:orientation val="maxMin"/>
-        </c:scaling>
-        <c:delete val="0"/>
-        <c:axPos val="l"/>
-        <c:numFmt formatCode="General" sourceLinked="1"/>
-        <c:majorTickMark val="out"/>
-        <c:minorTickMark val="none"/>
-        <c:tickLblPos val="nextTo"/>
-        <c:spPr>
-          <a:ln w="12700" cap="flat">
-            <a:solidFill>
-              <a:srgbClr val="888888"/>
-            </a:solidFill>
-            <a:prstDash val="solid"/>
-            <a:round/>
-          </a:ln>
-        </c:spPr>
-        <c:txPr>
-          <a:bodyPr/>
-          <a:lstStyle/>
-          <a:p>
-            <a:pPr>
-              <a:defRPr sz="1200" b="0" i="0" u="none" strike="noStrike">
-                <a:solidFill>
-                  <a:srgbClr val="12303A"/>
-                </a:solidFill>
-                <a:latin typeface="+mn-lt"/>
-              </a:defRPr>
-            </a:pPr>
-            <a:endParaRPr lang="en-US"/>
-          </a:p>
-        </c:txPr>
-        <c:crossAx val="2094734552"/>
-        <c:crosses val="autoZero"/>
-        <c:auto val="1"/>
-        <c:lblAlgn val="ctr"/>
-        <c:noMultiLvlLbl val="1"/>
-      </c:catAx>
-      <c:valAx>
-        <c:axId val="2094734552"/>
-        <c:scaling>
-          <c:orientation val="minMax"/>
-        </c:scaling>
-        <c:delete val="1"/>
-        <c:axPos val="b"/>
-        <c:numFmt formatCode="General" sourceLinked="0"/>
-        <c:majorTickMark val="out"/>
-        <c:minorTickMark val="none"/>
-        <c:tickLblPos val="low"/>
-        <c:spPr>
-          <a:ln w="12700" cap="flat">
-            <a:solidFill>
-              <a:srgbClr val="888888"/>
-            </a:solidFill>
-            <a:prstDash val="solid"/>
-            <a:round/>
-          </a:ln>
-        </c:spPr>
-        <c:txPr>
-          <a:bodyPr/>
-          <a:lstStyle/>
-          <a:p>
-            <a:pPr>
-              <a:defRPr sz="1200" b="0" i="0" u="none" strike="noStrike">
-                <a:solidFill>
-                  <a:srgbClr val="000000"/>
-                </a:solidFill>
-                <a:latin typeface="+mn-lt"/>
-              </a:defRPr>
-            </a:pPr>
-            <a:endParaRPr lang="en-US"/>
-          </a:p>
-        </c:txPr>
-        <c:crossAx val="2094734554"/>
-        <c:crosses val="autoZero"/>
-        <c:crossBetween val="between"/>
-      </c:valAx>
-      <c:spPr>
-        <a:noFill/>
-        <a:ln>
-          <a:noFill/>
-        </a:ln>
-        <a:effectLst/>
-      </c:spPr>
-    </c:plotArea>
-    <c:plotVisOnly val="1"/>
-    <c:dispBlanksAs val="span"/>
-  </c:chart>
-  <c:spPr>
-    <a:noFill/>
-    <a:ln>
-      <a:noFill/>
-    </a:ln>
-    <a:effectLst/>
-  </c:spPr>
-  <c:externalData r:id="rId1">
-    <c:autoUpdate val="0"/>
-  </c:externalData>
-</c:chartSpace>
-</file>
-
-<file path=ppt/charts/chart2.xml><?xml version="1.0" encoding="utf-8"?>
-<c:chartSpace xmlns:c="http://schemas.openxmlformats.org/drawingml/2006/chart" xmlns:a="http://schemas.openxmlformats.org/drawingml/2006/main" xmlns:r="http://schemas.openxmlformats.org/officeDocument/2006/relationships">
-  <c:date1904 val="0"/>
-  <c:roundedCorners val="1"/>
-  <c:chart>
-    <c:title>
-      <c:tx>
-        <c:rich>
-          <a:bodyPr/>
-          <a:lstStyle/>
-          <a:p>
-            <a:pPr>
-              <a:defRPr sz="1400" b="0" i="0" u="none" strike="noStrike">
-                <a:solidFill>
-                  <a:srgbClr val="12303A"/>
-                </a:solidFill>
-                <a:latin typeface="+mj-lt"/>
-              </a:defRPr>
-            </a:pPr>
-            <a:r>
-              <a:rPr sz="1400" b="0" i="0" u="none" strike="noStrike">
-                <a:solidFill>
-                  <a:srgbClr val="12303A"/>
-                </a:solidFill>
-                <a:latin typeface="+mj-lt"/>
-              </a:rPr>
-              <a:t>Validation chrF++ by epoch</a:t>
-            </a:r>
-          </a:p>
-        </c:rich>
-      </c:tx>
-      <c:layout/>
-      <c:overlay val="0"/>
-    </c:title>
-    <c:autoTitleDeleted val="0"/>
-    <c:plotArea>
-      <c:layout/>
-      <c:lineChart>
-        <c:varyColors val="0"/>
-        <c:ser>
-          <c:idx val="0"/>
-          <c:order val="0"/>
-          <c:tx>
-            <c:strRef>
-              <c:f>Sheet1!$B$1</c:f>
-              <c:strCache>
-                <c:ptCount val="1"/>
-                <c:pt idx="0">
-                  <c:v>Validation chrF++</c:v>
-                </c:pt>
-              </c:strCache>
-            </c:strRef>
-          </c:tx>
-          <c:spPr>
-            <a:solidFill>
-              <a:srgbClr val="0D9488"/>
-            </a:solidFill>
-            <a:ln w="38100" cap="flat">
-              <a:solidFill>
-                <a:srgbClr val="0D9488"/>
-              </a:solidFill>
-              <a:prstDash val="solid"/>
-              <a:round/>
-            </a:ln>
-            <a:effectLst/>
-          </c:spPr>
-          <c:invertIfNegative val="0"/>
-          <c:dLbls>
-            <c:numFmt formatCode="0.00" sourceLinked="0"/>
-            <c:txPr>
-              <a:bodyPr/>
-              <a:lstStyle/>
-              <a:p>
-                <a:pPr>
-                  <a:defRPr b="0" i="0" strike="noStrike" sz="1300" u="none">
-                    <a:solidFill>
-                      <a:srgbClr val="12303A"/>
-                    </a:solidFill>
-                    <a:latin typeface="+mn-lt"/>
-                  </a:defRPr>
-                </a:pPr>
-              </a:p>
-            </c:txPr>
-            <c:dLblPos val="t"/>
-            <c:showLegendKey val="0"/>
-            <c:showVal val="1"/>
-            <c:showCatName val="0"/>
-            <c:showSerName val="0"/>
-            <c:showPercent val="0"/>
-            <c:showBubbleSize val="0"/>
-            <c:showLeaderLines val="0"/>
-          </c:dLbls>
-          <c:marker>
-            <c:symbol val="circle"/>
-            <c:size val="10"/>
-            <c:spPr>
-              <a:solidFill>
-                <a:srgbClr val="0D9488"/>
-              </a:solidFill>
-              <a:ln w="9525" cap="flat">
-                <a:solidFill>
-                  <a:srgbClr val="0D9488"/>
-                </a:solidFill>
-                <a:prstDash val="solid"/>
-                <a:round/>
-              </a:ln>
-              <a:effectLst/>
-            </c:spPr>
-          </c:marker>
-          <c:cat>
-            <c:multiLvlStrRef>
-              <c:f>Sheet1!$A$2:$A$6</c:f>
-              <c:multiLvlStrCache>
-                <c:ptCount val="5"/>
-                <c:lvl>
-                  <c:pt idx="0">
-                    <c:v>Epoch 1</c:v>
-                  </c:pt>
-                  <c:pt idx="1">
-                    <c:v>Epoch 2</c:v>
-                  </c:pt>
-                  <c:pt idx="2">
-                    <c:v>Epoch 3</c:v>
-                  </c:pt>
-                  <c:pt idx="3">
-                    <c:v>Epoch 4</c:v>
-                  </c:pt>
-                  <c:pt idx="4">
-                    <c:v>Epoch 5</c:v>
-                  </c:pt>
-                </c:lvl>
-              </c:multiLvlStrCache>
-            </c:multiLvlStrRef>
-          </c:cat>
-          <c:val>
-            <c:numRef>
-              <c:f>Sheet1!$B$2:$B$6</c:f>
-              <c:numCache>
-                <c:formatCode>General</c:formatCode>
-                <c:ptCount val="5"/>
-                <c:pt idx="0">
-                  <c:v>52.85</c:v>
-                </c:pt>
-                <c:pt idx="1">
-                  <c:v>54.67</c:v>
-                </c:pt>
-                <c:pt idx="2">
-                  <c:v>55.72</c:v>
-                </c:pt>
-                <c:pt idx="3">
-                  <c:v>55.33</c:v>
-                </c:pt>
-                <c:pt idx="4">
-                  <c:v>55.01</c:v>
-                </c:pt>
-              </c:numCache>
-            </c:numRef>
-          </c:val>
-          <c:smooth val="0"/>
-        </c:ser>
-        <c:dLbls>
-          <c:numFmt formatCode="0.00" sourceLinked="0"/>
-          <c:txPr>
-            <a:bodyPr/>
-            <a:lstStyle/>
-            <a:p>
-              <a:pPr>
-                <a:defRPr b="0" i="0" strike="noStrike" sz="1300" u="none">
-                  <a:solidFill>
-                    <a:srgbClr val="12303A"/>
-                  </a:solidFill>
-                  <a:latin typeface="+mn-lt"/>
-                </a:defRPr>
-              </a:pPr>
-            </a:p>
-          </c:txPr>
-          <c:dLblPos val="t"/>
-          <c:showLegendKey val="0"/>
-          <c:showVal val="1"/>
-          <c:showCatName val="0"/>
-          <c:showSerName val="0"/>
-          <c:showPercent val="0"/>
-          <c:showBubbleSize val="0"/>
-          <c:showLeaderLines val="0"/>
-        </c:dLbls>
-        <c:marker val="1"/>
-        <c:axId val="2094734554"/>
-        <c:axId val="2094734552"/>
-        <c:axId val="2094734556"/>
-      </c:lineChart>
-      <c:catAx>
-        <c:axId val="2094734554"/>
-        <c:scaling>
-          <c:orientation val="minMax"/>
-        </c:scaling>
-        <c:delete val="0"/>
-        <c:axPos val="b"/>
-        <c:numFmt formatCode="General" sourceLinked="1"/>
-        <c:majorTickMark val="out"/>
-        <c:minorTickMark val="none"/>
-        <c:tickLblPos val="low"/>
-        <c:spPr>
-          <a:ln w="12700" cap="flat">
-            <a:solidFill>
-              <a:srgbClr val="888888"/>
-            </a:solidFill>
-            <a:prstDash val="solid"/>
-            <a:round/>
-          </a:ln>
-        </c:spPr>
-        <c:txPr>
-          <a:bodyPr/>
-          <a:lstStyle/>
-          <a:p>
-            <a:pPr>
-              <a:defRPr sz="1200" b="0" i="0" u="none" strike="noStrike">
-                <a:solidFill>
-                  <a:srgbClr val="12303A"/>
-                </a:solidFill>
-                <a:latin typeface="+mn-lt"/>
-              </a:defRPr>
-            </a:pPr>
-            <a:endParaRPr lang="en-US"/>
-          </a:p>
-        </c:txPr>
-        <c:crossAx val="2094734552"/>
-        <c:crosses val="autoZero"/>
-        <c:auto val="1"/>
-        <c:lblAlgn val="ctr"/>
-        <c:noMultiLvlLbl val="1"/>
-      </c:catAx>
-      <c:valAx>
-        <c:axId val="2094734552"/>
-        <c:scaling>
-          <c:orientation val="minMax"/>
-          <c:max val="58"/>
-          <c:min val="50"/>
-        </c:scaling>
-        <c:delete val="0"/>
-        <c:axPos val="l"/>
-        <c:majorGridlines>
-          <c:spPr>
-            <a:ln w="6350" cap="flat">
-              <a:solidFill>
-                <a:srgbClr val="D5E3E3"/>
-              </a:solidFill>
-              <a:prstDash val="solid"/>
-              <a:round/>
-            </a:ln>
-          </c:spPr>
-        </c:majorGridlines>
-        <c:numFmt formatCode="General" sourceLinked="0"/>
-        <c:majorTickMark val="out"/>
-        <c:minorTickMark val="none"/>
-        <c:tickLblPos val="nextTo"/>
-        <c:spPr>
-          <a:ln w="12700" cap="flat">
-            <a:solidFill>
-              <a:srgbClr val="888888"/>
-            </a:solidFill>
-            <a:prstDash val="solid"/>
-            <a:round/>
-          </a:ln>
-        </c:spPr>
-        <c:txPr>
-          <a:bodyPr/>
-          <a:lstStyle/>
-          <a:p>
-            <a:pPr>
-              <a:defRPr sz="1200" b="0" i="0" u="none" strike="noStrike">
-                <a:solidFill>
-                  <a:srgbClr val="4F6F7A"/>
-                </a:solidFill>
-                <a:latin typeface="+mn-lt"/>
-              </a:defRPr>
-            </a:pPr>
-            <a:endParaRPr lang="en-US"/>
-          </a:p>
-        </c:txPr>
-        <c:crossAx val="2094734554"/>
-        <c:crosses val="autoZero"/>
-        <c:crossBetween val="between"/>
-      </c:valAx>
-      <c:spPr>
-        <a:noFill/>
-        <a:ln>
-          <a:noFill/>
-        </a:ln>
-        <a:effectLst/>
-      </c:spPr>
-    </c:plotArea>
-    <c:plotVisOnly val="1"/>
-    <c:dispBlanksAs val="span"/>
-  </c:chart>
-  <c:spPr>
-    <a:noFill/>
-    <a:ln>
-      <a:noFill/>
-    </a:ln>
-    <a:effectLst/>
-  </c:spPr>
-  <c:externalData r:id="rId1">
-    <c:autoUpdate val="0"/>
-  </c:externalData>
-</c:chartSpace>
-</file>
-
-<file path=ppt/charts/chart3.xml><?xml version="1.0" encoding="utf-8"?>
-<c:chartSpace xmlns:c="http://schemas.openxmlformats.org/drawingml/2006/chart" xmlns:a="http://schemas.openxmlformats.org/drawingml/2006/main" xmlns:r="http://schemas.openxmlformats.org/officeDocument/2006/relationships">
-  <c:date1904 val="0"/>
-  <c:roundedCorners val="1"/>
-  <c:chart>
-    <c:title>
-      <c:tx>
-        <c:rich>
-          <a:bodyPr/>
-          <a:lstStyle/>
-          <a:p>
-            <a:pPr>
-              <a:defRPr sz="1400" b="0" i="0" u="none" strike="noStrike">
-                <a:solidFill>
-                  <a:srgbClr val="12303A"/>
-                </a:solidFill>
-                <a:latin typeface="+mj-lt"/>
-              </a:defRPr>
-            </a:pPr>
-            <a:r>
-              <a:rPr sz="1400" b="0" i="0" u="none" strike="noStrike">
-                <a:solidFill>
-                  <a:srgbClr val="12303A"/>
-                </a:solidFill>
-                <a:latin typeface="+mj-lt"/>
-              </a:rPr>
-              <a:t>chrF++ (higher is better)</a:t>
-            </a:r>
-          </a:p>
-        </c:rich>
-      </c:tx>
-      <c:layout/>
-      <c:overlay val="0"/>
-    </c:title>
-    <c:autoTitleDeleted val="0"/>
-    <c:plotArea>
-      <c:layout/>
-      <c:barChart>
-        <c:barDir val="col"/>
-        <c:grouping val="clustered"/>
-        <c:varyColors val="0"/>
-        <c:ser>
-          <c:idx val="0"/>
-          <c:order val="0"/>
-          <c:tx>
-            <c:strRef>
-              <c:f>Sheet1!$B$1</c:f>
-              <c:strCache>
-                <c:ptCount val="1"/>
-                <c:pt idx="0">
-                  <c:v>Base NLLB-200</c:v>
-                </c:pt>
-              </c:strCache>
-            </c:strRef>
-          </c:tx>
-          <c:spPr>
-            <a:solidFill>
-              <a:srgbClr val="9DB4BB"/>
-            </a:solidFill>
-            <a:effectLst/>
-          </c:spPr>
-          <c:invertIfNegative val="0"/>
-          <c:dLbls>
-            <c:numFmt formatCode="0.0" sourceLinked="0"/>
-            <c:txPr>
-              <a:bodyPr/>
-              <a:lstStyle/>
-              <a:p>
-                <a:pPr>
-                  <a:defRPr b="0" i="0" strike="noStrike" sz="1300" u="none">
-                    <a:solidFill>
-                      <a:srgbClr val="12303A"/>
-                    </a:solidFill>
-                    <a:latin typeface="+mn-lt"/>
-                  </a:defRPr>
-                </a:pPr>
-              </a:p>
-            </c:txPr>
-            <c:showLegendKey val="0"/>
-            <c:showVal val="1"/>
-            <c:showCatName val="0"/>
-            <c:showSerName val="0"/>
-            <c:showPercent val="0"/>
-            <c:showBubbleSize val="0"/>
-            <c:showLeaderLines val="0"/>
-          </c:dLbls>
-          <c:cat>
-            <c:multiLvlStrRef>
-              <c:f>Sheet1!$A$2:$A$4</c:f>
-              <c:multiLvlStrCache>
-                <c:ptCount val="3"/>
-                <c:lvl>
-                  <c:pt idx="0">
-                    <c:v>NusaX (400)</c:v>
-                  </c:pt>
-                  <c:pt idx="1">
-                    <c:v>FLORES (1,012)</c:v>
-                  </c:pt>
-                  <c:pt idx="2">
-                    <c:v>Hikayat (143)</c:v>
-                  </c:pt>
-                </c:lvl>
-              </c:multiLvlStrCache>
-            </c:multiLvlStrRef>
-          </c:cat>
-          <c:val>
-            <c:numRef>
-              <c:f>Sheet1!$B$2:$B$4</c:f>
-              <c:numCache>
-                <c:formatCode>General</c:formatCode>
-                <c:ptCount val="3"/>
-                <c:pt idx="0">
-                  <c:v>38.66</c:v>
-                </c:pt>
-                <c:pt idx="1">
-                  <c:v>46.27</c:v>
-                </c:pt>
-                <c:pt idx="2">
-                  <c:v>23.98</c:v>
-                </c:pt>
-              </c:numCache>
-            </c:numRef>
-          </c:val>
-        </c:ser>
-        <c:ser>
-          <c:idx val="1"/>
-          <c:order val="1"/>
-          <c:tx>
-            <c:strRef>
-              <c:f>Sheet1!$C$1</c:f>
-              <c:strCache>
-                <c:ptCount val="1"/>
-                <c:pt idx="0">
-                  <c:v>Our fine-tuned model</c:v>
-                </c:pt>
-              </c:strCache>
-            </c:strRef>
-          </c:tx>
-          <c:spPr>
-            <a:solidFill>
-              <a:srgbClr val="0D9488"/>
-            </a:solidFill>
-            <a:effectLst/>
-          </c:spPr>
-          <c:invertIfNegative val="0"/>
-          <c:dLbls>
-            <c:numFmt formatCode="0.0" sourceLinked="0"/>
-            <c:txPr>
-              <a:bodyPr/>
-              <a:lstStyle/>
-              <a:p>
-                <a:pPr>
-                  <a:defRPr b="0" i="0" strike="noStrike" sz="1300" u="none">
-                    <a:solidFill>
-                      <a:srgbClr val="12303A"/>
-                    </a:solidFill>
-                    <a:latin typeface="+mn-lt"/>
-                  </a:defRPr>
-                </a:pPr>
-              </a:p>
-            </c:txPr>
-            <c:showLegendKey val="0"/>
-            <c:showVal val="1"/>
-            <c:showCatName val="0"/>
-            <c:showSerName val="0"/>
-            <c:showPercent val="0"/>
-            <c:showBubbleSize val="0"/>
-            <c:showLeaderLines val="0"/>
-          </c:dLbls>
-          <c:cat>
-            <c:multiLvlStrRef>
-              <c:f>Sheet1!$A$2:$A$4</c:f>
-              <c:multiLvlStrCache>
-                <c:ptCount val="3"/>
-                <c:lvl>
-                  <c:pt idx="0">
-                    <c:v>NusaX (400)</c:v>
-                  </c:pt>
-                  <c:pt idx="1">
-                    <c:v>FLORES (1,012)</c:v>
-                  </c:pt>
-                  <c:pt idx="2">
-                    <c:v>Hikayat (143)</c:v>
-                  </c:pt>
-                </c:lvl>
-              </c:multiLvlStrCache>
-            </c:multiLvlStrRef>
-          </c:cat>
-          <c:val>
-            <c:numRef>
-              <c:f>Sheet1!$C$2:$C$4</c:f>
-              <c:numCache>
-                <c:formatCode>General</c:formatCode>
-                <c:ptCount val="3"/>
-                <c:pt idx="0">
-                  <c:v>57.15</c:v>
-                </c:pt>
-                <c:pt idx="1">
-                  <c:v>52.81</c:v>
-                </c:pt>
-                <c:pt idx="2">
-                  <c:v>60.92</c:v>
-                </c:pt>
-              </c:numCache>
-            </c:numRef>
-          </c:val>
-        </c:ser>
-        <c:dLbls>
-          <c:numFmt formatCode="0.0" sourceLinked="0"/>
-          <c:txPr>
-            <a:bodyPr/>
-            <a:lstStyle/>
-            <a:p>
-              <a:pPr>
-                <a:defRPr b="0" i="0" strike="noStrike" sz="1300" u="none">
-                  <a:solidFill>
-                    <a:srgbClr val="12303A"/>
-                  </a:solidFill>
-                  <a:latin typeface="+mn-lt"/>
-                </a:defRPr>
-              </a:pPr>
-            </a:p>
-          </c:txPr>
-          <c:showLegendKey val="0"/>
-          <c:showVal val="1"/>
-          <c:showCatName val="0"/>
-          <c:showSerName val="0"/>
-          <c:showPercent val="0"/>
-          <c:showBubbleSize val="0"/>
-          <c:showLeaderLines val="0"/>
-        </c:dLbls>
-        <c:gapWidth val="60"/>
-        <c:overlap val="0"/>
-        <c:axId val="2094734554"/>
-        <c:axId val="2094734552"/>
-        <c:axId val="2094734556"/>
-      </c:barChart>
-      <c:catAx>
-        <c:axId val="2094734554"/>
-        <c:scaling>
-          <c:orientation val="minMax"/>
-        </c:scaling>
-        <c:delete val="0"/>
-        <c:axPos val="b"/>
-        <c:numFmt formatCode="General" sourceLinked="1"/>
-        <c:majorTickMark val="out"/>
-        <c:minorTickMark val="none"/>
-        <c:tickLblPos val="low"/>
-        <c:spPr>
-          <a:ln w="12700" cap="flat">
-            <a:solidFill>
-              <a:srgbClr val="888888"/>
-            </a:solidFill>
-            <a:prstDash val="solid"/>
-            <a:round/>
-          </a:ln>
-        </c:spPr>
-        <c:txPr>
-          <a:bodyPr/>
-          <a:lstStyle/>
-          <a:p>
-            <a:pPr>
-              <a:defRPr sz="1300" b="0" i="0" u="none" strike="noStrike">
-                <a:solidFill>
-                  <a:srgbClr val="12303A"/>
-                </a:solidFill>
-                <a:latin typeface="+mn-lt"/>
-              </a:defRPr>
-            </a:pPr>
-            <a:endParaRPr lang="en-US"/>
-          </a:p>
-        </c:txPr>
-        <c:crossAx val="2094734552"/>
-        <c:crosses val="autoZero"/>
-        <c:auto val="1"/>
-        <c:lblAlgn val="ctr"/>
-        <c:noMultiLvlLbl val="1"/>
-      </c:catAx>
-      <c:valAx>
-        <c:axId val="2094734552"/>
-        <c:scaling>
-          <c:orientation val="minMax"/>
-          <c:max val="70"/>
-          <c:min val="0"/>
-        </c:scaling>
-        <c:delete val="0"/>
-        <c:axPos val="l"/>
-        <c:majorGridlines>
-          <c:spPr>
-            <a:ln w="6350" cap="flat">
-              <a:solidFill>
-                <a:srgbClr val="D5E3E3"/>
-              </a:solidFill>
-              <a:prstDash val="solid"/>
-              <a:round/>
-            </a:ln>
-          </c:spPr>
-        </c:majorGridlines>
-        <c:numFmt formatCode="General" sourceLinked="0"/>
-        <c:majorTickMark val="out"/>
-        <c:minorTickMark val="none"/>
-        <c:tickLblPos val="nextTo"/>
-        <c:spPr>
-          <a:ln w="12700" cap="flat">
-            <a:solidFill>
-              <a:srgbClr val="888888"/>
-            </a:solidFill>
-            <a:prstDash val="solid"/>
-            <a:round/>
-          </a:ln>
-        </c:spPr>
-        <c:txPr>
-          <a:bodyPr/>
-          <a:lstStyle/>
-          <a:p>
-            <a:pPr>
-              <a:defRPr sz="1200" b="0" i="0" u="none" strike="noStrike">
-                <a:solidFill>
-                  <a:srgbClr val="4F6F7A"/>
-                </a:solidFill>
-                <a:latin typeface="+mn-lt"/>
-              </a:defRPr>
-            </a:pPr>
-            <a:endParaRPr lang="en-US"/>
-          </a:p>
-        </c:txPr>
-        <c:crossAx val="2094734554"/>
-        <c:crosses val="autoZero"/>
-        <c:crossBetween val="between"/>
-      </c:valAx>
-      <c:spPr>
-        <a:noFill/>
-        <a:ln>
-          <a:noFill/>
-        </a:ln>
-        <a:effectLst/>
-      </c:spPr>
-    </c:plotArea>
-    <c:legend>
-      <c:legendPos val="b"/>
-      <c:overlay val="0"/>
-      <c:txPr>
-        <a:bodyPr/>
-        <a:lstStyle/>
-        <a:p>
-          <a:pPr>
-            <a:defRPr sz="1300">
-              <a:solidFill>
-                <a:srgbClr val="12303A"/>
-              </a:solidFill>
-              <a:latin typeface="+mn-lt"/>
-              <a:cs typeface="+mn-lt"/>
-            </a:defRPr>
-          </a:pPr>
-          <a:endParaRPr lang="en-US"/>
-        </a:p>
-      </c:txPr>
-    </c:legend>
-    <c:plotVisOnly val="1"/>
-    <c:dispBlanksAs val="span"/>
-  </c:chart>
-  <c:spPr>
-    <a:noFill/>
-    <a:ln>
-      <a:noFill/>
-    </a:ln>
-    <a:effectLst/>
-  </c:spPr>
-  <c:externalData r:id="rId1">
-    <c:autoUpdate val="0"/>
-  </c:externalData>
-</c:chartSpace>
-</file>
-
-<file path=ppt/charts/chart4.xml><?xml version="1.0" encoding="utf-8"?>
-<c:chartSpace xmlns:c="http://schemas.openxmlformats.org/drawingml/2006/chart" xmlns:a="http://schemas.openxmlformats.org/drawingml/2006/main" xmlns:r="http://schemas.openxmlformats.org/officeDocument/2006/relationships">
-  <c:date1904 val="0"/>
-  <c:roundedCorners val="1"/>
-  <c:chart>
-    <c:title>
-      <c:tx>
-        <c:rich>
-          <a:bodyPr/>
-          <a:lstStyle/>
-          <a:p>
-            <a:pPr>
-              <a:defRPr sz="1400" b="0" i="0" u="none" strike="noStrike">
-                <a:solidFill>
-                  <a:srgbClr val="12303A"/>
-                </a:solidFill>
-                <a:latin typeface="+mj-lt"/>
-              </a:defRPr>
-            </a:pPr>
-            <a:r>
-              <a:rPr sz="1400" b="0" i="0" u="none" strike="noStrike">
-                <a:solidFill>
-                  <a:srgbClr val="12303A"/>
-                </a:solidFill>
-                <a:latin typeface="+mj-lt"/>
-              </a:rPr>
-              <a:t>chrF++ on the 400 NusaX test sentences</a:t>
-            </a:r>
-          </a:p>
-        </c:rich>
-      </c:tx>
-      <c:layout/>
-      <c:overlay val="0"/>
-    </c:title>
-    <c:autoTitleDeleted val="0"/>
-    <c:plotArea>
-      <c:layout/>
-      <c:barChart>
-        <c:barDir val="bar"/>
-        <c:grouping val="clustered"/>
-        <c:varyColors val="0"/>
-        <c:ser>
-          <c:idx val="0"/>
-          <c:order val="0"/>
-          <c:tx>
-            <c:strRef>
-              <c:f>Sheet1!$B$1</c:f>
-              <c:strCache>
-                <c:ptCount val="1"/>
-                <c:pt idx="0">
-                  <c:v>chrF++ on NusaX</c:v>
-                </c:pt>
-              </c:strCache>
-            </c:strRef>
-          </c:tx>
-          <c:spPr>
-            <a:solidFill>
-              <a:srgbClr val="9DB4BB"/>
-            </a:solidFill>
-            <a:effectLst/>
-          </c:spPr>
-          <c:invertIfNegative val="0"/>
-          <c:dLbls>
-            <c:numFmt formatCode="0.0" sourceLinked="0"/>
-            <c:txPr>
-              <a:bodyPr/>
-              <a:lstStyle/>
-              <a:p>
-                <a:pPr>
-                  <a:defRPr b="0" i="0" strike="noStrike" sz="1400" u="none">
-                    <a:solidFill>
-                      <a:srgbClr val="12303A"/>
-                    </a:solidFill>
-                    <a:latin typeface="+mn-lt"/>
-                  </a:defRPr>
-                </a:pPr>
-              </a:p>
-            </c:txPr>
-            <c:showLegendKey val="0"/>
-            <c:showVal val="1"/>
-            <c:showCatName val="0"/>
-            <c:showSerName val="0"/>
-            <c:showPercent val="0"/>
-            <c:showBubbleSize val="0"/>
-            <c:showLeaderLines val="0"/>
-          </c:dLbls>
-          <c:dPt>
-            <c:idx val="0"/>
-            <c:invertIfNegative val="0"/>
-            <c:bubble3D val="0"/>
-            <c:spPr>
-              <a:solidFill>
-                <a:srgbClr val="9DB4BB"/>
-              </a:solidFill>
-              <a:effectLst/>
-            </c:spPr>
-          </c:dPt>
-          <c:dPt>
-            <c:idx val="1"/>
-            <c:invertIfNegative val="0"/>
-            <c:bubble3D val="0"/>
-            <c:spPr>
-              <a:solidFill>
-                <a:srgbClr val="4F6F7A"/>
-              </a:solidFill>
-              <a:effectLst/>
-            </c:spPr>
-          </c:dPt>
-          <c:dPt>
-            <c:idx val="2"/>
-            <c:invertIfNegative val="0"/>
-            <c:bubble3D val="0"/>
-            <c:spPr>
-              <a:solidFill>
-                <a:srgbClr val="4F6F7A"/>
-              </a:solidFill>
-              <a:effectLst/>
-            </c:spPr>
-          </c:dPt>
-          <c:dPt>
-            <c:idx val="3"/>
-            <c:invertIfNegative val="0"/>
-            <c:bubble3D val="0"/>
-            <c:spPr>
-              <a:solidFill>
-                <a:srgbClr val="9DB4BB"/>
-              </a:solidFill>
-              <a:effectLst/>
-            </c:spPr>
-          </c:dPt>
-          <c:dPt>
-            <c:idx val="4"/>
-            <c:invertIfNegative val="0"/>
-            <c:bubble3D val="0"/>
-            <c:spPr>
-              <a:solidFill>
-                <a:srgbClr val="0D9488"/>
-              </a:solidFill>
-              <a:effectLst/>
-            </c:spPr>
-          </c:dPt>
-          <c:cat>
-            <c:multiLvlStrRef>
-              <c:f>Sheet1!$A$2:$A$6</c:f>
-              <c:multiLvlStrCache>
-                <c:ptCount val="5"/>
-                <c:lvl>
-                  <c:pt idx="0">
-                    <c:v>Copy (nothing translated)</c:v>
-                  </c:pt>
-                  <c:pt idx="1">
-                    <c:v>Direct (dictionary)</c:v>
-                  </c:pt>
-                  <c:pt idx="2">
-                    <c:v>Transfer (rules)</c:v>
-                  </c:pt>
-                  <c:pt idx="3">
-                    <c:v>Base NLLB-200</c:v>
-                  </c:pt>
-                  <c:pt idx="4">
-                    <c:v>Fine-tuned NLLB</c:v>
-                  </c:pt>
-                </c:lvl>
-              </c:multiLvlStrCache>
-            </c:multiLvlStrRef>
-          </c:cat>
-          <c:val>
-            <c:numRef>
-              <c:f>Sheet1!$B$2:$B$6</c:f>
-              <c:numCache>
-                <c:formatCode>General</c:formatCode>
-                <c:ptCount val="5"/>
-                <c:pt idx="0">
-                  <c:v>32</c:v>
-                </c:pt>
-                <c:pt idx="1">
-                  <c:v>35.5</c:v>
-                </c:pt>
-                <c:pt idx="2">
-                  <c:v>39.2</c:v>
-                </c:pt>
-                <c:pt idx="3">
-                  <c:v>38.7</c:v>
-                </c:pt>
-                <c:pt idx="4">
-                  <c:v>57.1</c:v>
-                </c:pt>
-              </c:numCache>
-            </c:numRef>
-          </c:val>
-        </c:ser>
-        <c:dLbls>
-          <c:numFmt formatCode="0.0" sourceLinked="0"/>
-          <c:txPr>
-            <a:bodyPr/>
-            <a:lstStyle/>
-            <a:p>
-              <a:pPr>
-                <a:defRPr b="0" i="0" strike="noStrike" sz="1400" u="none">
-                  <a:solidFill>
-                    <a:srgbClr val="12303A"/>
-                  </a:solidFill>
-                  <a:latin typeface="+mn-lt"/>
-                </a:defRPr>
-              </a:pPr>
-            </a:p>
-          </c:txPr>
-          <c:showLegendKey val="0"/>
-          <c:showVal val="1"/>
-          <c:showCatName val="0"/>
-          <c:showSerName val="0"/>
-          <c:showPercent val="0"/>
-          <c:showBubbleSize val="0"/>
-          <c:showLeaderLines val="0"/>
-        </c:dLbls>
-        <c:gapWidth val="40"/>
-        <c:overlap val="0"/>
-        <c:axId val="2094734554"/>
-        <c:axId val="2094734552"/>
-        <c:axId val="2094734556"/>
-      </c:barChart>
-      <c:catAx>
-        <c:axId val="2094734554"/>
-        <c:scaling>
-          <c:orientation val="maxMin"/>
-        </c:scaling>
-        <c:delete val="0"/>
-        <c:axPos val="l"/>
-        <c:numFmt formatCode="General" sourceLinked="1"/>
-        <c:majorTickMark val="out"/>
-        <c:minorTickMark val="none"/>
-        <c:tickLblPos val="nextTo"/>
-        <c:spPr>
-          <a:ln w="12700" cap="flat">
-            <a:solidFill>
-              <a:srgbClr val="888888"/>
-            </a:solidFill>
-            <a:prstDash val="solid"/>
-            <a:round/>
-          </a:ln>
-        </c:spPr>
-        <c:txPr>
-          <a:bodyPr/>
-          <a:lstStyle/>
-          <a:p>
-            <a:pPr>
-              <a:defRPr sz="1300" b="0" i="0" u="none" strike="noStrike">
-                <a:solidFill>
-                  <a:srgbClr val="12303A"/>
-                </a:solidFill>
-                <a:latin typeface="+mn-lt"/>
-              </a:defRPr>
-            </a:pPr>
-            <a:endParaRPr lang="en-US"/>
-          </a:p>
-        </c:txPr>
-        <c:crossAx val="2094734552"/>
-        <c:crosses val="autoZero"/>
-        <c:auto val="1"/>
-        <c:lblAlgn val="ctr"/>
-        <c:noMultiLvlLbl val="1"/>
-      </c:catAx>
-      <c:valAx>
-        <c:axId val="2094734552"/>
-        <c:scaling>
-          <c:orientation val="minMax"/>
-          <c:max val="65"/>
-          <c:min val="0"/>
-        </c:scaling>
-        <c:delete val="1"/>
-        <c:axPos val="b"/>
-        <c:numFmt formatCode="General" sourceLinked="0"/>
-        <c:majorTickMark val="out"/>
-        <c:minorTickMark val="none"/>
-        <c:tickLblPos val="low"/>
-        <c:spPr>
-          <a:ln w="12700" cap="flat">
-            <a:solidFill>
-              <a:srgbClr val="888888"/>
-            </a:solidFill>
-            <a:prstDash val="solid"/>
-            <a:round/>
-          </a:ln>
-        </c:spPr>
-        <c:txPr>
-          <a:bodyPr/>
-          <a:lstStyle/>
-          <a:p>
-            <a:pPr>
-              <a:defRPr sz="1200" b="0" i="0" u="none" strike="noStrike">
-                <a:solidFill>
-                  <a:srgbClr val="000000"/>
-                </a:solidFill>
-                <a:latin typeface="+mn-lt"/>
-              </a:defRPr>
-            </a:pPr>
-            <a:endParaRPr lang="en-US"/>
-          </a:p>
-        </c:txPr>
-        <c:crossAx val="2094734554"/>
-        <c:crosses val="autoZero"/>
-        <c:crossBetween val="between"/>
-      </c:valAx>
-      <c:spPr>
-        <a:noFill/>
-        <a:ln>
-          <a:noFill/>
-        </a:ln>
-        <a:effectLst/>
-      </c:spPr>
-    </c:plotArea>
-    <c:plotVisOnly val="1"/>
-    <c:dispBlanksAs val="span"/>
-  </c:chart>
-  <c:spPr>
-    <a:noFill/>
-    <a:ln>
-      <a:noFill/>
-    </a:ln>
-    <a:effectLst/>
-  </c:spPr>
-  <c:externalData r:id="rId1">
-    <c:autoUpdate val="0"/>
-  </c:externalData>
-</c:chartSpace>
 </file>
 
 <file path=ppt/notesMasters/notesMaster1.xml><?xml version="1.0" encoding="utf-8"?>
@@ -3989,8 +2716,8 @@
         </p:nvSpPr>
         <p:spPr>
           <a:xfrm>
-            <a:off x="731520" y="2011680"/>
-            <a:ext cx="7498080" cy="2011680"/>
+            <a:off x="731520" y="1828800"/>
+            <a:ext cx="7132320" cy="2194560"/>
           </a:xfrm>
           <a:prstGeom prst="rect">
             <a:avLst/>
@@ -4003,7 +2730,7 @@
           <a:lstStyle>
             <a:lvl1pPr algn="l" indent="0" marL="0">
               <a:buNone/>
-              <a:defRPr lang="en-US" sz="5000" b="1" dirty="0">
+              <a:defRPr lang="en-US" sz="4400" b="1" dirty="0">
                 <a:solidFill>
                   <a:schemeClr val="bg1"/>
                 </a:solidFill>
@@ -4014,7 +2741,7 @@
             <a:pPr algn="l" indent="0" marL="0">
               <a:buNone/>
             </a:pPr>
-            <a:endParaRPr lang="en-US" sz="5000" dirty="0"/>
+            <a:endParaRPr lang="en-US" sz="4400" dirty="0"/>
           </a:p>
         </p:txBody>
       </p:sp>
@@ -4568,8 +3295,8 @@
         </p:nvSpPr>
         <p:spPr>
           <a:xfrm>
-            <a:off x="731520" y="2011680"/>
-            <a:ext cx="7498080" cy="2011680"/>
+            <a:off x="731520" y="1828800"/>
+            <a:ext cx="7132320" cy="2194560"/>
           </a:xfrm>
           <a:prstGeom prst="rect">
             <a:avLst/>
@@ -4585,14 +3312,14 @@
               <a:buNone/>
             </a:pPr>
             <a:r>
-              <a:rPr lang="en-US" sz="5000" b="1" dirty="0">
+              <a:rPr lang="en-US" sz="4400" b="1" dirty="0">
                 <a:solidFill>
                   <a:schemeClr val="bg1"/>
                 </a:solidFill>
               </a:rPr>
               <a:t>Acehnese → Indonesian neural translator</a:t>
             </a:r>
-            <a:endParaRPr lang="en-US" sz="5000" dirty="0"/>
+            <a:endParaRPr lang="en-US" sz="4400" dirty="0"/>
           </a:p>
         </p:txBody>
       </p:sp>
@@ -4780,9 +3507,9 @@
                 <a:solidFill>
                   <a:schemeClr val="bg1"/>
                 </a:solidFill>
-                <a:latin typeface="Cambria" pitchFamily="34" charset="0"/>
-                <a:ea typeface="Cambria" pitchFamily="34" charset="-122"/>
-                <a:cs typeface="Cambria" pitchFamily="34" charset="-120"/>
+                <a:latin typeface="Georgia" pitchFamily="34" charset="0"/>
+                <a:ea typeface="Georgia" pitchFamily="34" charset="-122"/>
+                <a:cs typeface="Georgia" pitchFamily="34" charset="-120"/>
               </a:rPr>
               <a:t>17,547</a:t>
             </a:r>
@@ -4855,9 +3582,9 @@
                 <a:solidFill>
                   <a:schemeClr val="tx2"/>
                 </a:solidFill>
-                <a:latin typeface="Cambria" pitchFamily="34" charset="0"/>
-                <a:ea typeface="Cambria" pitchFamily="34" charset="-122"/>
-                <a:cs typeface="Cambria" pitchFamily="34" charset="-120"/>
+                <a:latin typeface="Georgia" pitchFamily="34" charset="0"/>
+                <a:ea typeface="Georgia" pitchFamily="34" charset="-122"/>
+                <a:cs typeface="Georgia" pitchFamily="34" charset="-120"/>
               </a:rPr>
               <a:t>57.1</a:t>
             </a:r>
@@ -5926,9 +4653,9 @@
                 <a:solidFill>
                   <a:schemeClr val="accent1"/>
                 </a:solidFill>
-                <a:latin typeface="Cambria" pitchFamily="34" charset="0"/>
-                <a:ea typeface="Cambria" pitchFamily="34" charset="-122"/>
-                <a:cs typeface="Cambria" pitchFamily="34" charset="-120"/>
+                <a:latin typeface="Georgia" pitchFamily="34" charset="0"/>
+                <a:ea typeface="Georgia" pitchFamily="34" charset="-122"/>
+                <a:cs typeface="Georgia" pitchFamily="34" charset="-120"/>
               </a:rPr>
               <a:t>1</a:t>
             </a:r>
@@ -6028,9 +4755,9 @@
                 <a:solidFill>
                   <a:schemeClr val="accent1"/>
                 </a:solidFill>
-                <a:latin typeface="Cambria" pitchFamily="34" charset="0"/>
-                <a:ea typeface="Cambria" pitchFamily="34" charset="-122"/>
-                <a:cs typeface="Cambria" pitchFamily="34" charset="-120"/>
+                <a:latin typeface="Georgia" pitchFamily="34" charset="0"/>
+                <a:ea typeface="Georgia" pitchFamily="34" charset="-122"/>
+                <a:cs typeface="Georgia" pitchFamily="34" charset="-120"/>
               </a:rPr>
               <a:t>2</a:t>
             </a:r>
@@ -6130,9 +4857,9 @@
                 <a:solidFill>
                   <a:schemeClr val="accent1"/>
                 </a:solidFill>
-                <a:latin typeface="Cambria" pitchFamily="34" charset="0"/>
-                <a:ea typeface="Cambria" pitchFamily="34" charset="-122"/>
-                <a:cs typeface="Cambria" pitchFamily="34" charset="-120"/>
+                <a:latin typeface="Georgia" pitchFamily="34" charset="0"/>
+                <a:ea typeface="Georgia" pitchFamily="34" charset="-122"/>
+                <a:cs typeface="Georgia" pitchFamily="34" charset="-120"/>
               </a:rPr>
               <a:t>3</a:t>
             </a:r>
@@ -6232,9 +4959,9 @@
                 <a:solidFill>
                   <a:schemeClr val="accent1"/>
                 </a:solidFill>
-                <a:latin typeface="Cambria" pitchFamily="34" charset="0"/>
-                <a:ea typeface="Cambria" pitchFamily="34" charset="-122"/>
-                <a:cs typeface="Cambria" pitchFamily="34" charset="-120"/>
+                <a:latin typeface="Georgia" pitchFamily="34" charset="0"/>
+                <a:ea typeface="Georgia" pitchFamily="34" charset="-122"/>
+                <a:cs typeface="Georgia" pitchFamily="34" charset="-120"/>
               </a:rPr>
               <a:t>4</a:t>
             </a:r>
@@ -6334,9 +5061,9 @@
                 <a:solidFill>
                   <a:schemeClr val="accent1"/>
                 </a:solidFill>
-                <a:latin typeface="Cambria" pitchFamily="34" charset="0"/>
-                <a:ea typeface="Cambria" pitchFamily="34" charset="-122"/>
-                <a:cs typeface="Cambria" pitchFamily="34" charset="-120"/>
+                <a:latin typeface="Georgia" pitchFamily="34" charset="0"/>
+                <a:ea typeface="Georgia" pitchFamily="34" charset="-122"/>
+                <a:cs typeface="Georgia" pitchFamily="34" charset="-120"/>
               </a:rPr>
               <a:t>5</a:t>
             </a:r>
@@ -6436,9 +5163,9 @@
                 <a:solidFill>
                   <a:srgbClr val="FFFFFF"/>
                 </a:solidFill>
-                <a:latin typeface="Cambria" pitchFamily="34" charset="0"/>
-                <a:ea typeface="Cambria" pitchFamily="34" charset="-122"/>
-                <a:cs typeface="Cambria" pitchFamily="34" charset="-120"/>
+                <a:latin typeface="Georgia" pitchFamily="34" charset="0"/>
+                <a:ea typeface="Georgia" pitchFamily="34" charset="-122"/>
+                <a:cs typeface="Georgia" pitchFamily="34" charset="-120"/>
               </a:rPr>
               <a:t>17,547</a:t>
             </a:r>
@@ -6538,9 +5265,9 @@
                 <a:solidFill>
                   <a:srgbClr val="12303A"/>
                 </a:solidFill>
-                <a:latin typeface="Cambria" pitchFamily="34" charset="0"/>
-                <a:ea typeface="Cambria" pitchFamily="34" charset="-122"/>
-                <a:cs typeface="Cambria" pitchFamily="34" charset="-120"/>
+                <a:latin typeface="Georgia" pitchFamily="34" charset="0"/>
+                <a:ea typeface="Georgia" pitchFamily="34" charset="-122"/>
+                <a:cs typeface="Georgia" pitchFamily="34" charset="-120"/>
               </a:rPr>
               <a:t>379</a:t>
             </a:r>
@@ -6640,9 +5367,9 @@
                 <a:solidFill>
                   <a:srgbClr val="FFFFFF"/>
                 </a:solidFill>
-                <a:latin typeface="Cambria" pitchFamily="34" charset="0"/>
-                <a:ea typeface="Cambria" pitchFamily="34" charset="-122"/>
-                <a:cs typeface="Cambria" pitchFamily="34" charset="-120"/>
+                <a:latin typeface="Georgia" pitchFamily="34" charset="0"/>
+                <a:ea typeface="Georgia" pitchFamily="34" charset="-122"/>
+                <a:cs typeface="Georgia" pitchFamily="34" charset="-120"/>
               </a:rPr>
               <a:t>1,555</a:t>
             </a:r>
@@ -6867,14 +5594,14 @@
                         <a:buNone/>
                       </a:pPr>
                       <a:r>
-                        <a:rPr lang="en-US" sz="1200" b="1" dirty="0">
+                        <a:rPr lang="en-US" sz="1100" b="1" dirty="0">
                           <a:solidFill>
                             <a:srgbClr val="FFFFFF"/>
                           </a:solidFill>
                         </a:rPr>
                         <a:t>Setting</a:t>
                       </a:r>
-                      <a:endParaRPr lang="en-US" sz="1200" dirty="0"/>
+                      <a:endParaRPr lang="en-US" sz="1100" dirty="0"/>
                     </a:p>
                   </a:txBody>
                   <a:tcPr marL="91440" marR="91440" marT="36576" marB="36576" anchor="ctr">
@@ -6928,14 +5655,14 @@
                         <a:buNone/>
                       </a:pPr>
                       <a:r>
-                        <a:rPr lang="en-US" sz="1200" b="1" dirty="0">
+                        <a:rPr lang="en-US" sz="1100" b="1" dirty="0">
                           <a:solidFill>
                             <a:srgbClr val="FFFFFF"/>
                           </a:solidFill>
                         </a:rPr>
                         <a:t>Value</a:t>
                       </a:r>
-                      <a:endParaRPr lang="en-US" sz="1200" dirty="0"/>
+                      <a:endParaRPr lang="en-US" sz="1100" dirty="0"/>
                     </a:p>
                   </a:txBody>
                   <a:tcPr marL="91440" marR="91440" marT="36576" marB="36576" anchor="ctr">
@@ -6989,14 +5716,14 @@
                         <a:buNone/>
                       </a:pPr>
                       <a:r>
-                        <a:rPr lang="en-US" sz="1200" b="1" dirty="0">
+                        <a:rPr lang="en-US" sz="1100" b="1" dirty="0">
                           <a:solidFill>
                             <a:srgbClr val="FFFFFF"/>
                           </a:solidFill>
                         </a:rPr>
                         <a:t>Why</a:t>
                       </a:r>
-                      <a:endParaRPr lang="en-US" sz="1200" dirty="0"/>
+                      <a:endParaRPr lang="en-US" sz="1100" dirty="0"/>
                     </a:p>
                   </a:txBody>
                   <a:tcPr marL="91440" marR="91440" marT="36576" marB="36576" anchor="ctr">
@@ -8670,25 +7397,917 @@
           </a:p>
         </p:txBody>
       </p:sp>
-      <p:graphicFrame>
-        <p:nvGraphicFramePr>
-          <p:cNvPr id="4" name="Chart 0" descr=""/>
-          <p:cNvGraphicFramePr/>
-          <p:nvPr/>
-        </p:nvGraphicFramePr>
-        <p:xfrm>
-          <a:off x="548640" y="1371600"/>
-          <a:ext cx="7223760" cy="4846320"/>
-        </p:xfrm>
-        <a:graphic xmlns:a="http://schemas.openxmlformats.org/drawingml/2006/main">
-          <a:graphicData uri="http://schemas.openxmlformats.org/drawingml/2006/chart">
-            <c:chart xmlns:c="http://schemas.openxmlformats.org/drawingml/2006/chart" r:id="rId1"/>
-          </a:graphicData>
-        </a:graphic>
-      </p:graphicFrame>
-      <p:sp>
-        <p:nvSpPr>
-          <p:cNvPr id="5" name="Stat card"/>
+      <p:sp>
+        <p:nvSpPr>
+          <p:cNvPr id="4" name="Text 2"/>
+          <p:cNvSpPr txBox="1"/>
+          <p:nvPr/>
+        </p:nvSpPr>
+        <p:spPr>
+          <a:xfrm>
+            <a:off x="548640" y="1371600"/>
+            <a:ext cx="7223760" cy="365760"/>
+          </a:xfrm>
+          <a:prstGeom prst="rect">
+            <a:avLst/>
+          </a:prstGeom>
+          <a:noFill/>
+          <a:ln/>
+        </p:spPr>
+        <p:txBody>
+          <a:bodyPr wrap="square" lIns="0" tIns="0" rIns="0" bIns="0" rtlCol="0" anchor="ctr"/>
+          <a:lstStyle/>
+          <a:p>
+            <a:pPr indent="0" marL="0">
+              <a:buNone/>
+            </a:pPr>
+            <a:r>
+              <a:rPr lang="en-US" sz="1400" b="1" dirty="0">
+                <a:solidFill>
+                  <a:schemeClr val="tx1"/>
+                </a:solidFill>
+              </a:rPr>
+              <a:t>Validation chrF++ by epoch</a:t>
+            </a:r>
+            <a:endParaRPr lang="en-US" sz="1400" dirty="0"/>
+          </a:p>
+        </p:txBody>
+      </p:sp>
+      <p:sp>
+        <p:nvSpPr>
+          <p:cNvPr id="5" name="Gridline"/>
+          <p:cNvSpPr/>
+          <p:nvPr/>
+        </p:nvSpPr>
+        <p:spPr>
+          <a:xfrm>
+            <a:off x="1097280" y="5760720"/>
+            <a:ext cx="6675120" cy="0"/>
+          </a:xfrm>
+          <a:prstGeom prst="line">
+            <a:avLst/>
+          </a:prstGeom>
+          <a:noFill/>
+          <a:ln w="9525">
+            <a:solidFill>
+              <a:srgbClr val="D5E3E3"/>
+            </a:solidFill>
+            <a:prstDash val="solid"/>
+          </a:ln>
+        </p:spPr>
+      </p:sp>
+      <p:sp>
+        <p:nvSpPr>
+          <p:cNvPr id="6" name="Text 4"/>
+          <p:cNvSpPr txBox="1"/>
+          <p:nvPr/>
+        </p:nvSpPr>
+        <p:spPr>
+          <a:xfrm>
+            <a:off x="548640" y="5623560"/>
+            <a:ext cx="457200" cy="274320"/>
+          </a:xfrm>
+          <a:prstGeom prst="rect">
+            <a:avLst/>
+          </a:prstGeom>
+          <a:noFill/>
+          <a:ln/>
+        </p:spPr>
+        <p:txBody>
+          <a:bodyPr wrap="square" lIns="0" tIns="0" rIns="0" bIns="0" rtlCol="0" anchor="ctr"/>
+          <a:lstStyle/>
+          <a:p>
+            <a:pPr algn="r" indent="0" marL="0">
+              <a:buNone/>
+            </a:pPr>
+            <a:r>
+              <a:rPr lang="en-US" sz="1100" dirty="0">
+                <a:solidFill>
+                  <a:schemeClr val="accent5"/>
+                </a:solidFill>
+              </a:rPr>
+              <a:t>50</a:t>
+            </a:r>
+            <a:endParaRPr lang="en-US" sz="1100" dirty="0"/>
+          </a:p>
+        </p:txBody>
+      </p:sp>
+      <p:sp>
+        <p:nvSpPr>
+          <p:cNvPr id="7" name="Gridline"/>
+          <p:cNvSpPr/>
+          <p:nvPr/>
+        </p:nvSpPr>
+        <p:spPr>
+          <a:xfrm>
+            <a:off x="1097280" y="4880610"/>
+            <a:ext cx="6675120" cy="0"/>
+          </a:xfrm>
+          <a:prstGeom prst="line">
+            <a:avLst/>
+          </a:prstGeom>
+          <a:noFill/>
+          <a:ln w="9525">
+            <a:solidFill>
+              <a:srgbClr val="D5E3E3"/>
+            </a:solidFill>
+            <a:prstDash val="solid"/>
+          </a:ln>
+        </p:spPr>
+      </p:sp>
+      <p:sp>
+        <p:nvSpPr>
+          <p:cNvPr id="8" name="Text 6"/>
+          <p:cNvSpPr txBox="1"/>
+          <p:nvPr/>
+        </p:nvSpPr>
+        <p:spPr>
+          <a:xfrm>
+            <a:off x="548640" y="4743450"/>
+            <a:ext cx="457200" cy="274320"/>
+          </a:xfrm>
+          <a:prstGeom prst="rect">
+            <a:avLst/>
+          </a:prstGeom>
+          <a:noFill/>
+          <a:ln/>
+        </p:spPr>
+        <p:txBody>
+          <a:bodyPr wrap="square" lIns="0" tIns="0" rIns="0" bIns="0" rtlCol="0" anchor="ctr"/>
+          <a:lstStyle/>
+          <a:p>
+            <a:pPr algn="r" indent="0" marL="0">
+              <a:buNone/>
+            </a:pPr>
+            <a:r>
+              <a:rPr lang="en-US" sz="1100" dirty="0">
+                <a:solidFill>
+                  <a:schemeClr val="accent5"/>
+                </a:solidFill>
+              </a:rPr>
+              <a:t>52</a:t>
+            </a:r>
+            <a:endParaRPr lang="en-US" sz="1100" dirty="0"/>
+          </a:p>
+        </p:txBody>
+      </p:sp>
+      <p:sp>
+        <p:nvSpPr>
+          <p:cNvPr id="9" name="Gridline"/>
+          <p:cNvSpPr/>
+          <p:nvPr/>
+        </p:nvSpPr>
+        <p:spPr>
+          <a:xfrm>
+            <a:off x="1097280" y="4000500"/>
+            <a:ext cx="6675120" cy="0"/>
+          </a:xfrm>
+          <a:prstGeom prst="line">
+            <a:avLst/>
+          </a:prstGeom>
+          <a:noFill/>
+          <a:ln w="9525">
+            <a:solidFill>
+              <a:srgbClr val="D5E3E3"/>
+            </a:solidFill>
+            <a:prstDash val="solid"/>
+          </a:ln>
+        </p:spPr>
+      </p:sp>
+      <p:sp>
+        <p:nvSpPr>
+          <p:cNvPr id="10" name="Text 8"/>
+          <p:cNvSpPr txBox="1"/>
+          <p:nvPr/>
+        </p:nvSpPr>
+        <p:spPr>
+          <a:xfrm>
+            <a:off x="548640" y="3863340"/>
+            <a:ext cx="457200" cy="274320"/>
+          </a:xfrm>
+          <a:prstGeom prst="rect">
+            <a:avLst/>
+          </a:prstGeom>
+          <a:noFill/>
+          <a:ln/>
+        </p:spPr>
+        <p:txBody>
+          <a:bodyPr wrap="square" lIns="0" tIns="0" rIns="0" bIns="0" rtlCol="0" anchor="ctr"/>
+          <a:lstStyle/>
+          <a:p>
+            <a:pPr algn="r" indent="0" marL="0">
+              <a:buNone/>
+            </a:pPr>
+            <a:r>
+              <a:rPr lang="en-US" sz="1100" dirty="0">
+                <a:solidFill>
+                  <a:schemeClr val="accent5"/>
+                </a:solidFill>
+              </a:rPr>
+              <a:t>54</a:t>
+            </a:r>
+            <a:endParaRPr lang="en-US" sz="1100" dirty="0"/>
+          </a:p>
+        </p:txBody>
+      </p:sp>
+      <p:sp>
+        <p:nvSpPr>
+          <p:cNvPr id="11" name="Gridline"/>
+          <p:cNvSpPr/>
+          <p:nvPr/>
+        </p:nvSpPr>
+        <p:spPr>
+          <a:xfrm>
+            <a:off x="1097280" y="3120390"/>
+            <a:ext cx="6675120" cy="0"/>
+          </a:xfrm>
+          <a:prstGeom prst="line">
+            <a:avLst/>
+          </a:prstGeom>
+          <a:noFill/>
+          <a:ln w="9525">
+            <a:solidFill>
+              <a:srgbClr val="D5E3E3"/>
+            </a:solidFill>
+            <a:prstDash val="solid"/>
+          </a:ln>
+        </p:spPr>
+      </p:sp>
+      <p:sp>
+        <p:nvSpPr>
+          <p:cNvPr id="12" name="Text 10"/>
+          <p:cNvSpPr txBox="1"/>
+          <p:nvPr/>
+        </p:nvSpPr>
+        <p:spPr>
+          <a:xfrm>
+            <a:off x="548640" y="2983230"/>
+            <a:ext cx="457200" cy="274320"/>
+          </a:xfrm>
+          <a:prstGeom prst="rect">
+            <a:avLst/>
+          </a:prstGeom>
+          <a:noFill/>
+          <a:ln/>
+        </p:spPr>
+        <p:txBody>
+          <a:bodyPr wrap="square" lIns="0" tIns="0" rIns="0" bIns="0" rtlCol="0" anchor="ctr"/>
+          <a:lstStyle/>
+          <a:p>
+            <a:pPr algn="r" indent="0" marL="0">
+              <a:buNone/>
+            </a:pPr>
+            <a:r>
+              <a:rPr lang="en-US" sz="1100" dirty="0">
+                <a:solidFill>
+                  <a:schemeClr val="accent5"/>
+                </a:solidFill>
+              </a:rPr>
+              <a:t>56</a:t>
+            </a:r>
+            <a:endParaRPr lang="en-US" sz="1100" dirty="0"/>
+          </a:p>
+        </p:txBody>
+      </p:sp>
+      <p:sp>
+        <p:nvSpPr>
+          <p:cNvPr id="13" name="Gridline"/>
+          <p:cNvSpPr/>
+          <p:nvPr/>
+        </p:nvSpPr>
+        <p:spPr>
+          <a:xfrm>
+            <a:off x="1097280" y="2240280"/>
+            <a:ext cx="6675120" cy="0"/>
+          </a:xfrm>
+          <a:prstGeom prst="line">
+            <a:avLst/>
+          </a:prstGeom>
+          <a:noFill/>
+          <a:ln w="9525">
+            <a:solidFill>
+              <a:srgbClr val="D5E3E3"/>
+            </a:solidFill>
+            <a:prstDash val="solid"/>
+          </a:ln>
+        </p:spPr>
+      </p:sp>
+      <p:sp>
+        <p:nvSpPr>
+          <p:cNvPr id="14" name="Text 12"/>
+          <p:cNvSpPr txBox="1"/>
+          <p:nvPr/>
+        </p:nvSpPr>
+        <p:spPr>
+          <a:xfrm>
+            <a:off x="548640" y="2103120"/>
+            <a:ext cx="457200" cy="274320"/>
+          </a:xfrm>
+          <a:prstGeom prst="rect">
+            <a:avLst/>
+          </a:prstGeom>
+          <a:noFill/>
+          <a:ln/>
+        </p:spPr>
+        <p:txBody>
+          <a:bodyPr wrap="square" lIns="0" tIns="0" rIns="0" bIns="0" rtlCol="0" anchor="ctr"/>
+          <a:lstStyle/>
+          <a:p>
+            <a:pPr algn="r" indent="0" marL="0">
+              <a:buNone/>
+            </a:pPr>
+            <a:r>
+              <a:rPr lang="en-US" sz="1100" dirty="0">
+                <a:solidFill>
+                  <a:schemeClr val="accent5"/>
+                </a:solidFill>
+              </a:rPr>
+              <a:t>58</a:t>
+            </a:r>
+            <a:endParaRPr lang="en-US" sz="1100" dirty="0"/>
+          </a:p>
+        </p:txBody>
+      </p:sp>
+      <p:sp>
+        <p:nvSpPr>
+          <p:cNvPr id="15" name="Line segment 1"/>
+          <p:cNvSpPr/>
+          <p:nvPr/>
+        </p:nvSpPr>
+        <p:spPr>
+          <a:xfrm flipV="1">
+            <a:off x="1764792" y="3705663"/>
+            <a:ext cx="1335024" cy="800900"/>
+          </a:xfrm>
+          <a:prstGeom prst="line">
+            <a:avLst/>
+          </a:prstGeom>
+          <a:noFill/>
+          <a:ln w="44450">
+            <a:solidFill>
+              <a:srgbClr val="0D9488"/>
+            </a:solidFill>
+            <a:prstDash val="solid"/>
+          </a:ln>
+        </p:spPr>
+      </p:sp>
+      <p:sp>
+        <p:nvSpPr>
+          <p:cNvPr id="16" name="Line segment 2"/>
+          <p:cNvSpPr/>
+          <p:nvPr/>
+        </p:nvSpPr>
+        <p:spPr>
+          <a:xfrm flipV="1">
+            <a:off x="3099816" y="3243605"/>
+            <a:ext cx="1335024" cy="462058"/>
+          </a:xfrm>
+          <a:prstGeom prst="line">
+            <a:avLst/>
+          </a:prstGeom>
+          <a:noFill/>
+          <a:ln w="44450">
+            <a:solidFill>
+              <a:srgbClr val="0D9488"/>
+            </a:solidFill>
+            <a:prstDash val="solid"/>
+          </a:ln>
+        </p:spPr>
+      </p:sp>
+      <p:sp>
+        <p:nvSpPr>
+          <p:cNvPr id="17" name="Line segment 3"/>
+          <p:cNvSpPr/>
+          <p:nvPr/>
+        </p:nvSpPr>
+        <p:spPr>
+          <a:xfrm>
+            <a:off x="4434840" y="3243605"/>
+            <a:ext cx="1335024" cy="171621"/>
+          </a:xfrm>
+          <a:prstGeom prst="line">
+            <a:avLst/>
+          </a:prstGeom>
+          <a:noFill/>
+          <a:ln w="44450">
+            <a:solidFill>
+              <a:srgbClr val="0D9488"/>
+            </a:solidFill>
+            <a:prstDash val="solid"/>
+          </a:ln>
+        </p:spPr>
+      </p:sp>
+      <p:sp>
+        <p:nvSpPr>
+          <p:cNvPr id="18" name="Line segment 4"/>
+          <p:cNvSpPr/>
+          <p:nvPr/>
+        </p:nvSpPr>
+        <p:spPr>
+          <a:xfrm>
+            <a:off x="5769864" y="3415227"/>
+            <a:ext cx="1335024" cy="140818"/>
+          </a:xfrm>
+          <a:prstGeom prst="line">
+            <a:avLst/>
+          </a:prstGeom>
+          <a:noFill/>
+          <a:ln w="44450">
+            <a:solidFill>
+              <a:srgbClr val="0D9488"/>
+            </a:solidFill>
+            <a:prstDash val="solid"/>
+          </a:ln>
+        </p:spPr>
+      </p:sp>
+      <p:sp>
+        <p:nvSpPr>
+          <p:cNvPr id="19" name="Point Epoch 1"/>
+          <p:cNvSpPr/>
+          <p:nvPr/>
+        </p:nvSpPr>
+        <p:spPr>
+          <a:xfrm>
+            <a:off x="1664208" y="4405979"/>
+            <a:ext cx="201168" cy="201168"/>
+          </a:xfrm>
+          <a:prstGeom prst="ellipse">
+            <a:avLst/>
+          </a:prstGeom>
+          <a:solidFill>
+            <a:srgbClr val="0D9488"/>
+          </a:solidFill>
+          <a:ln w="19050">
+            <a:solidFill>
+              <a:srgbClr val="FFFFFF"/>
+            </a:solidFill>
+            <a:prstDash val="solid"/>
+          </a:ln>
+        </p:spPr>
+      </p:sp>
+      <p:sp>
+        <p:nvSpPr>
+          <p:cNvPr id="20" name="Text 18"/>
+          <p:cNvSpPr txBox="1"/>
+          <p:nvPr/>
+        </p:nvSpPr>
+        <p:spPr>
+          <a:xfrm>
+            <a:off x="1216152" y="4085939"/>
+            <a:ext cx="1097280" cy="274320"/>
+          </a:xfrm>
+          <a:prstGeom prst="rect">
+            <a:avLst/>
+          </a:prstGeom>
+          <a:noFill/>
+          <a:ln/>
+        </p:spPr>
+        <p:txBody>
+          <a:bodyPr wrap="square" lIns="0" tIns="0" rIns="0" bIns="0" rtlCol="0" anchor="ctr"/>
+          <a:lstStyle/>
+          <a:p>
+            <a:pPr algn="ctr" indent="0" marL="0">
+              <a:buNone/>
+            </a:pPr>
+            <a:r>
+              <a:rPr lang="en-US" sz="1300" b="1" dirty="0">
+                <a:solidFill>
+                  <a:schemeClr val="tx1"/>
+                </a:solidFill>
+              </a:rPr>
+              <a:t>52.85</a:t>
+            </a:r>
+            <a:endParaRPr lang="en-US" sz="1300" dirty="0"/>
+          </a:p>
+        </p:txBody>
+      </p:sp>
+      <p:sp>
+        <p:nvSpPr>
+          <p:cNvPr id="21" name="Text 19"/>
+          <p:cNvSpPr txBox="1"/>
+          <p:nvPr/>
+        </p:nvSpPr>
+        <p:spPr>
+          <a:xfrm>
+            <a:off x="1124712" y="5852160"/>
+            <a:ext cx="1280160" cy="320040"/>
+          </a:xfrm>
+          <a:prstGeom prst="rect">
+            <a:avLst/>
+          </a:prstGeom>
+          <a:noFill/>
+          <a:ln/>
+        </p:spPr>
+        <p:txBody>
+          <a:bodyPr wrap="square" lIns="0" tIns="0" rIns="0" bIns="0" rtlCol="0" anchor="ctr"/>
+          <a:lstStyle/>
+          <a:p>
+            <a:pPr algn="ctr" indent="0" marL="0">
+              <a:buNone/>
+            </a:pPr>
+            <a:r>
+              <a:rPr lang="en-US" sz="1200" dirty="0">
+                <a:solidFill>
+                  <a:schemeClr val="tx1"/>
+                </a:solidFill>
+              </a:rPr>
+              <a:t>Epoch 1</a:t>
+            </a:r>
+            <a:endParaRPr lang="en-US" sz="1200" dirty="0"/>
+          </a:p>
+        </p:txBody>
+      </p:sp>
+      <p:sp>
+        <p:nvSpPr>
+          <p:cNvPr id="22" name="Point Epoch 2"/>
+          <p:cNvSpPr/>
+          <p:nvPr/>
+        </p:nvSpPr>
+        <p:spPr>
+          <a:xfrm>
+            <a:off x="2999232" y="3605079"/>
+            <a:ext cx="201168" cy="201168"/>
+          </a:xfrm>
+          <a:prstGeom prst="ellipse">
+            <a:avLst/>
+          </a:prstGeom>
+          <a:solidFill>
+            <a:srgbClr val="0D9488"/>
+          </a:solidFill>
+          <a:ln w="19050">
+            <a:solidFill>
+              <a:srgbClr val="FFFFFF"/>
+            </a:solidFill>
+            <a:prstDash val="solid"/>
+          </a:ln>
+        </p:spPr>
+      </p:sp>
+      <p:sp>
+        <p:nvSpPr>
+          <p:cNvPr id="23" name="Text 21"/>
+          <p:cNvSpPr txBox="1"/>
+          <p:nvPr/>
+        </p:nvSpPr>
+        <p:spPr>
+          <a:xfrm>
+            <a:off x="2551176" y="3285039"/>
+            <a:ext cx="1097280" cy="274320"/>
+          </a:xfrm>
+          <a:prstGeom prst="rect">
+            <a:avLst/>
+          </a:prstGeom>
+          <a:noFill/>
+          <a:ln/>
+        </p:spPr>
+        <p:txBody>
+          <a:bodyPr wrap="square" lIns="0" tIns="0" rIns="0" bIns="0" rtlCol="0" anchor="ctr"/>
+          <a:lstStyle/>
+          <a:p>
+            <a:pPr algn="ctr" indent="0" marL="0">
+              <a:buNone/>
+            </a:pPr>
+            <a:r>
+              <a:rPr lang="en-US" sz="1300" b="1" dirty="0">
+                <a:solidFill>
+                  <a:schemeClr val="tx1"/>
+                </a:solidFill>
+              </a:rPr>
+              <a:t>54.67</a:t>
+            </a:r>
+            <a:endParaRPr lang="en-US" sz="1300" dirty="0"/>
+          </a:p>
+        </p:txBody>
+      </p:sp>
+      <p:sp>
+        <p:nvSpPr>
+          <p:cNvPr id="24" name="Text 22"/>
+          <p:cNvSpPr txBox="1"/>
+          <p:nvPr/>
+        </p:nvSpPr>
+        <p:spPr>
+          <a:xfrm>
+            <a:off x="2459736" y="5852160"/>
+            <a:ext cx="1280160" cy="320040"/>
+          </a:xfrm>
+          <a:prstGeom prst="rect">
+            <a:avLst/>
+          </a:prstGeom>
+          <a:noFill/>
+          <a:ln/>
+        </p:spPr>
+        <p:txBody>
+          <a:bodyPr wrap="square" lIns="0" tIns="0" rIns="0" bIns="0" rtlCol="0" anchor="ctr"/>
+          <a:lstStyle/>
+          <a:p>
+            <a:pPr algn="ctr" indent="0" marL="0">
+              <a:buNone/>
+            </a:pPr>
+            <a:r>
+              <a:rPr lang="en-US" sz="1200" dirty="0">
+                <a:solidFill>
+                  <a:schemeClr val="tx1"/>
+                </a:solidFill>
+              </a:rPr>
+              <a:t>Epoch 2</a:t>
+            </a:r>
+            <a:endParaRPr lang="en-US" sz="1200" dirty="0"/>
+          </a:p>
+        </p:txBody>
+      </p:sp>
+      <p:sp>
+        <p:nvSpPr>
+          <p:cNvPr id="25" name="Point Epoch 3"/>
+          <p:cNvSpPr/>
+          <p:nvPr/>
+        </p:nvSpPr>
+        <p:spPr>
+          <a:xfrm>
+            <a:off x="4334256" y="3143021"/>
+            <a:ext cx="201168" cy="201168"/>
+          </a:xfrm>
+          <a:prstGeom prst="ellipse">
+            <a:avLst/>
+          </a:prstGeom>
+          <a:solidFill>
+            <a:srgbClr val="0D9488"/>
+          </a:solidFill>
+          <a:ln w="19050">
+            <a:solidFill>
+              <a:srgbClr val="FFFFFF"/>
+            </a:solidFill>
+            <a:prstDash val="solid"/>
+          </a:ln>
+        </p:spPr>
+      </p:sp>
+      <p:sp>
+        <p:nvSpPr>
+          <p:cNvPr id="26" name="Text 24"/>
+          <p:cNvSpPr txBox="1"/>
+          <p:nvPr/>
+        </p:nvSpPr>
+        <p:spPr>
+          <a:xfrm>
+            <a:off x="3886200" y="2822981"/>
+            <a:ext cx="1097280" cy="274320"/>
+          </a:xfrm>
+          <a:prstGeom prst="rect">
+            <a:avLst/>
+          </a:prstGeom>
+          <a:noFill/>
+          <a:ln/>
+        </p:spPr>
+        <p:txBody>
+          <a:bodyPr wrap="square" lIns="0" tIns="0" rIns="0" bIns="0" rtlCol="0" anchor="ctr"/>
+          <a:lstStyle/>
+          <a:p>
+            <a:pPr algn="ctr" indent="0" marL="0">
+              <a:buNone/>
+            </a:pPr>
+            <a:r>
+              <a:rPr lang="en-US" sz="1300" b="1" dirty="0">
+                <a:solidFill>
+                  <a:schemeClr val="tx1"/>
+                </a:solidFill>
+              </a:rPr>
+              <a:t>55.72</a:t>
+            </a:r>
+            <a:endParaRPr lang="en-US" sz="1300" dirty="0"/>
+          </a:p>
+        </p:txBody>
+      </p:sp>
+      <p:sp>
+        <p:nvSpPr>
+          <p:cNvPr id="27" name="Text 25"/>
+          <p:cNvSpPr txBox="1"/>
+          <p:nvPr/>
+        </p:nvSpPr>
+        <p:spPr>
+          <a:xfrm>
+            <a:off x="3794760" y="5852160"/>
+            <a:ext cx="1280160" cy="320040"/>
+          </a:xfrm>
+          <a:prstGeom prst="rect">
+            <a:avLst/>
+          </a:prstGeom>
+          <a:noFill/>
+          <a:ln/>
+        </p:spPr>
+        <p:txBody>
+          <a:bodyPr wrap="square" lIns="0" tIns="0" rIns="0" bIns="0" rtlCol="0" anchor="ctr"/>
+          <a:lstStyle/>
+          <a:p>
+            <a:pPr algn="ctr" indent="0" marL="0">
+              <a:buNone/>
+            </a:pPr>
+            <a:r>
+              <a:rPr lang="en-US" sz="1200" dirty="0">
+                <a:solidFill>
+                  <a:schemeClr val="tx1"/>
+                </a:solidFill>
+              </a:rPr>
+              <a:t>Epoch 3</a:t>
+            </a:r>
+            <a:endParaRPr lang="en-US" sz="1200" dirty="0"/>
+          </a:p>
+        </p:txBody>
+      </p:sp>
+      <p:sp>
+        <p:nvSpPr>
+          <p:cNvPr id="28" name="Point Epoch 4"/>
+          <p:cNvSpPr/>
+          <p:nvPr/>
+        </p:nvSpPr>
+        <p:spPr>
+          <a:xfrm>
+            <a:off x="5669280" y="3314643"/>
+            <a:ext cx="201168" cy="201168"/>
+          </a:xfrm>
+          <a:prstGeom prst="ellipse">
+            <a:avLst/>
+          </a:prstGeom>
+          <a:solidFill>
+            <a:srgbClr val="0D9488"/>
+          </a:solidFill>
+          <a:ln w="19050">
+            <a:solidFill>
+              <a:srgbClr val="FFFFFF"/>
+            </a:solidFill>
+            <a:prstDash val="solid"/>
+          </a:ln>
+        </p:spPr>
+      </p:sp>
+      <p:sp>
+        <p:nvSpPr>
+          <p:cNvPr id="29" name="Text 27"/>
+          <p:cNvSpPr txBox="1"/>
+          <p:nvPr/>
+        </p:nvSpPr>
+        <p:spPr>
+          <a:xfrm>
+            <a:off x="5221224" y="2994603"/>
+            <a:ext cx="1097280" cy="274320"/>
+          </a:xfrm>
+          <a:prstGeom prst="rect">
+            <a:avLst/>
+          </a:prstGeom>
+          <a:noFill/>
+          <a:ln/>
+        </p:spPr>
+        <p:txBody>
+          <a:bodyPr wrap="square" lIns="0" tIns="0" rIns="0" bIns="0" rtlCol="0" anchor="ctr"/>
+          <a:lstStyle/>
+          <a:p>
+            <a:pPr algn="ctr" indent="0" marL="0">
+              <a:buNone/>
+            </a:pPr>
+            <a:r>
+              <a:rPr lang="en-US" sz="1300" b="1" dirty="0">
+                <a:solidFill>
+                  <a:schemeClr val="tx1"/>
+                </a:solidFill>
+              </a:rPr>
+              <a:t>55.33</a:t>
+            </a:r>
+            <a:endParaRPr lang="en-US" sz="1300" dirty="0"/>
+          </a:p>
+        </p:txBody>
+      </p:sp>
+      <p:sp>
+        <p:nvSpPr>
+          <p:cNvPr id="30" name="Text 28"/>
+          <p:cNvSpPr txBox="1"/>
+          <p:nvPr/>
+        </p:nvSpPr>
+        <p:spPr>
+          <a:xfrm>
+            <a:off x="5129784" y="5852160"/>
+            <a:ext cx="1280160" cy="320040"/>
+          </a:xfrm>
+          <a:prstGeom prst="rect">
+            <a:avLst/>
+          </a:prstGeom>
+          <a:noFill/>
+          <a:ln/>
+        </p:spPr>
+        <p:txBody>
+          <a:bodyPr wrap="square" lIns="0" tIns="0" rIns="0" bIns="0" rtlCol="0" anchor="ctr"/>
+          <a:lstStyle/>
+          <a:p>
+            <a:pPr algn="ctr" indent="0" marL="0">
+              <a:buNone/>
+            </a:pPr>
+            <a:r>
+              <a:rPr lang="en-US" sz="1200" dirty="0">
+                <a:solidFill>
+                  <a:schemeClr val="tx1"/>
+                </a:solidFill>
+              </a:rPr>
+              <a:t>Epoch 4</a:t>
+            </a:r>
+            <a:endParaRPr lang="en-US" sz="1200" dirty="0"/>
+          </a:p>
+        </p:txBody>
+      </p:sp>
+      <p:sp>
+        <p:nvSpPr>
+          <p:cNvPr id="31" name="Point Epoch 5"/>
+          <p:cNvSpPr/>
+          <p:nvPr/>
+        </p:nvSpPr>
+        <p:spPr>
+          <a:xfrm>
+            <a:off x="7004304" y="3455460"/>
+            <a:ext cx="201168" cy="201168"/>
+          </a:xfrm>
+          <a:prstGeom prst="ellipse">
+            <a:avLst/>
+          </a:prstGeom>
+          <a:solidFill>
+            <a:srgbClr val="0D9488"/>
+          </a:solidFill>
+          <a:ln w="19050">
+            <a:solidFill>
+              <a:srgbClr val="FFFFFF"/>
+            </a:solidFill>
+            <a:prstDash val="solid"/>
+          </a:ln>
+        </p:spPr>
+      </p:sp>
+      <p:sp>
+        <p:nvSpPr>
+          <p:cNvPr id="32" name="Text 30"/>
+          <p:cNvSpPr txBox="1"/>
+          <p:nvPr/>
+        </p:nvSpPr>
+        <p:spPr>
+          <a:xfrm>
+            <a:off x="6556248" y="3135420"/>
+            <a:ext cx="1097280" cy="274320"/>
+          </a:xfrm>
+          <a:prstGeom prst="rect">
+            <a:avLst/>
+          </a:prstGeom>
+          <a:noFill/>
+          <a:ln/>
+        </p:spPr>
+        <p:txBody>
+          <a:bodyPr wrap="square" lIns="0" tIns="0" rIns="0" bIns="0" rtlCol="0" anchor="ctr"/>
+          <a:lstStyle/>
+          <a:p>
+            <a:pPr algn="ctr" indent="0" marL="0">
+              <a:buNone/>
+            </a:pPr>
+            <a:r>
+              <a:rPr lang="en-US" sz="1300" b="1" dirty="0">
+                <a:solidFill>
+                  <a:schemeClr val="tx1"/>
+                </a:solidFill>
+              </a:rPr>
+              <a:t>55.01</a:t>
+            </a:r>
+            <a:endParaRPr lang="en-US" sz="1300" dirty="0"/>
+          </a:p>
+        </p:txBody>
+      </p:sp>
+      <p:sp>
+        <p:nvSpPr>
+          <p:cNvPr id="33" name="Text 31"/>
+          <p:cNvSpPr txBox="1"/>
+          <p:nvPr/>
+        </p:nvSpPr>
+        <p:spPr>
+          <a:xfrm>
+            <a:off x="6464808" y="5852160"/>
+            <a:ext cx="1280160" cy="320040"/>
+          </a:xfrm>
+          <a:prstGeom prst="rect">
+            <a:avLst/>
+          </a:prstGeom>
+          <a:noFill/>
+          <a:ln/>
+        </p:spPr>
+        <p:txBody>
+          <a:bodyPr wrap="square" lIns="0" tIns="0" rIns="0" bIns="0" rtlCol="0" anchor="ctr"/>
+          <a:lstStyle/>
+          <a:p>
+            <a:pPr algn="ctr" indent="0" marL="0">
+              <a:buNone/>
+            </a:pPr>
+            <a:r>
+              <a:rPr lang="en-US" sz="1200" dirty="0">
+                <a:solidFill>
+                  <a:schemeClr val="tx1"/>
+                </a:solidFill>
+              </a:rPr>
+              <a:t>Epoch 5</a:t>
+            </a:r>
+            <a:endParaRPr lang="en-US" sz="1200" dirty="0"/>
+          </a:p>
+        </p:txBody>
+      </p:sp>
+      <p:sp>
+        <p:nvSpPr>
+          <p:cNvPr id="34" name="Stat card"/>
           <p:cNvSpPr/>
           <p:nvPr/>
         </p:nvSpPr>
@@ -8715,7 +8334,7 @@
       </p:sp>
       <p:sp>
         <p:nvSpPr>
-          <p:cNvPr id="6" name="Text 3"/>
+          <p:cNvPr id="35" name="Text 33"/>
           <p:cNvSpPr txBox="1"/>
           <p:nvPr/>
         </p:nvSpPr>
@@ -8742,9 +8361,9 @@
                 <a:solidFill>
                   <a:schemeClr val="accent1"/>
                 </a:solidFill>
-                <a:latin typeface="Cambria" pitchFamily="34" charset="0"/>
-                <a:ea typeface="Cambria" pitchFamily="34" charset="-122"/>
-                <a:cs typeface="Cambria" pitchFamily="34" charset="-120"/>
+                <a:latin typeface="Georgia" pitchFamily="34" charset="0"/>
+                <a:ea typeface="Georgia" pitchFamily="34" charset="-122"/>
+                <a:cs typeface="Georgia" pitchFamily="34" charset="-120"/>
               </a:rPr>
               <a:t>3 of 5</a:t>
             </a:r>
@@ -8754,7 +8373,7 @@
       </p:sp>
       <p:sp>
         <p:nvSpPr>
-          <p:cNvPr id="7" name="Text 4"/>
+          <p:cNvPr id="36" name="Text 34"/>
           <p:cNvSpPr txBox="1"/>
           <p:nvPr/>
         </p:nvSpPr>
@@ -8790,7 +8409,7 @@
       </p:sp>
       <p:sp>
         <p:nvSpPr>
-          <p:cNvPr id="8" name="Stat card"/>
+          <p:cNvPr id="37" name="Stat card"/>
           <p:cNvSpPr/>
           <p:nvPr/>
         </p:nvSpPr>
@@ -8817,7 +8436,7 @@
       </p:sp>
       <p:sp>
         <p:nvSpPr>
-          <p:cNvPr id="9" name="Text 6"/>
+          <p:cNvPr id="38" name="Text 36"/>
           <p:cNvSpPr txBox="1"/>
           <p:nvPr/>
         </p:nvSpPr>
@@ -8844,9 +8463,9 @@
                 <a:solidFill>
                   <a:schemeClr val="accent1"/>
                 </a:solidFill>
-                <a:latin typeface="Cambria" pitchFamily="34" charset="0"/>
-                <a:ea typeface="Cambria" pitchFamily="34" charset="-122"/>
-                <a:cs typeface="Cambria" pitchFamily="34" charset="-120"/>
+                <a:latin typeface="Georgia" pitchFamily="34" charset="0"/>
+                <a:ea typeface="Georgia" pitchFamily="34" charset="-122"/>
+                <a:cs typeface="Georgia" pitchFamily="34" charset="-120"/>
               </a:rPr>
               <a:t>3.39 → 2.31</a:t>
             </a:r>
@@ -8856,7 +8475,7 @@
       </p:sp>
       <p:sp>
         <p:nvSpPr>
-          <p:cNvPr id="10" name="Text 7"/>
+          <p:cNvPr id="39" name="Text 37"/>
           <p:cNvSpPr txBox="1"/>
           <p:nvPr/>
         </p:nvSpPr>
@@ -8892,7 +8511,7 @@
       </p:sp>
       <p:sp>
         <p:nvSpPr>
-          <p:cNvPr id="11" name="Stat card"/>
+          <p:cNvPr id="40" name="Stat card"/>
           <p:cNvSpPr/>
           <p:nvPr/>
         </p:nvSpPr>
@@ -8919,7 +8538,7 @@
       </p:sp>
       <p:sp>
         <p:nvSpPr>
-          <p:cNvPr id="12" name="Text 9"/>
+          <p:cNvPr id="41" name="Text 39"/>
           <p:cNvSpPr txBox="1"/>
           <p:nvPr/>
         </p:nvSpPr>
@@ -8946,9 +8565,9 @@
                 <a:solidFill>
                   <a:schemeClr val="accent1"/>
                 </a:solidFill>
-                <a:latin typeface="Cambria" pitchFamily="34" charset="0"/>
-                <a:ea typeface="Cambria" pitchFamily="34" charset="-122"/>
-                <a:cs typeface="Cambria" pitchFamily="34" charset="-120"/>
+                <a:latin typeface="Georgia" pitchFamily="34" charset="0"/>
+                <a:ea typeface="Georgia" pitchFamily="34" charset="-122"/>
+                <a:cs typeface="Georgia" pitchFamily="34" charset="-120"/>
               </a:rPr>
               <a:t>T4 GPU</a:t>
             </a:r>
@@ -8958,7 +8577,7 @@
       </p:sp>
       <p:sp>
         <p:nvSpPr>
-          <p:cNvPr id="13" name="Text 10"/>
+          <p:cNvPr id="42" name="Text 40"/>
           <p:cNvSpPr txBox="1"/>
           <p:nvPr/>
         </p:nvSpPr>
@@ -9136,22 +8755,1110 @@
           </a:p>
         </p:txBody>
       </p:sp>
-      <p:graphicFrame>
-        <p:nvGraphicFramePr>
-          <p:cNvPr id="4" name="Chart 0" descr=""/>
-          <p:cNvGraphicFramePr/>
-          <p:nvPr/>
-        </p:nvGraphicFramePr>
-        <p:xfrm>
-          <a:off x="548640" y="1371600"/>
-          <a:ext cx="6949440" cy="4846320"/>
-        </p:xfrm>
-        <a:graphic xmlns:a="http://schemas.openxmlformats.org/drawingml/2006/main">
-          <a:graphicData uri="http://schemas.openxmlformats.org/drawingml/2006/chart">
-            <c:chart xmlns:c="http://schemas.openxmlformats.org/drawingml/2006/chart" r:id="rId1"/>
-          </a:graphicData>
-        </a:graphic>
-      </p:graphicFrame>
+      <p:sp>
+        <p:nvSpPr>
+          <p:cNvPr id="4" name="Text 2"/>
+          <p:cNvSpPr txBox="1"/>
+          <p:nvPr/>
+        </p:nvSpPr>
+        <p:spPr>
+          <a:xfrm>
+            <a:off x="548640" y="1371600"/>
+            <a:ext cx="6949440" cy="365760"/>
+          </a:xfrm>
+          <a:prstGeom prst="rect">
+            <a:avLst/>
+          </a:prstGeom>
+          <a:noFill/>
+          <a:ln/>
+        </p:spPr>
+        <p:txBody>
+          <a:bodyPr wrap="square" lIns="0" tIns="0" rIns="0" bIns="0" rtlCol="0" anchor="ctr"/>
+          <a:lstStyle/>
+          <a:p>
+            <a:pPr indent="0" marL="0">
+              <a:buNone/>
+            </a:pPr>
+            <a:r>
+              <a:rPr lang="en-US" sz="1400" b="1" dirty="0">
+                <a:solidFill>
+                  <a:schemeClr val="tx1"/>
+                </a:solidFill>
+              </a:rPr>
+              <a:t>chrF++ (higher is better)</a:t>
+            </a:r>
+            <a:endParaRPr lang="en-US" sz="1400" dirty="0"/>
+          </a:p>
+        </p:txBody>
+      </p:sp>
+      <p:sp>
+        <p:nvSpPr>
+          <p:cNvPr id="5" name="Gridline"/>
+          <p:cNvSpPr/>
+          <p:nvPr/>
+        </p:nvSpPr>
+        <p:spPr>
+          <a:xfrm>
+            <a:off x="1097280" y="5303520"/>
+            <a:ext cx="6400800" cy="0"/>
+          </a:xfrm>
+          <a:prstGeom prst="line">
+            <a:avLst/>
+          </a:prstGeom>
+          <a:noFill/>
+          <a:ln w="9525">
+            <a:solidFill>
+              <a:srgbClr val="D5E3E3"/>
+            </a:solidFill>
+            <a:prstDash val="solid"/>
+          </a:ln>
+        </p:spPr>
+      </p:sp>
+      <p:sp>
+        <p:nvSpPr>
+          <p:cNvPr id="6" name="Text 4"/>
+          <p:cNvSpPr txBox="1"/>
+          <p:nvPr/>
+        </p:nvSpPr>
+        <p:spPr>
+          <a:xfrm>
+            <a:off x="548640" y="5166360"/>
+            <a:ext cx="457200" cy="274320"/>
+          </a:xfrm>
+          <a:prstGeom prst="rect">
+            <a:avLst/>
+          </a:prstGeom>
+          <a:noFill/>
+          <a:ln/>
+        </p:spPr>
+        <p:txBody>
+          <a:bodyPr wrap="square" lIns="0" tIns="0" rIns="0" bIns="0" rtlCol="0" anchor="ctr"/>
+          <a:lstStyle/>
+          <a:p>
+            <a:pPr algn="r" indent="0" marL="0">
+              <a:buNone/>
+            </a:pPr>
+            <a:r>
+              <a:rPr lang="en-US" sz="1100" dirty="0">
+                <a:solidFill>
+                  <a:schemeClr val="accent5"/>
+                </a:solidFill>
+              </a:rPr>
+              <a:t>0</a:t>
+            </a:r>
+            <a:endParaRPr lang="en-US" sz="1100" dirty="0"/>
+          </a:p>
+        </p:txBody>
+      </p:sp>
+      <p:sp>
+        <p:nvSpPr>
+          <p:cNvPr id="7" name="Gridline"/>
+          <p:cNvSpPr/>
+          <p:nvPr/>
+        </p:nvSpPr>
+        <p:spPr>
+          <a:xfrm>
+            <a:off x="1097280" y="4852851"/>
+            <a:ext cx="6400800" cy="0"/>
+          </a:xfrm>
+          <a:prstGeom prst="line">
+            <a:avLst/>
+          </a:prstGeom>
+          <a:noFill/>
+          <a:ln w="9525">
+            <a:solidFill>
+              <a:srgbClr val="D5E3E3"/>
+            </a:solidFill>
+            <a:prstDash val="solid"/>
+          </a:ln>
+        </p:spPr>
+      </p:sp>
+      <p:sp>
+        <p:nvSpPr>
+          <p:cNvPr id="8" name="Text 6"/>
+          <p:cNvSpPr txBox="1"/>
+          <p:nvPr/>
+        </p:nvSpPr>
+        <p:spPr>
+          <a:xfrm>
+            <a:off x="548640" y="4715691"/>
+            <a:ext cx="457200" cy="274320"/>
+          </a:xfrm>
+          <a:prstGeom prst="rect">
+            <a:avLst/>
+          </a:prstGeom>
+          <a:noFill/>
+          <a:ln/>
+        </p:spPr>
+        <p:txBody>
+          <a:bodyPr wrap="square" lIns="0" tIns="0" rIns="0" bIns="0" rtlCol="0" anchor="ctr"/>
+          <a:lstStyle/>
+          <a:p>
+            <a:pPr algn="r" indent="0" marL="0">
+              <a:buNone/>
+            </a:pPr>
+            <a:r>
+              <a:rPr lang="en-US" sz="1100" dirty="0">
+                <a:solidFill>
+                  <a:schemeClr val="accent5"/>
+                </a:solidFill>
+              </a:rPr>
+              <a:t>10</a:t>
+            </a:r>
+            <a:endParaRPr lang="en-US" sz="1100" dirty="0"/>
+          </a:p>
+        </p:txBody>
+      </p:sp>
+      <p:sp>
+        <p:nvSpPr>
+          <p:cNvPr id="9" name="Gridline"/>
+          <p:cNvSpPr/>
+          <p:nvPr/>
+        </p:nvSpPr>
+        <p:spPr>
+          <a:xfrm>
+            <a:off x="1097280" y="4402183"/>
+            <a:ext cx="6400800" cy="0"/>
+          </a:xfrm>
+          <a:prstGeom prst="line">
+            <a:avLst/>
+          </a:prstGeom>
+          <a:noFill/>
+          <a:ln w="9525">
+            <a:solidFill>
+              <a:srgbClr val="D5E3E3"/>
+            </a:solidFill>
+            <a:prstDash val="solid"/>
+          </a:ln>
+        </p:spPr>
+      </p:sp>
+      <p:sp>
+        <p:nvSpPr>
+          <p:cNvPr id="10" name="Text 8"/>
+          <p:cNvSpPr txBox="1"/>
+          <p:nvPr/>
+        </p:nvSpPr>
+        <p:spPr>
+          <a:xfrm>
+            <a:off x="548640" y="4265023"/>
+            <a:ext cx="457200" cy="274320"/>
+          </a:xfrm>
+          <a:prstGeom prst="rect">
+            <a:avLst/>
+          </a:prstGeom>
+          <a:noFill/>
+          <a:ln/>
+        </p:spPr>
+        <p:txBody>
+          <a:bodyPr wrap="square" lIns="0" tIns="0" rIns="0" bIns="0" rtlCol="0" anchor="ctr"/>
+          <a:lstStyle/>
+          <a:p>
+            <a:pPr algn="r" indent="0" marL="0">
+              <a:buNone/>
+            </a:pPr>
+            <a:r>
+              <a:rPr lang="en-US" sz="1100" dirty="0">
+                <a:solidFill>
+                  <a:schemeClr val="accent5"/>
+                </a:solidFill>
+              </a:rPr>
+              <a:t>20</a:t>
+            </a:r>
+            <a:endParaRPr lang="en-US" sz="1100" dirty="0"/>
+          </a:p>
+        </p:txBody>
+      </p:sp>
+      <p:sp>
+        <p:nvSpPr>
+          <p:cNvPr id="11" name="Gridline"/>
+          <p:cNvSpPr/>
+          <p:nvPr/>
+        </p:nvSpPr>
+        <p:spPr>
+          <a:xfrm>
+            <a:off x="1097280" y="3951514"/>
+            <a:ext cx="6400800" cy="0"/>
+          </a:xfrm>
+          <a:prstGeom prst="line">
+            <a:avLst/>
+          </a:prstGeom>
+          <a:noFill/>
+          <a:ln w="9525">
+            <a:solidFill>
+              <a:srgbClr val="D5E3E3"/>
+            </a:solidFill>
+            <a:prstDash val="solid"/>
+          </a:ln>
+        </p:spPr>
+      </p:sp>
+      <p:sp>
+        <p:nvSpPr>
+          <p:cNvPr id="12" name="Text 10"/>
+          <p:cNvSpPr txBox="1"/>
+          <p:nvPr/>
+        </p:nvSpPr>
+        <p:spPr>
+          <a:xfrm>
+            <a:off x="548640" y="3814354"/>
+            <a:ext cx="457200" cy="274320"/>
+          </a:xfrm>
+          <a:prstGeom prst="rect">
+            <a:avLst/>
+          </a:prstGeom>
+          <a:noFill/>
+          <a:ln/>
+        </p:spPr>
+        <p:txBody>
+          <a:bodyPr wrap="square" lIns="0" tIns="0" rIns="0" bIns="0" rtlCol="0" anchor="ctr"/>
+          <a:lstStyle/>
+          <a:p>
+            <a:pPr algn="r" indent="0" marL="0">
+              <a:buNone/>
+            </a:pPr>
+            <a:r>
+              <a:rPr lang="en-US" sz="1100" dirty="0">
+                <a:solidFill>
+                  <a:schemeClr val="accent5"/>
+                </a:solidFill>
+              </a:rPr>
+              <a:t>30</a:t>
+            </a:r>
+            <a:endParaRPr lang="en-US" sz="1100" dirty="0"/>
+          </a:p>
+        </p:txBody>
+      </p:sp>
+      <p:sp>
+        <p:nvSpPr>
+          <p:cNvPr id="13" name="Gridline"/>
+          <p:cNvSpPr/>
+          <p:nvPr/>
+        </p:nvSpPr>
+        <p:spPr>
+          <a:xfrm>
+            <a:off x="1097280" y="3500846"/>
+            <a:ext cx="6400800" cy="0"/>
+          </a:xfrm>
+          <a:prstGeom prst="line">
+            <a:avLst/>
+          </a:prstGeom>
+          <a:noFill/>
+          <a:ln w="9525">
+            <a:solidFill>
+              <a:srgbClr val="D5E3E3"/>
+            </a:solidFill>
+            <a:prstDash val="solid"/>
+          </a:ln>
+        </p:spPr>
+      </p:sp>
+      <p:sp>
+        <p:nvSpPr>
+          <p:cNvPr id="14" name="Text 12"/>
+          <p:cNvSpPr txBox="1"/>
+          <p:nvPr/>
+        </p:nvSpPr>
+        <p:spPr>
+          <a:xfrm>
+            <a:off x="548640" y="3363686"/>
+            <a:ext cx="457200" cy="274320"/>
+          </a:xfrm>
+          <a:prstGeom prst="rect">
+            <a:avLst/>
+          </a:prstGeom>
+          <a:noFill/>
+          <a:ln/>
+        </p:spPr>
+        <p:txBody>
+          <a:bodyPr wrap="square" lIns="0" tIns="0" rIns="0" bIns="0" rtlCol="0" anchor="ctr"/>
+          <a:lstStyle/>
+          <a:p>
+            <a:pPr algn="r" indent="0" marL="0">
+              <a:buNone/>
+            </a:pPr>
+            <a:r>
+              <a:rPr lang="en-US" sz="1100" dirty="0">
+                <a:solidFill>
+                  <a:schemeClr val="accent5"/>
+                </a:solidFill>
+              </a:rPr>
+              <a:t>40</a:t>
+            </a:r>
+            <a:endParaRPr lang="en-US" sz="1100" dirty="0"/>
+          </a:p>
+        </p:txBody>
+      </p:sp>
+      <p:sp>
+        <p:nvSpPr>
+          <p:cNvPr id="15" name="Gridline"/>
+          <p:cNvSpPr/>
+          <p:nvPr/>
+        </p:nvSpPr>
+        <p:spPr>
+          <a:xfrm>
+            <a:off x="1097280" y="3050177"/>
+            <a:ext cx="6400800" cy="0"/>
+          </a:xfrm>
+          <a:prstGeom prst="line">
+            <a:avLst/>
+          </a:prstGeom>
+          <a:noFill/>
+          <a:ln w="9525">
+            <a:solidFill>
+              <a:srgbClr val="D5E3E3"/>
+            </a:solidFill>
+            <a:prstDash val="solid"/>
+          </a:ln>
+        </p:spPr>
+      </p:sp>
+      <p:sp>
+        <p:nvSpPr>
+          <p:cNvPr id="16" name="Text 14"/>
+          <p:cNvSpPr txBox="1"/>
+          <p:nvPr/>
+        </p:nvSpPr>
+        <p:spPr>
+          <a:xfrm>
+            <a:off x="548640" y="2913017"/>
+            <a:ext cx="457200" cy="274320"/>
+          </a:xfrm>
+          <a:prstGeom prst="rect">
+            <a:avLst/>
+          </a:prstGeom>
+          <a:noFill/>
+          <a:ln/>
+        </p:spPr>
+        <p:txBody>
+          <a:bodyPr wrap="square" lIns="0" tIns="0" rIns="0" bIns="0" rtlCol="0" anchor="ctr"/>
+          <a:lstStyle/>
+          <a:p>
+            <a:pPr algn="r" indent="0" marL="0">
+              <a:buNone/>
+            </a:pPr>
+            <a:r>
+              <a:rPr lang="en-US" sz="1100" dirty="0">
+                <a:solidFill>
+                  <a:schemeClr val="accent5"/>
+                </a:solidFill>
+              </a:rPr>
+              <a:t>50</a:t>
+            </a:r>
+            <a:endParaRPr lang="en-US" sz="1100" dirty="0"/>
+          </a:p>
+        </p:txBody>
+      </p:sp>
+      <p:sp>
+        <p:nvSpPr>
+          <p:cNvPr id="17" name="Gridline"/>
+          <p:cNvSpPr/>
+          <p:nvPr/>
+        </p:nvSpPr>
+        <p:spPr>
+          <a:xfrm>
+            <a:off x="1097280" y="2599509"/>
+            <a:ext cx="6400800" cy="0"/>
+          </a:xfrm>
+          <a:prstGeom prst="line">
+            <a:avLst/>
+          </a:prstGeom>
+          <a:noFill/>
+          <a:ln w="9525">
+            <a:solidFill>
+              <a:srgbClr val="D5E3E3"/>
+            </a:solidFill>
+            <a:prstDash val="solid"/>
+          </a:ln>
+        </p:spPr>
+      </p:sp>
+      <p:sp>
+        <p:nvSpPr>
+          <p:cNvPr id="18" name="Text 16"/>
+          <p:cNvSpPr txBox="1"/>
+          <p:nvPr/>
+        </p:nvSpPr>
+        <p:spPr>
+          <a:xfrm>
+            <a:off x="548640" y="2462349"/>
+            <a:ext cx="457200" cy="274320"/>
+          </a:xfrm>
+          <a:prstGeom prst="rect">
+            <a:avLst/>
+          </a:prstGeom>
+          <a:noFill/>
+          <a:ln/>
+        </p:spPr>
+        <p:txBody>
+          <a:bodyPr wrap="square" lIns="0" tIns="0" rIns="0" bIns="0" rtlCol="0" anchor="ctr"/>
+          <a:lstStyle/>
+          <a:p>
+            <a:pPr algn="r" indent="0" marL="0">
+              <a:buNone/>
+            </a:pPr>
+            <a:r>
+              <a:rPr lang="en-US" sz="1100" dirty="0">
+                <a:solidFill>
+                  <a:schemeClr val="accent5"/>
+                </a:solidFill>
+              </a:rPr>
+              <a:t>60</a:t>
+            </a:r>
+            <a:endParaRPr lang="en-US" sz="1100" dirty="0"/>
+          </a:p>
+        </p:txBody>
+      </p:sp>
+      <p:sp>
+        <p:nvSpPr>
+          <p:cNvPr id="19" name="Gridline"/>
+          <p:cNvSpPr/>
+          <p:nvPr/>
+        </p:nvSpPr>
+        <p:spPr>
+          <a:xfrm>
+            <a:off x="1097280" y="2148840"/>
+            <a:ext cx="6400800" cy="0"/>
+          </a:xfrm>
+          <a:prstGeom prst="line">
+            <a:avLst/>
+          </a:prstGeom>
+          <a:noFill/>
+          <a:ln w="9525">
+            <a:solidFill>
+              <a:srgbClr val="D5E3E3"/>
+            </a:solidFill>
+            <a:prstDash val="solid"/>
+          </a:ln>
+        </p:spPr>
+      </p:sp>
+      <p:sp>
+        <p:nvSpPr>
+          <p:cNvPr id="20" name="Text 18"/>
+          <p:cNvSpPr txBox="1"/>
+          <p:nvPr/>
+        </p:nvSpPr>
+        <p:spPr>
+          <a:xfrm>
+            <a:off x="548640" y="2011680"/>
+            <a:ext cx="457200" cy="274320"/>
+          </a:xfrm>
+          <a:prstGeom prst="rect">
+            <a:avLst/>
+          </a:prstGeom>
+          <a:noFill/>
+          <a:ln/>
+        </p:spPr>
+        <p:txBody>
+          <a:bodyPr wrap="square" lIns="0" tIns="0" rIns="0" bIns="0" rtlCol="0" anchor="ctr"/>
+          <a:lstStyle/>
+          <a:p>
+            <a:pPr algn="r" indent="0" marL="0">
+              <a:buNone/>
+            </a:pPr>
+            <a:r>
+              <a:rPr lang="en-US" sz="1100" dirty="0">
+                <a:solidFill>
+                  <a:schemeClr val="accent5"/>
+                </a:solidFill>
+              </a:rPr>
+              <a:t>70</a:t>
+            </a:r>
+            <a:endParaRPr lang="en-US" sz="1100" dirty="0"/>
+          </a:p>
+        </p:txBody>
+      </p:sp>
+      <p:sp>
+        <p:nvSpPr>
+          <p:cNvPr id="21" name="Column NusaX (400) Base NLLB-200"/>
+          <p:cNvSpPr/>
+          <p:nvPr/>
+        </p:nvSpPr>
+        <p:spPr>
+          <a:xfrm>
+            <a:off x="1524000" y="3561235"/>
+            <a:ext cx="640080" cy="1742285"/>
+          </a:xfrm>
+          <a:prstGeom prst="rect">
+            <a:avLst/>
+          </a:prstGeom>
+          <a:solidFill>
+            <a:srgbClr val="9DB4BB"/>
+          </a:solidFill>
+          <a:ln w="12700">
+            <a:solidFill>
+              <a:srgbClr val="9DB4BB"/>
+            </a:solidFill>
+            <a:prstDash val="solid"/>
+          </a:ln>
+        </p:spPr>
+      </p:sp>
+      <p:sp>
+        <p:nvSpPr>
+          <p:cNvPr id="22" name="Text 20"/>
+          <p:cNvSpPr txBox="1"/>
+          <p:nvPr/>
+        </p:nvSpPr>
+        <p:spPr>
+          <a:xfrm>
+            <a:off x="1341120" y="3250339"/>
+            <a:ext cx="1005840" cy="274320"/>
+          </a:xfrm>
+          <a:prstGeom prst="rect">
+            <a:avLst/>
+          </a:prstGeom>
+          <a:noFill/>
+          <a:ln/>
+        </p:spPr>
+        <p:txBody>
+          <a:bodyPr wrap="square" lIns="0" tIns="0" rIns="0" bIns="0" rtlCol="0" anchor="ctr"/>
+          <a:lstStyle/>
+          <a:p>
+            <a:pPr algn="ctr" indent="0" marL="0">
+              <a:buNone/>
+            </a:pPr>
+            <a:r>
+              <a:rPr lang="en-US" sz="1300" b="1" dirty="0">
+                <a:solidFill>
+                  <a:schemeClr val="tx1"/>
+                </a:solidFill>
+              </a:rPr>
+              <a:t>38.7</a:t>
+            </a:r>
+            <a:endParaRPr lang="en-US" sz="1300" dirty="0"/>
+          </a:p>
+        </p:txBody>
+      </p:sp>
+      <p:sp>
+        <p:nvSpPr>
+          <p:cNvPr id="23" name="Column NusaX (400) Our fine-tuned model"/>
+          <p:cNvSpPr/>
+          <p:nvPr/>
+        </p:nvSpPr>
+        <p:spPr>
+          <a:xfrm>
+            <a:off x="2164080" y="2727949"/>
+            <a:ext cx="640080" cy="2575571"/>
+          </a:xfrm>
+          <a:prstGeom prst="rect">
+            <a:avLst/>
+          </a:prstGeom>
+          <a:solidFill>
+            <a:srgbClr val="0D9488"/>
+          </a:solidFill>
+          <a:ln w="12700">
+            <a:solidFill>
+              <a:srgbClr val="0D9488"/>
+            </a:solidFill>
+            <a:prstDash val="solid"/>
+          </a:ln>
+        </p:spPr>
+      </p:sp>
+      <p:sp>
+        <p:nvSpPr>
+          <p:cNvPr id="24" name="Text 22"/>
+          <p:cNvSpPr txBox="1"/>
+          <p:nvPr/>
+        </p:nvSpPr>
+        <p:spPr>
+          <a:xfrm>
+            <a:off x="1981200" y="2417053"/>
+            <a:ext cx="1005840" cy="274320"/>
+          </a:xfrm>
+          <a:prstGeom prst="rect">
+            <a:avLst/>
+          </a:prstGeom>
+          <a:noFill/>
+          <a:ln/>
+        </p:spPr>
+        <p:txBody>
+          <a:bodyPr wrap="square" lIns="0" tIns="0" rIns="0" bIns="0" rtlCol="0" anchor="ctr"/>
+          <a:lstStyle/>
+          <a:p>
+            <a:pPr algn="ctr" indent="0" marL="0">
+              <a:buNone/>
+            </a:pPr>
+            <a:r>
+              <a:rPr lang="en-US" sz="1300" b="1" dirty="0">
+                <a:solidFill>
+                  <a:schemeClr val="tx1"/>
+                </a:solidFill>
+              </a:rPr>
+              <a:t>57.1</a:t>
+            </a:r>
+            <a:endParaRPr lang="en-US" sz="1300" dirty="0"/>
+          </a:p>
+        </p:txBody>
+      </p:sp>
+      <p:sp>
+        <p:nvSpPr>
+          <p:cNvPr id="25" name="Text 23"/>
+          <p:cNvSpPr txBox="1"/>
+          <p:nvPr/>
+        </p:nvSpPr>
+        <p:spPr>
+          <a:xfrm>
+            <a:off x="1097280" y="5376672"/>
+            <a:ext cx="2133600" cy="365760"/>
+          </a:xfrm>
+          <a:prstGeom prst="rect">
+            <a:avLst/>
+          </a:prstGeom>
+          <a:noFill/>
+          <a:ln/>
+        </p:spPr>
+        <p:txBody>
+          <a:bodyPr wrap="square" lIns="0" tIns="0" rIns="0" bIns="0" rtlCol="0" anchor="ctr"/>
+          <a:lstStyle/>
+          <a:p>
+            <a:pPr algn="ctr" indent="0" marL="0">
+              <a:buNone/>
+            </a:pPr>
+            <a:r>
+              <a:rPr lang="en-US" sz="1300" dirty="0">
+                <a:solidFill>
+                  <a:schemeClr val="tx1"/>
+                </a:solidFill>
+              </a:rPr>
+              <a:t>NusaX (400)</a:t>
+            </a:r>
+            <a:endParaRPr lang="en-US" sz="1300" dirty="0"/>
+          </a:p>
+        </p:txBody>
+      </p:sp>
+      <p:sp>
+        <p:nvSpPr>
+          <p:cNvPr id="26" name="Column FLORES (1,012) Base NLLB-200"/>
+          <p:cNvSpPr/>
+          <p:nvPr/>
+        </p:nvSpPr>
+        <p:spPr>
+          <a:xfrm>
+            <a:off x="3657600" y="3218277"/>
+            <a:ext cx="640080" cy="2085243"/>
+          </a:xfrm>
+          <a:prstGeom prst="rect">
+            <a:avLst/>
+          </a:prstGeom>
+          <a:solidFill>
+            <a:srgbClr val="9DB4BB"/>
+          </a:solidFill>
+          <a:ln w="12700">
+            <a:solidFill>
+              <a:srgbClr val="9DB4BB"/>
+            </a:solidFill>
+            <a:prstDash val="solid"/>
+          </a:ln>
+        </p:spPr>
+      </p:sp>
+      <p:sp>
+        <p:nvSpPr>
+          <p:cNvPr id="27" name="Text 25"/>
+          <p:cNvSpPr txBox="1"/>
+          <p:nvPr/>
+        </p:nvSpPr>
+        <p:spPr>
+          <a:xfrm>
+            <a:off x="3474720" y="2907381"/>
+            <a:ext cx="1005840" cy="274320"/>
+          </a:xfrm>
+          <a:prstGeom prst="rect">
+            <a:avLst/>
+          </a:prstGeom>
+          <a:noFill/>
+          <a:ln/>
+        </p:spPr>
+        <p:txBody>
+          <a:bodyPr wrap="square" lIns="0" tIns="0" rIns="0" bIns="0" rtlCol="0" anchor="ctr"/>
+          <a:lstStyle/>
+          <a:p>
+            <a:pPr algn="ctr" indent="0" marL="0">
+              <a:buNone/>
+            </a:pPr>
+            <a:r>
+              <a:rPr lang="en-US" sz="1300" b="1" dirty="0">
+                <a:solidFill>
+                  <a:schemeClr val="tx1"/>
+                </a:solidFill>
+              </a:rPr>
+              <a:t>46.3</a:t>
+            </a:r>
+            <a:endParaRPr lang="en-US" sz="1300" dirty="0"/>
+          </a:p>
+        </p:txBody>
+      </p:sp>
+      <p:sp>
+        <p:nvSpPr>
+          <p:cNvPr id="28" name="Column FLORES (1,012) Our fine-tuned model"/>
+          <p:cNvSpPr/>
+          <p:nvPr/>
+        </p:nvSpPr>
+        <p:spPr>
+          <a:xfrm>
+            <a:off x="4297680" y="2923539"/>
+            <a:ext cx="640080" cy="2379981"/>
+          </a:xfrm>
+          <a:prstGeom prst="rect">
+            <a:avLst/>
+          </a:prstGeom>
+          <a:solidFill>
+            <a:srgbClr val="0D9488"/>
+          </a:solidFill>
+          <a:ln w="12700">
+            <a:solidFill>
+              <a:srgbClr val="0D9488"/>
+            </a:solidFill>
+            <a:prstDash val="solid"/>
+          </a:ln>
+        </p:spPr>
+      </p:sp>
+      <p:sp>
+        <p:nvSpPr>
+          <p:cNvPr id="29" name="Text 27"/>
+          <p:cNvSpPr txBox="1"/>
+          <p:nvPr/>
+        </p:nvSpPr>
+        <p:spPr>
+          <a:xfrm>
+            <a:off x="4114800" y="2612643"/>
+            <a:ext cx="1005840" cy="274320"/>
+          </a:xfrm>
+          <a:prstGeom prst="rect">
+            <a:avLst/>
+          </a:prstGeom>
+          <a:noFill/>
+          <a:ln/>
+        </p:spPr>
+        <p:txBody>
+          <a:bodyPr wrap="square" lIns="0" tIns="0" rIns="0" bIns="0" rtlCol="0" anchor="ctr"/>
+          <a:lstStyle/>
+          <a:p>
+            <a:pPr algn="ctr" indent="0" marL="0">
+              <a:buNone/>
+            </a:pPr>
+            <a:r>
+              <a:rPr lang="en-US" sz="1300" b="1" dirty="0">
+                <a:solidFill>
+                  <a:schemeClr val="tx1"/>
+                </a:solidFill>
+              </a:rPr>
+              <a:t>52.8</a:t>
+            </a:r>
+            <a:endParaRPr lang="en-US" sz="1300" dirty="0"/>
+          </a:p>
+        </p:txBody>
+      </p:sp>
+      <p:sp>
+        <p:nvSpPr>
+          <p:cNvPr id="30" name="Text 28"/>
+          <p:cNvSpPr txBox="1"/>
+          <p:nvPr/>
+        </p:nvSpPr>
+        <p:spPr>
+          <a:xfrm>
+            <a:off x="3230880" y="5376672"/>
+            <a:ext cx="2133600" cy="365760"/>
+          </a:xfrm>
+          <a:prstGeom prst="rect">
+            <a:avLst/>
+          </a:prstGeom>
+          <a:noFill/>
+          <a:ln/>
+        </p:spPr>
+        <p:txBody>
+          <a:bodyPr wrap="square" lIns="0" tIns="0" rIns="0" bIns="0" rtlCol="0" anchor="ctr"/>
+          <a:lstStyle/>
+          <a:p>
+            <a:pPr algn="ctr" indent="0" marL="0">
+              <a:buNone/>
+            </a:pPr>
+            <a:r>
+              <a:rPr lang="en-US" sz="1300" dirty="0">
+                <a:solidFill>
+                  <a:schemeClr val="tx1"/>
+                </a:solidFill>
+              </a:rPr>
+              <a:t>FLORES (1,012)</a:t>
+            </a:r>
+            <a:endParaRPr lang="en-US" sz="1300" dirty="0"/>
+          </a:p>
+        </p:txBody>
+      </p:sp>
+      <p:sp>
+        <p:nvSpPr>
+          <p:cNvPr id="31" name="Column Hikayat (143) Base NLLB-200"/>
+          <p:cNvSpPr/>
+          <p:nvPr/>
+        </p:nvSpPr>
+        <p:spPr>
+          <a:xfrm>
+            <a:off x="5791200" y="4222817"/>
+            <a:ext cx="640080" cy="1080703"/>
+          </a:xfrm>
+          <a:prstGeom prst="rect">
+            <a:avLst/>
+          </a:prstGeom>
+          <a:solidFill>
+            <a:srgbClr val="9DB4BB"/>
+          </a:solidFill>
+          <a:ln w="12700">
+            <a:solidFill>
+              <a:srgbClr val="9DB4BB"/>
+            </a:solidFill>
+            <a:prstDash val="solid"/>
+          </a:ln>
+        </p:spPr>
+      </p:sp>
+      <p:sp>
+        <p:nvSpPr>
+          <p:cNvPr id="32" name="Text 30"/>
+          <p:cNvSpPr txBox="1"/>
+          <p:nvPr/>
+        </p:nvSpPr>
+        <p:spPr>
+          <a:xfrm>
+            <a:off x="5608320" y="3911921"/>
+            <a:ext cx="1005840" cy="274320"/>
+          </a:xfrm>
+          <a:prstGeom prst="rect">
+            <a:avLst/>
+          </a:prstGeom>
+          <a:noFill/>
+          <a:ln/>
+        </p:spPr>
+        <p:txBody>
+          <a:bodyPr wrap="square" lIns="0" tIns="0" rIns="0" bIns="0" rtlCol="0" anchor="ctr"/>
+          <a:lstStyle/>
+          <a:p>
+            <a:pPr algn="ctr" indent="0" marL="0">
+              <a:buNone/>
+            </a:pPr>
+            <a:r>
+              <a:rPr lang="en-US" sz="1300" b="1" dirty="0">
+                <a:solidFill>
+                  <a:schemeClr val="tx1"/>
+                </a:solidFill>
+              </a:rPr>
+              <a:t>24.0</a:t>
+            </a:r>
+            <a:endParaRPr lang="en-US" sz="1300" dirty="0"/>
+          </a:p>
+        </p:txBody>
+      </p:sp>
+      <p:sp>
+        <p:nvSpPr>
+          <p:cNvPr id="33" name="Column Hikayat (143) Our fine-tuned model"/>
+          <p:cNvSpPr/>
+          <p:nvPr/>
+        </p:nvSpPr>
+        <p:spPr>
+          <a:xfrm>
+            <a:off x="6431280" y="2558047"/>
+            <a:ext cx="640080" cy="2745473"/>
+          </a:xfrm>
+          <a:prstGeom prst="rect">
+            <a:avLst/>
+          </a:prstGeom>
+          <a:solidFill>
+            <a:srgbClr val="0D9488"/>
+          </a:solidFill>
+          <a:ln w="12700">
+            <a:solidFill>
+              <a:srgbClr val="0D9488"/>
+            </a:solidFill>
+            <a:prstDash val="solid"/>
+          </a:ln>
+        </p:spPr>
+      </p:sp>
+      <p:sp>
+        <p:nvSpPr>
+          <p:cNvPr id="34" name="Text 32"/>
+          <p:cNvSpPr txBox="1"/>
+          <p:nvPr/>
+        </p:nvSpPr>
+        <p:spPr>
+          <a:xfrm>
+            <a:off x="6248400" y="2247151"/>
+            <a:ext cx="1005840" cy="274320"/>
+          </a:xfrm>
+          <a:prstGeom prst="rect">
+            <a:avLst/>
+          </a:prstGeom>
+          <a:noFill/>
+          <a:ln/>
+        </p:spPr>
+        <p:txBody>
+          <a:bodyPr wrap="square" lIns="0" tIns="0" rIns="0" bIns="0" rtlCol="0" anchor="ctr"/>
+          <a:lstStyle/>
+          <a:p>
+            <a:pPr algn="ctr" indent="0" marL="0">
+              <a:buNone/>
+            </a:pPr>
+            <a:r>
+              <a:rPr lang="en-US" sz="1300" b="1" dirty="0">
+                <a:solidFill>
+                  <a:schemeClr val="tx1"/>
+                </a:solidFill>
+              </a:rPr>
+              <a:t>60.9</a:t>
+            </a:r>
+            <a:endParaRPr lang="en-US" sz="1300" dirty="0"/>
+          </a:p>
+        </p:txBody>
+      </p:sp>
+      <p:sp>
+        <p:nvSpPr>
+          <p:cNvPr id="35" name="Text 33"/>
+          <p:cNvSpPr txBox="1"/>
+          <p:nvPr/>
+        </p:nvSpPr>
+        <p:spPr>
+          <a:xfrm>
+            <a:off x="5364480" y="5376672"/>
+            <a:ext cx="2133600" cy="365760"/>
+          </a:xfrm>
+          <a:prstGeom prst="rect">
+            <a:avLst/>
+          </a:prstGeom>
+          <a:noFill/>
+          <a:ln/>
+        </p:spPr>
+        <p:txBody>
+          <a:bodyPr wrap="square" lIns="0" tIns="0" rIns="0" bIns="0" rtlCol="0" anchor="ctr"/>
+          <a:lstStyle/>
+          <a:p>
+            <a:pPr algn="ctr" indent="0" marL="0">
+              <a:buNone/>
+            </a:pPr>
+            <a:r>
+              <a:rPr lang="en-US" sz="1300" dirty="0">
+                <a:solidFill>
+                  <a:schemeClr val="tx1"/>
+                </a:solidFill>
+              </a:rPr>
+              <a:t>Hikayat (143)</a:t>
+            </a:r>
+            <a:endParaRPr lang="en-US" sz="1300" dirty="0"/>
+          </a:p>
+        </p:txBody>
+      </p:sp>
+      <p:sp>
+        <p:nvSpPr>
+          <p:cNvPr id="36" name="Legend swatch"/>
+          <p:cNvSpPr/>
+          <p:nvPr/>
+        </p:nvSpPr>
+        <p:spPr>
+          <a:xfrm>
+            <a:off x="1463040" y="5916168"/>
+            <a:ext cx="201168" cy="201168"/>
+          </a:xfrm>
+          <a:prstGeom prst="rect">
+            <a:avLst/>
+          </a:prstGeom>
+          <a:solidFill>
+            <a:srgbClr val="9DB4BB"/>
+          </a:solidFill>
+          <a:ln w="12700">
+            <a:solidFill>
+              <a:srgbClr val="9DB4BB"/>
+            </a:solidFill>
+            <a:prstDash val="solid"/>
+          </a:ln>
+        </p:spPr>
+      </p:sp>
+      <p:sp>
+        <p:nvSpPr>
+          <p:cNvPr id="37" name="Text 35"/>
+          <p:cNvSpPr txBox="1"/>
+          <p:nvPr/>
+        </p:nvSpPr>
+        <p:spPr>
+          <a:xfrm>
+            <a:off x="1755648" y="5852160"/>
+            <a:ext cx="2468880" cy="329184"/>
+          </a:xfrm>
+          <a:prstGeom prst="rect">
+            <a:avLst/>
+          </a:prstGeom>
+          <a:noFill/>
+          <a:ln/>
+        </p:spPr>
+        <p:txBody>
+          <a:bodyPr wrap="square" lIns="0" tIns="0" rIns="0" bIns="0" rtlCol="0" anchor="ctr"/>
+          <a:lstStyle/>
+          <a:p>
+            <a:pPr indent="0" marL="0">
+              <a:buNone/>
+            </a:pPr>
+            <a:r>
+              <a:rPr lang="en-US" sz="1300" dirty="0">
+                <a:solidFill>
+                  <a:schemeClr val="tx1"/>
+                </a:solidFill>
+              </a:rPr>
+              <a:t>Base NLLB-200</a:t>
+            </a:r>
+            <a:endParaRPr lang="en-US" sz="1300" dirty="0"/>
+          </a:p>
+        </p:txBody>
+      </p:sp>
+      <p:sp>
+        <p:nvSpPr>
+          <p:cNvPr id="38" name="Legend swatch"/>
+          <p:cNvSpPr/>
+          <p:nvPr/>
+        </p:nvSpPr>
+        <p:spPr>
+          <a:xfrm>
+            <a:off x="4297680" y="5916168"/>
+            <a:ext cx="201168" cy="201168"/>
+          </a:xfrm>
+          <a:prstGeom prst="rect">
+            <a:avLst/>
+          </a:prstGeom>
+          <a:solidFill>
+            <a:srgbClr val="0D9488"/>
+          </a:solidFill>
+          <a:ln w="12700">
+            <a:solidFill>
+              <a:srgbClr val="0D9488"/>
+            </a:solidFill>
+            <a:prstDash val="solid"/>
+          </a:ln>
+        </p:spPr>
+      </p:sp>
+      <p:sp>
+        <p:nvSpPr>
+          <p:cNvPr id="39" name="Text 37"/>
+          <p:cNvSpPr txBox="1"/>
+          <p:nvPr/>
+        </p:nvSpPr>
+        <p:spPr>
+          <a:xfrm>
+            <a:off x="4590288" y="5852160"/>
+            <a:ext cx="2468880" cy="329184"/>
+          </a:xfrm>
+          <a:prstGeom prst="rect">
+            <a:avLst/>
+          </a:prstGeom>
+          <a:noFill/>
+          <a:ln/>
+        </p:spPr>
+        <p:txBody>
+          <a:bodyPr wrap="square" lIns="0" tIns="0" rIns="0" bIns="0" rtlCol="0" anchor="ctr"/>
+          <a:lstStyle/>
+          <a:p>
+            <a:pPr indent="0" marL="0">
+              <a:buNone/>
+            </a:pPr>
+            <a:r>
+              <a:rPr lang="en-US" sz="1300" dirty="0">
+                <a:solidFill>
+                  <a:schemeClr val="tx1"/>
+                </a:solidFill>
+              </a:rPr>
+              <a:t>Our fine-tuned model</a:t>
+            </a:r>
+            <a:endParaRPr lang="en-US" sz="1300" dirty="0"/>
+          </a:p>
+        </p:txBody>
+      </p:sp>
       <p:graphicFrame>
         <p:nvGraphicFramePr>
           <p:cNvPr id="15" name="Table 0"/>
@@ -9175,10 +9882,10 @@
             <a:tbl>
               <a:tblPr/>
               <a:tblGrid>
-                <a:gridCol w="1005840"/>
                 <a:gridCol w="914400"/>
-                <a:gridCol w="914400"/>
-                <a:gridCol w="1033272"/>
+                <a:gridCol w="960120"/>
+                <a:gridCol w="868680"/>
+                <a:gridCol w="1124712"/>
               </a:tblGrid>
               <a:tr h="457200">
                 <a:tc>
@@ -9190,14 +9897,14 @@
                         <a:buNone/>
                       </a:pPr>
                       <a:r>
-                        <a:rPr lang="en-US" sz="1200" b="1" dirty="0">
+                        <a:rPr lang="en-US" sz="1100" b="1" dirty="0">
                           <a:solidFill>
                             <a:srgbClr val="FFFFFF"/>
                           </a:solidFill>
                         </a:rPr>
                         <a:t>Test set</a:t>
                       </a:r>
-                      <a:endParaRPr lang="en-US" sz="1200" dirty="0"/>
+                      <a:endParaRPr lang="en-US" sz="1100" dirty="0"/>
                     </a:p>
                   </a:txBody>
                   <a:tcPr marL="91440" marR="91440" marT="36576" marB="36576" anchor="ctr">
@@ -9251,14 +9958,14 @@
                         <a:buNone/>
                       </a:pPr>
                       <a:r>
-                        <a:rPr lang="en-US" sz="1200" b="1" dirty="0">
+                        <a:rPr lang="en-US" sz="1100" b="1" dirty="0">
                           <a:solidFill>
                             <a:srgbClr val="FFFFFF"/>
                           </a:solidFill>
                         </a:rPr>
                         <a:t>Base BLEU</a:t>
                       </a:r>
-                      <a:endParaRPr lang="en-US" sz="1200" dirty="0"/>
+                      <a:endParaRPr lang="en-US" sz="1100" dirty="0"/>
                     </a:p>
                   </a:txBody>
                   <a:tcPr marL="91440" marR="91440" marT="36576" marB="36576" anchor="ctr">
@@ -9312,14 +10019,14 @@
                         <a:buNone/>
                       </a:pPr>
                       <a:r>
-                        <a:rPr lang="en-US" sz="1200" b="1" dirty="0">
+                        <a:rPr lang="en-US" sz="1100" b="1" dirty="0">
                           <a:solidFill>
                             <a:srgbClr val="FFFFFF"/>
                           </a:solidFill>
                         </a:rPr>
-                        <a:t>Ours BLEU</a:t>
+                        <a:t>Our BLEU</a:t>
                       </a:r>
-                      <a:endParaRPr lang="en-US" sz="1200" dirty="0"/>
+                      <a:endParaRPr lang="en-US" sz="1100" dirty="0"/>
                     </a:p>
                   </a:txBody>
                   <a:tcPr marL="91440" marR="91440" marT="36576" marB="36576" anchor="ctr">
@@ -9373,14 +10080,14 @@
                         <a:buNone/>
                       </a:pPr>
                       <a:r>
-                        <a:rPr lang="en-US" sz="1200" b="1" dirty="0">
+                        <a:rPr lang="en-US" sz="1100" b="1" dirty="0">
                           <a:solidFill>
                             <a:srgbClr val="FFFFFF"/>
                           </a:solidFill>
                         </a:rPr>
-                        <a:t>Gain chrF++</a:t>
+                        <a:t>chrF++ gain</a:t>
                       </a:r>
-                      <a:endParaRPr lang="en-US" sz="1200" dirty="0"/>
+                      <a:endParaRPr lang="en-US" sz="1100" dirty="0"/>
                     </a:p>
                   </a:txBody>
                   <a:tcPr marL="91440" marR="91440" marT="36576" marB="36576" anchor="ctr">
@@ -10170,7 +10877,7 @@
       </p:graphicFrame>
       <p:sp>
         <p:nvSpPr>
-          <p:cNvPr id="6" name="Note card"/>
+          <p:cNvPr id="41" name="Note card"/>
           <p:cNvSpPr/>
           <p:nvPr/>
         </p:nvSpPr>
@@ -10197,7 +10904,7 @@
       </p:sp>
       <p:sp>
         <p:nvSpPr>
-          <p:cNvPr id="7" name="Text 3"/>
+          <p:cNvPr id="42" name="Text 39"/>
           <p:cNvSpPr txBox="1"/>
           <p:nvPr/>
         </p:nvSpPr>
@@ -10233,7 +10940,7 @@
       </p:sp>
       <p:sp>
         <p:nvSpPr>
-          <p:cNvPr id="8" name="Text 4"/>
+          <p:cNvPr id="43" name="Text 40"/>
           <p:cNvSpPr txBox="1"/>
           <p:nvPr/>
         </p:nvSpPr>
@@ -10411,25 +11118,530 @@
           </a:p>
         </p:txBody>
       </p:sp>
-      <p:graphicFrame>
-        <p:nvGraphicFramePr>
-          <p:cNvPr id="4" name="Chart 0" descr=""/>
-          <p:cNvGraphicFramePr/>
-          <p:nvPr/>
-        </p:nvGraphicFramePr>
-        <p:xfrm>
-          <a:off x="548640" y="1371600"/>
-          <a:ext cx="7223760" cy="4846320"/>
-        </p:xfrm>
-        <a:graphic xmlns:a="http://schemas.openxmlformats.org/drawingml/2006/main">
-          <a:graphicData uri="http://schemas.openxmlformats.org/drawingml/2006/chart">
-            <c:chart xmlns:c="http://schemas.openxmlformats.org/drawingml/2006/chart" r:id="rId1"/>
-          </a:graphicData>
-        </a:graphic>
-      </p:graphicFrame>
-      <p:sp>
-        <p:nvSpPr>
-          <p:cNvPr id="5" name="Stat card"/>
+      <p:sp>
+        <p:nvSpPr>
+          <p:cNvPr id="4" name="Text 2"/>
+          <p:cNvSpPr txBox="1"/>
+          <p:nvPr/>
+        </p:nvSpPr>
+        <p:spPr>
+          <a:xfrm>
+            <a:off x="548640" y="1371600"/>
+            <a:ext cx="7223760" cy="365760"/>
+          </a:xfrm>
+          <a:prstGeom prst="rect">
+            <a:avLst/>
+          </a:prstGeom>
+          <a:noFill/>
+          <a:ln/>
+        </p:spPr>
+        <p:txBody>
+          <a:bodyPr wrap="square" lIns="0" tIns="0" rIns="0" bIns="0" rtlCol="0" anchor="ctr"/>
+          <a:lstStyle/>
+          <a:p>
+            <a:pPr indent="0" marL="0">
+              <a:buNone/>
+            </a:pPr>
+            <a:r>
+              <a:rPr lang="en-US" sz="1400" b="1" dirty="0">
+                <a:solidFill>
+                  <a:schemeClr val="tx1"/>
+                </a:solidFill>
+              </a:rPr>
+              <a:t>chrF++ on the 400 NusaX test sentences</a:t>
+            </a:r>
+            <a:endParaRPr lang="en-US" sz="1400" dirty="0"/>
+          </a:p>
+        </p:txBody>
+      </p:sp>
+      <p:sp>
+        <p:nvSpPr>
+          <p:cNvPr id="5" name="Text 3"/>
+          <p:cNvSpPr txBox="1"/>
+          <p:nvPr/>
+        </p:nvSpPr>
+        <p:spPr>
+          <a:xfrm>
+            <a:off x="548640" y="1995587"/>
+            <a:ext cx="2743200" cy="544251"/>
+          </a:xfrm>
+          <a:prstGeom prst="rect">
+            <a:avLst/>
+          </a:prstGeom>
+          <a:noFill/>
+          <a:ln/>
+        </p:spPr>
+        <p:txBody>
+          <a:bodyPr wrap="square" lIns="0" tIns="0" rIns="0" bIns="0" rtlCol="0" anchor="ctr"/>
+          <a:lstStyle/>
+          <a:p>
+            <a:pPr algn="r" indent="0" marL="0">
+              <a:buNone/>
+            </a:pPr>
+            <a:r>
+              <a:rPr lang="en-US" sz="1400" dirty="0">
+                <a:solidFill>
+                  <a:schemeClr val="tx1"/>
+                </a:solidFill>
+              </a:rPr>
+              <a:t>Copy (nothing translated)</a:t>
+            </a:r>
+            <a:endParaRPr lang="en-US" sz="1400" dirty="0"/>
+          </a:p>
+        </p:txBody>
+      </p:sp>
+      <p:sp>
+        <p:nvSpPr>
+          <p:cNvPr id="6" name="Bar Copy (nothing translated)"/>
+          <p:cNvSpPr/>
+          <p:nvPr/>
+        </p:nvSpPr>
+        <p:spPr>
+          <a:xfrm>
+            <a:off x="3429000" y="1995587"/>
+            <a:ext cx="1710631" cy="544251"/>
+          </a:xfrm>
+          <a:prstGeom prst="rect">
+            <a:avLst/>
+          </a:prstGeom>
+          <a:solidFill>
+            <a:srgbClr val="9DB4BB"/>
+          </a:solidFill>
+          <a:ln w="12700">
+            <a:solidFill>
+              <a:srgbClr val="9DB4BB"/>
+            </a:solidFill>
+            <a:prstDash val="solid"/>
+          </a:ln>
+        </p:spPr>
+      </p:sp>
+      <p:sp>
+        <p:nvSpPr>
+          <p:cNvPr id="7" name="Text 5"/>
+          <p:cNvSpPr txBox="1"/>
+          <p:nvPr/>
+        </p:nvSpPr>
+        <p:spPr>
+          <a:xfrm>
+            <a:off x="5231071" y="1995587"/>
+            <a:ext cx="777240" cy="544251"/>
+          </a:xfrm>
+          <a:prstGeom prst="rect">
+            <a:avLst/>
+          </a:prstGeom>
+          <a:noFill/>
+          <a:ln/>
+        </p:spPr>
+        <p:txBody>
+          <a:bodyPr wrap="square" lIns="0" tIns="0" rIns="0" bIns="0" rtlCol="0" anchor="ctr"/>
+          <a:lstStyle/>
+          <a:p>
+            <a:pPr indent="0" marL="0">
+              <a:buNone/>
+            </a:pPr>
+            <a:r>
+              <a:rPr lang="en-US" sz="1400" b="1" dirty="0">
+                <a:solidFill>
+                  <a:schemeClr val="tx1"/>
+                </a:solidFill>
+              </a:rPr>
+              <a:t>32.0</a:t>
+            </a:r>
+            <a:endParaRPr lang="en-US" sz="1400" dirty="0"/>
+          </a:p>
+        </p:txBody>
+      </p:sp>
+      <p:sp>
+        <p:nvSpPr>
+          <p:cNvPr id="8" name="Text 6"/>
+          <p:cNvSpPr txBox="1"/>
+          <p:nvPr/>
+        </p:nvSpPr>
+        <p:spPr>
+          <a:xfrm>
+            <a:off x="548640" y="2873411"/>
+            <a:ext cx="2743200" cy="544251"/>
+          </a:xfrm>
+          <a:prstGeom prst="rect">
+            <a:avLst/>
+          </a:prstGeom>
+          <a:noFill/>
+          <a:ln/>
+        </p:spPr>
+        <p:txBody>
+          <a:bodyPr wrap="square" lIns="0" tIns="0" rIns="0" bIns="0" rtlCol="0" anchor="ctr"/>
+          <a:lstStyle/>
+          <a:p>
+            <a:pPr algn="r" indent="0" marL="0">
+              <a:buNone/>
+            </a:pPr>
+            <a:r>
+              <a:rPr lang="en-US" sz="1400" dirty="0">
+                <a:solidFill>
+                  <a:schemeClr val="tx1"/>
+                </a:solidFill>
+              </a:rPr>
+              <a:t>Direct (dictionary)</a:t>
+            </a:r>
+            <a:endParaRPr lang="en-US" sz="1400" dirty="0"/>
+          </a:p>
+        </p:txBody>
+      </p:sp>
+      <p:sp>
+        <p:nvSpPr>
+          <p:cNvPr id="9" name="Bar Direct (dictionary)"/>
+          <p:cNvSpPr/>
+          <p:nvPr/>
+        </p:nvSpPr>
+        <p:spPr>
+          <a:xfrm>
+            <a:off x="3429000" y="2873411"/>
+            <a:ext cx="1897732" cy="544251"/>
+          </a:xfrm>
+          <a:prstGeom prst="rect">
+            <a:avLst/>
+          </a:prstGeom>
+          <a:solidFill>
+            <a:srgbClr val="4F6F7A"/>
+          </a:solidFill>
+          <a:ln w="12700">
+            <a:solidFill>
+              <a:srgbClr val="4F6F7A"/>
+            </a:solidFill>
+            <a:prstDash val="solid"/>
+          </a:ln>
+        </p:spPr>
+      </p:sp>
+      <p:sp>
+        <p:nvSpPr>
+          <p:cNvPr id="10" name="Text 8"/>
+          <p:cNvSpPr txBox="1"/>
+          <p:nvPr/>
+        </p:nvSpPr>
+        <p:spPr>
+          <a:xfrm>
+            <a:off x="5418172" y="2873411"/>
+            <a:ext cx="777240" cy="544251"/>
+          </a:xfrm>
+          <a:prstGeom prst="rect">
+            <a:avLst/>
+          </a:prstGeom>
+          <a:noFill/>
+          <a:ln/>
+        </p:spPr>
+        <p:txBody>
+          <a:bodyPr wrap="square" lIns="0" tIns="0" rIns="0" bIns="0" rtlCol="0" anchor="ctr"/>
+          <a:lstStyle/>
+          <a:p>
+            <a:pPr indent="0" marL="0">
+              <a:buNone/>
+            </a:pPr>
+            <a:r>
+              <a:rPr lang="en-US" sz="1400" b="1" dirty="0">
+                <a:solidFill>
+                  <a:schemeClr val="tx1"/>
+                </a:solidFill>
+              </a:rPr>
+              <a:t>35.5</a:t>
+            </a:r>
+            <a:endParaRPr lang="en-US" sz="1400" dirty="0"/>
+          </a:p>
+        </p:txBody>
+      </p:sp>
+      <p:sp>
+        <p:nvSpPr>
+          <p:cNvPr id="11" name="Text 9"/>
+          <p:cNvSpPr txBox="1"/>
+          <p:nvPr/>
+        </p:nvSpPr>
+        <p:spPr>
+          <a:xfrm>
+            <a:off x="548640" y="3751235"/>
+            <a:ext cx="2743200" cy="544251"/>
+          </a:xfrm>
+          <a:prstGeom prst="rect">
+            <a:avLst/>
+          </a:prstGeom>
+          <a:noFill/>
+          <a:ln/>
+        </p:spPr>
+        <p:txBody>
+          <a:bodyPr wrap="square" lIns="0" tIns="0" rIns="0" bIns="0" rtlCol="0" anchor="ctr"/>
+          <a:lstStyle/>
+          <a:p>
+            <a:pPr algn="r" indent="0" marL="0">
+              <a:buNone/>
+            </a:pPr>
+            <a:r>
+              <a:rPr lang="en-US" sz="1400" dirty="0">
+                <a:solidFill>
+                  <a:schemeClr val="tx1"/>
+                </a:solidFill>
+              </a:rPr>
+              <a:t>Transfer (rules)</a:t>
+            </a:r>
+            <a:endParaRPr lang="en-US" sz="1400" dirty="0"/>
+          </a:p>
+        </p:txBody>
+      </p:sp>
+      <p:sp>
+        <p:nvSpPr>
+          <p:cNvPr id="12" name="Bar Transfer (rules)"/>
+          <p:cNvSpPr/>
+          <p:nvPr/>
+        </p:nvSpPr>
+        <p:spPr>
+          <a:xfrm>
+            <a:off x="3429000" y="3751235"/>
+            <a:ext cx="2095523" cy="544251"/>
+          </a:xfrm>
+          <a:prstGeom prst="rect">
+            <a:avLst/>
+          </a:prstGeom>
+          <a:solidFill>
+            <a:srgbClr val="4F6F7A"/>
+          </a:solidFill>
+          <a:ln w="12700">
+            <a:solidFill>
+              <a:srgbClr val="4F6F7A"/>
+            </a:solidFill>
+            <a:prstDash val="solid"/>
+          </a:ln>
+        </p:spPr>
+      </p:sp>
+      <p:sp>
+        <p:nvSpPr>
+          <p:cNvPr id="13" name="Text 11"/>
+          <p:cNvSpPr txBox="1"/>
+          <p:nvPr/>
+        </p:nvSpPr>
+        <p:spPr>
+          <a:xfrm>
+            <a:off x="5615963" y="3751235"/>
+            <a:ext cx="777240" cy="544251"/>
+          </a:xfrm>
+          <a:prstGeom prst="rect">
+            <a:avLst/>
+          </a:prstGeom>
+          <a:noFill/>
+          <a:ln/>
+        </p:spPr>
+        <p:txBody>
+          <a:bodyPr wrap="square" lIns="0" tIns="0" rIns="0" bIns="0" rtlCol="0" anchor="ctr"/>
+          <a:lstStyle/>
+          <a:p>
+            <a:pPr indent="0" marL="0">
+              <a:buNone/>
+            </a:pPr>
+            <a:r>
+              <a:rPr lang="en-US" sz="1400" b="1" dirty="0">
+                <a:solidFill>
+                  <a:schemeClr val="tx1"/>
+                </a:solidFill>
+              </a:rPr>
+              <a:t>39.2</a:t>
+            </a:r>
+            <a:endParaRPr lang="en-US" sz="1400" dirty="0"/>
+          </a:p>
+        </p:txBody>
+      </p:sp>
+      <p:sp>
+        <p:nvSpPr>
+          <p:cNvPr id="14" name="Text 12"/>
+          <p:cNvSpPr txBox="1"/>
+          <p:nvPr/>
+        </p:nvSpPr>
+        <p:spPr>
+          <a:xfrm>
+            <a:off x="548640" y="4629059"/>
+            <a:ext cx="2743200" cy="544251"/>
+          </a:xfrm>
+          <a:prstGeom prst="rect">
+            <a:avLst/>
+          </a:prstGeom>
+          <a:noFill/>
+          <a:ln/>
+        </p:spPr>
+        <p:txBody>
+          <a:bodyPr wrap="square" lIns="0" tIns="0" rIns="0" bIns="0" rtlCol="0" anchor="ctr"/>
+          <a:lstStyle/>
+          <a:p>
+            <a:pPr algn="r" indent="0" marL="0">
+              <a:buNone/>
+            </a:pPr>
+            <a:r>
+              <a:rPr lang="en-US" sz="1400" dirty="0">
+                <a:solidFill>
+                  <a:schemeClr val="tx1"/>
+                </a:solidFill>
+              </a:rPr>
+              <a:t>Base NLLB-200</a:t>
+            </a:r>
+            <a:endParaRPr lang="en-US" sz="1400" dirty="0"/>
+          </a:p>
+        </p:txBody>
+      </p:sp>
+      <p:sp>
+        <p:nvSpPr>
+          <p:cNvPr id="15" name="Bar Base NLLB-200"/>
+          <p:cNvSpPr/>
+          <p:nvPr/>
+        </p:nvSpPr>
+        <p:spPr>
+          <a:xfrm>
+            <a:off x="3429000" y="4629059"/>
+            <a:ext cx="2068795" cy="544251"/>
+          </a:xfrm>
+          <a:prstGeom prst="rect">
+            <a:avLst/>
+          </a:prstGeom>
+          <a:solidFill>
+            <a:srgbClr val="9DB4BB"/>
+          </a:solidFill>
+          <a:ln w="12700">
+            <a:solidFill>
+              <a:srgbClr val="9DB4BB"/>
+            </a:solidFill>
+            <a:prstDash val="solid"/>
+          </a:ln>
+        </p:spPr>
+      </p:sp>
+      <p:sp>
+        <p:nvSpPr>
+          <p:cNvPr id="16" name="Text 14"/>
+          <p:cNvSpPr txBox="1"/>
+          <p:nvPr/>
+        </p:nvSpPr>
+        <p:spPr>
+          <a:xfrm>
+            <a:off x="5589235" y="4629059"/>
+            <a:ext cx="777240" cy="544251"/>
+          </a:xfrm>
+          <a:prstGeom prst="rect">
+            <a:avLst/>
+          </a:prstGeom>
+          <a:noFill/>
+          <a:ln/>
+        </p:spPr>
+        <p:txBody>
+          <a:bodyPr wrap="square" lIns="0" tIns="0" rIns="0" bIns="0" rtlCol="0" anchor="ctr"/>
+          <a:lstStyle/>
+          <a:p>
+            <a:pPr indent="0" marL="0">
+              <a:buNone/>
+            </a:pPr>
+            <a:r>
+              <a:rPr lang="en-US" sz="1400" b="1" dirty="0">
+                <a:solidFill>
+                  <a:schemeClr val="tx1"/>
+                </a:solidFill>
+              </a:rPr>
+              <a:t>38.7</a:t>
+            </a:r>
+            <a:endParaRPr lang="en-US" sz="1400" dirty="0"/>
+          </a:p>
+        </p:txBody>
+      </p:sp>
+      <p:sp>
+        <p:nvSpPr>
+          <p:cNvPr id="17" name="Text 15"/>
+          <p:cNvSpPr txBox="1"/>
+          <p:nvPr/>
+        </p:nvSpPr>
+        <p:spPr>
+          <a:xfrm>
+            <a:off x="548640" y="5506883"/>
+            <a:ext cx="2743200" cy="544251"/>
+          </a:xfrm>
+          <a:prstGeom prst="rect">
+            <a:avLst/>
+          </a:prstGeom>
+          <a:noFill/>
+          <a:ln/>
+        </p:spPr>
+        <p:txBody>
+          <a:bodyPr wrap="square" lIns="0" tIns="0" rIns="0" bIns="0" rtlCol="0" anchor="ctr"/>
+          <a:lstStyle/>
+          <a:p>
+            <a:pPr algn="r" indent="0" marL="0">
+              <a:buNone/>
+            </a:pPr>
+            <a:r>
+              <a:rPr lang="en-US" sz="1400" dirty="0">
+                <a:solidFill>
+                  <a:schemeClr val="tx1"/>
+                </a:solidFill>
+              </a:rPr>
+              <a:t>Fine-tuned NLLB</a:t>
+            </a:r>
+            <a:endParaRPr lang="en-US" sz="1400" dirty="0"/>
+          </a:p>
+        </p:txBody>
+      </p:sp>
+      <p:sp>
+        <p:nvSpPr>
+          <p:cNvPr id="18" name="Bar Fine-tuned NLLB"/>
+          <p:cNvSpPr/>
+          <p:nvPr/>
+        </p:nvSpPr>
+        <p:spPr>
+          <a:xfrm>
+            <a:off x="3429000" y="5506883"/>
+            <a:ext cx="3052408" cy="544251"/>
+          </a:xfrm>
+          <a:prstGeom prst="rect">
+            <a:avLst/>
+          </a:prstGeom>
+          <a:solidFill>
+            <a:srgbClr val="0D9488"/>
+          </a:solidFill>
+          <a:ln w="12700">
+            <a:solidFill>
+              <a:srgbClr val="0D9488"/>
+            </a:solidFill>
+            <a:prstDash val="solid"/>
+          </a:ln>
+        </p:spPr>
+      </p:sp>
+      <p:sp>
+        <p:nvSpPr>
+          <p:cNvPr id="19" name="Text 17"/>
+          <p:cNvSpPr txBox="1"/>
+          <p:nvPr/>
+        </p:nvSpPr>
+        <p:spPr>
+          <a:xfrm>
+            <a:off x="6572848" y="5506883"/>
+            <a:ext cx="777240" cy="544251"/>
+          </a:xfrm>
+          <a:prstGeom prst="rect">
+            <a:avLst/>
+          </a:prstGeom>
+          <a:noFill/>
+          <a:ln/>
+        </p:spPr>
+        <p:txBody>
+          <a:bodyPr wrap="square" lIns="0" tIns="0" rIns="0" bIns="0" rtlCol="0" anchor="ctr"/>
+          <a:lstStyle/>
+          <a:p>
+            <a:pPr indent="0" marL="0">
+              <a:buNone/>
+            </a:pPr>
+            <a:r>
+              <a:rPr lang="en-US" sz="1400" b="1" dirty="0">
+                <a:solidFill>
+                  <a:schemeClr val="tx1"/>
+                </a:solidFill>
+              </a:rPr>
+              <a:t>57.1</a:t>
+            </a:r>
+            <a:endParaRPr lang="en-US" sz="1400" dirty="0"/>
+          </a:p>
+        </p:txBody>
+      </p:sp>
+      <p:sp>
+        <p:nvSpPr>
+          <p:cNvPr id="20" name="Stat card"/>
           <p:cNvSpPr/>
           <p:nvPr/>
         </p:nvSpPr>
@@ -10456,7 +11668,7 @@
       </p:sp>
       <p:sp>
         <p:nvSpPr>
-          <p:cNvPr id="6" name="Text 3"/>
+          <p:cNvPr id="21" name="Text 19"/>
           <p:cNvSpPr txBox="1"/>
           <p:nvPr/>
         </p:nvSpPr>
@@ -10483,9 +11695,9 @@
                 <a:solidFill>
                   <a:schemeClr val="accent1"/>
                 </a:solidFill>
-                <a:latin typeface="Cambria" pitchFamily="34" charset="0"/>
-                <a:ea typeface="Cambria" pitchFamily="34" charset="-122"/>
-                <a:cs typeface="Cambria" pitchFamily="34" charset="-120"/>
+                <a:latin typeface="Georgia" pitchFamily="34" charset="0"/>
+                <a:ea typeface="Georgia" pitchFamily="34" charset="-122"/>
+                <a:cs typeface="Georgia" pitchFamily="34" charset="-120"/>
               </a:rPr>
               <a:t>+3.5</a:t>
             </a:r>
@@ -10495,7 +11707,7 @@
       </p:sp>
       <p:sp>
         <p:nvSpPr>
-          <p:cNvPr id="7" name="Text 4"/>
+          <p:cNvPr id="22" name="Text 20"/>
           <p:cNvSpPr txBox="1"/>
           <p:nvPr/>
         </p:nvSpPr>
@@ -10531,7 +11743,7 @@
       </p:sp>
       <p:sp>
         <p:nvSpPr>
-          <p:cNvPr id="8" name="Stat card"/>
+          <p:cNvPr id="23" name="Stat card"/>
           <p:cNvSpPr/>
           <p:nvPr/>
         </p:nvSpPr>
@@ -10558,7 +11770,7 @@
       </p:sp>
       <p:sp>
         <p:nvSpPr>
-          <p:cNvPr id="9" name="Text 6"/>
+          <p:cNvPr id="24" name="Text 22"/>
           <p:cNvSpPr txBox="1"/>
           <p:nvPr/>
         </p:nvSpPr>
@@ -10585,9 +11797,9 @@
                 <a:solidFill>
                   <a:schemeClr val="accent1"/>
                 </a:solidFill>
-                <a:latin typeface="Cambria" pitchFamily="34" charset="0"/>
-                <a:ea typeface="Cambria" pitchFamily="34" charset="-122"/>
-                <a:cs typeface="Cambria" pitchFamily="34" charset="-120"/>
+                <a:latin typeface="Georgia" pitchFamily="34" charset="0"/>
+                <a:ea typeface="Georgia" pitchFamily="34" charset="-122"/>
+                <a:cs typeface="Georgia" pitchFamily="34" charset="-120"/>
               </a:rPr>
               <a:t>+3.7</a:t>
             </a:r>
@@ -10597,7 +11809,7 @@
       </p:sp>
       <p:sp>
         <p:nvSpPr>
-          <p:cNvPr id="10" name="Text 7"/>
+          <p:cNvPr id="25" name="Text 23"/>
           <p:cNvSpPr txBox="1"/>
           <p:nvPr/>
         </p:nvSpPr>
@@ -10633,7 +11845,7 @@
       </p:sp>
       <p:sp>
         <p:nvSpPr>
-          <p:cNvPr id="11" name="Stat card"/>
+          <p:cNvPr id="26" name="Stat card"/>
           <p:cNvSpPr/>
           <p:nvPr/>
         </p:nvSpPr>
@@ -10660,7 +11872,7 @@
       </p:sp>
       <p:sp>
         <p:nvSpPr>
-          <p:cNvPr id="12" name="Text 9"/>
+          <p:cNvPr id="27" name="Text 25"/>
           <p:cNvSpPr txBox="1"/>
           <p:nvPr/>
         </p:nvSpPr>
@@ -10687,9 +11899,9 @@
                 <a:solidFill>
                   <a:schemeClr val="accent1"/>
                 </a:solidFill>
-                <a:latin typeface="Cambria" pitchFamily="34" charset="0"/>
-                <a:ea typeface="Cambria" pitchFamily="34" charset="-122"/>
-                <a:cs typeface="Cambria" pitchFamily="34" charset="-120"/>
+                <a:latin typeface="Georgia" pitchFamily="34" charset="0"/>
+                <a:ea typeface="Georgia" pitchFamily="34" charset="-122"/>
+                <a:cs typeface="Georgia" pitchFamily="34" charset="-120"/>
               </a:rPr>
               <a:t>+17.9</a:t>
             </a:r>
@@ -10699,7 +11911,7 @@
       </p:sp>
       <p:sp>
         <p:nvSpPr>
-          <p:cNvPr id="13" name="Text 10"/>
+          <p:cNvPr id="28" name="Text 26"/>
           <p:cNvSpPr txBox="1"/>
           <p:nvPr/>
         </p:nvSpPr>
@@ -11680,7 +12892,7 @@
                   <a:schemeClr val="tx1"/>
                 </a:solidFill>
               </a:rPr>
-              <a:t>A shared representation: the interlingual view</a:t>
+              <a:t>Interlingual view: shared space</a:t>
             </a:r>
             <a:endParaRPr lang="en-US" sz="3600" dirty="0"/>
           </a:p>
@@ -11787,39 +12999,28 @@
       </p:sp>
       <p:sp>
         <p:nvSpPr>
-          <p:cNvPr id="7" name="Text 5"/>
-          <p:cNvSpPr txBox="1"/>
-          <p:nvPr/>
-        </p:nvSpPr>
-        <p:spPr>
-          <a:xfrm>
-            <a:off x="2560320" y="2514600"/>
-            <a:ext cx="228600" cy="457200"/>
-          </a:xfrm>
-          <a:prstGeom prst="rect">
-            <a:avLst/>
-          </a:prstGeom>
-          <a:noFill/>
-          <a:ln/>
-        </p:spPr>
-        <p:txBody>
-          <a:bodyPr wrap="square" lIns="0" tIns="0" rIns="0" bIns="0" rtlCol="0" anchor="ctr"/>
-          <a:lstStyle/>
-          <a:p>
-            <a:pPr algn="ctr" indent="0" marL="0">
-              <a:buNone/>
-            </a:pPr>
-            <a:r>
-              <a:rPr lang="en-US" sz="2400" b="1" dirty="0">
-                <a:solidFill>
-                  <a:schemeClr val="accent1"/>
-                </a:solidFill>
-              </a:rPr>
-              <a:t>→</a:t>
-            </a:r>
-            <a:endParaRPr lang="en-US" sz="2400" dirty="0"/>
-          </a:p>
-        </p:txBody>
+          <p:cNvPr id="7" name="Flow arrow"/>
+          <p:cNvSpPr/>
+          <p:nvPr/>
+        </p:nvSpPr>
+        <p:spPr>
+          <a:xfrm>
+            <a:off x="2569464" y="2606040"/>
+            <a:ext cx="201168" cy="256032"/>
+          </a:xfrm>
+          <a:prstGeom prst="rightArrow">
+            <a:avLst/>
+          </a:prstGeom>
+          <a:solidFill>
+            <a:schemeClr val="accent1"/>
+          </a:solidFill>
+          <a:ln w="12700">
+            <a:solidFill>
+              <a:schemeClr val="accent1"/>
+            </a:solidFill>
+            <a:prstDash val="solid"/>
+          </a:ln>
+        </p:spPr>
       </p:sp>
       <p:sp>
         <p:nvSpPr>
@@ -11922,39 +13123,28 @@
       </p:sp>
       <p:sp>
         <p:nvSpPr>
-          <p:cNvPr id="11" name="Text 9"/>
-          <p:cNvSpPr txBox="1"/>
-          <p:nvPr/>
-        </p:nvSpPr>
-        <p:spPr>
-          <a:xfrm>
-            <a:off x="4800600" y="2514600"/>
-            <a:ext cx="228600" cy="457200"/>
-          </a:xfrm>
-          <a:prstGeom prst="rect">
-            <a:avLst/>
-          </a:prstGeom>
-          <a:noFill/>
-          <a:ln/>
-        </p:spPr>
-        <p:txBody>
-          <a:bodyPr wrap="square" lIns="0" tIns="0" rIns="0" bIns="0" rtlCol="0" anchor="ctr"/>
-          <a:lstStyle/>
-          <a:p>
-            <a:pPr algn="ctr" indent="0" marL="0">
-              <a:buNone/>
-            </a:pPr>
-            <a:r>
-              <a:rPr lang="en-US" sz="2400" b="1" dirty="0">
-                <a:solidFill>
-                  <a:schemeClr val="accent1"/>
-                </a:solidFill>
-              </a:rPr>
-              <a:t>→</a:t>
-            </a:r>
-            <a:endParaRPr lang="en-US" sz="2400" dirty="0"/>
-          </a:p>
-        </p:txBody>
+          <p:cNvPr id="11" name="Flow arrow"/>
+          <p:cNvSpPr/>
+          <p:nvPr/>
+        </p:nvSpPr>
+        <p:spPr>
+          <a:xfrm>
+            <a:off x="4809744" y="2606040"/>
+            <a:ext cx="201168" cy="256032"/>
+          </a:xfrm>
+          <a:prstGeom prst="rightArrow">
+            <a:avLst/>
+          </a:prstGeom>
+          <a:solidFill>
+            <a:schemeClr val="accent1"/>
+          </a:solidFill>
+          <a:ln w="12700">
+            <a:solidFill>
+              <a:schemeClr val="accent1"/>
+            </a:solidFill>
+            <a:prstDash val="solid"/>
+          </a:ln>
+        </p:spPr>
       </p:sp>
       <p:sp>
         <p:nvSpPr>
@@ -12057,39 +13247,28 @@
       </p:sp>
       <p:sp>
         <p:nvSpPr>
-          <p:cNvPr id="15" name="Text 13"/>
-          <p:cNvSpPr txBox="1"/>
-          <p:nvPr/>
-        </p:nvSpPr>
-        <p:spPr>
-          <a:xfrm>
-            <a:off x="7040880" y="2514600"/>
-            <a:ext cx="228600" cy="457200"/>
-          </a:xfrm>
-          <a:prstGeom prst="rect">
-            <a:avLst/>
-          </a:prstGeom>
-          <a:noFill/>
-          <a:ln/>
-        </p:spPr>
-        <p:txBody>
-          <a:bodyPr wrap="square" lIns="0" tIns="0" rIns="0" bIns="0" rtlCol="0" anchor="ctr"/>
-          <a:lstStyle/>
-          <a:p>
-            <a:pPr algn="ctr" indent="0" marL="0">
-              <a:buNone/>
-            </a:pPr>
-            <a:r>
-              <a:rPr lang="en-US" sz="2400" b="1" dirty="0">
-                <a:solidFill>
-                  <a:schemeClr val="accent1"/>
-                </a:solidFill>
-              </a:rPr>
-              <a:t>→</a:t>
-            </a:r>
-            <a:endParaRPr lang="en-US" sz="2400" dirty="0"/>
-          </a:p>
-        </p:txBody>
+          <p:cNvPr id="15" name="Flow arrow"/>
+          <p:cNvSpPr/>
+          <p:nvPr/>
+        </p:nvSpPr>
+        <p:spPr>
+          <a:xfrm>
+            <a:off x="7050024" y="2606040"/>
+            <a:ext cx="201168" cy="256032"/>
+          </a:xfrm>
+          <a:prstGeom prst="rightArrow">
+            <a:avLst/>
+          </a:prstGeom>
+          <a:solidFill>
+            <a:schemeClr val="accent1"/>
+          </a:solidFill>
+          <a:ln w="12700">
+            <a:solidFill>
+              <a:schemeClr val="accent1"/>
+            </a:solidFill>
+            <a:prstDash val="solid"/>
+          </a:ln>
+        </p:spPr>
       </p:sp>
       <p:sp>
         <p:nvSpPr>
@@ -12192,39 +13371,28 @@
       </p:sp>
       <p:sp>
         <p:nvSpPr>
-          <p:cNvPr id="19" name="Text 17"/>
-          <p:cNvSpPr txBox="1"/>
-          <p:nvPr/>
-        </p:nvSpPr>
-        <p:spPr>
-          <a:xfrm>
-            <a:off x="9281160" y="2514600"/>
-            <a:ext cx="228600" cy="457200"/>
-          </a:xfrm>
-          <a:prstGeom prst="rect">
-            <a:avLst/>
-          </a:prstGeom>
-          <a:noFill/>
-          <a:ln/>
-        </p:spPr>
-        <p:txBody>
-          <a:bodyPr wrap="square" lIns="0" tIns="0" rIns="0" bIns="0" rtlCol="0" anchor="ctr"/>
-          <a:lstStyle/>
-          <a:p>
-            <a:pPr algn="ctr" indent="0" marL="0">
-              <a:buNone/>
-            </a:pPr>
-            <a:r>
-              <a:rPr lang="en-US" sz="2400" b="1" dirty="0">
-                <a:solidFill>
-                  <a:schemeClr val="accent1"/>
-                </a:solidFill>
-              </a:rPr>
-              <a:t>→</a:t>
-            </a:r>
-            <a:endParaRPr lang="en-US" sz="2400" dirty="0"/>
-          </a:p>
-        </p:txBody>
+          <p:cNvPr id="19" name="Flow arrow"/>
+          <p:cNvSpPr/>
+          <p:nvPr/>
+        </p:nvSpPr>
+        <p:spPr>
+          <a:xfrm>
+            <a:off x="9290304" y="2606040"/>
+            <a:ext cx="201168" cy="256032"/>
+          </a:xfrm>
+          <a:prstGeom prst="rightArrow">
+            <a:avLst/>
+          </a:prstGeom>
+          <a:solidFill>
+            <a:schemeClr val="accent1"/>
+          </a:solidFill>
+          <a:ln w="12700">
+            <a:solidFill>
+              <a:schemeClr val="accent1"/>
+            </a:solidFill>
+            <a:prstDash val="solid"/>
+          </a:ln>
+        </p:spPr>
       </p:sp>
       <p:sp>
         <p:nvSpPr>
@@ -12404,7 +13572,7 @@
                   <a:schemeClr val="tx1"/>
                 </a:solidFill>
               </a:rPr>
-              <a:t>One model, many languages</a:t>
+              <a:t>One shared model</a:t>
             </a:r>
             <a:endParaRPr lang="en-US" sz="1600" dirty="0"/>
           </a:p>
@@ -13382,16 +14550,40 @@
           </a:ln>
         </p:spPr>
       </p:sp>
-      <p:sp>
-        <p:nvSpPr>
-          <p:cNvPr id="21" name="Text 19"/>
-          <p:cNvSpPr txBox="1"/>
-          <p:nvPr/>
-        </p:nvSpPr>
-        <p:spPr>
-          <a:xfrm>
-            <a:off x="7178040" y="2880360"/>
-            <a:ext cx="4114800" cy="685800"/>
+      <p:pic>
+        <p:nvPicPr>
+          <p:cNvPr id="21" name="Image 0" descr="Tick mark">    </p:cNvPr>
+          <p:cNvPicPr>
+            <a:picLocks noChangeAspect="1"/>
+          </p:cNvPicPr>
+          <p:nvPr/>
+        </p:nvPicPr>
+        <p:blipFill>
+          <a:blip r:embed="rId1"/>
+          <a:stretch>
+            <a:fillRect/>
+          </a:stretch>
+        </p:blipFill>
+        <p:spPr>
+          <a:xfrm>
+            <a:off x="7223760" y="3090672"/>
+            <a:ext cx="274320" cy="274320"/>
+          </a:xfrm>
+          <a:prstGeom prst="rect">
+            <a:avLst/>
+          </a:prstGeom>
+        </p:spPr>
+      </p:pic>
+      <p:sp>
+        <p:nvSpPr>
+          <p:cNvPr id="22" name="Text 19"/>
+          <p:cNvSpPr txBox="1"/>
+          <p:nvPr/>
+        </p:nvSpPr>
+        <p:spPr>
+          <a:xfrm>
+            <a:off x="7635240" y="2880360"/>
+            <a:ext cx="3657600" cy="685800"/>
           </a:xfrm>
           <a:prstGeom prst="rect">
             <a:avLst/>
@@ -13412,7 +14604,7 @@
                   <a:schemeClr val="bg1"/>
                 </a:solidFill>
               </a:rPr>
-              <a:t>✓ keude: kedai, toko …</a:t>
+              <a:t>keude: kedai, toko …</a:t>
             </a:r>
             <a:endParaRPr lang="en-US" sz="1400" dirty="0"/>
           </a:p>
@@ -13420,7 +14612,7 @@
       </p:sp>
       <p:sp>
         <p:nvSpPr>
-          <p:cNvPr id="22" name="Other meaning"/>
+          <p:cNvPr id="23" name="Other meaning"/>
           <p:cNvSpPr/>
           <p:nvPr/>
         </p:nvSpPr>
@@ -13447,7 +14639,7 @@
       </p:sp>
       <p:sp>
         <p:nvSpPr>
-          <p:cNvPr id="23" name="Text 21"/>
+          <p:cNvPr id="24" name="Text 21"/>
           <p:cNvSpPr txBox="1"/>
           <p:nvPr/>
         </p:nvSpPr>
@@ -13483,7 +14675,7 @@
       </p:sp>
       <p:sp>
         <p:nvSpPr>
-          <p:cNvPr id="24" name="Stat card"/>
+          <p:cNvPr id="25" name="Stat card"/>
           <p:cNvSpPr/>
           <p:nvPr/>
         </p:nvSpPr>
@@ -13510,7 +14702,7 @@
       </p:sp>
       <p:sp>
         <p:nvSpPr>
-          <p:cNvPr id="25" name="Text 23"/>
+          <p:cNvPr id="26" name="Text 23"/>
           <p:cNvSpPr txBox="1"/>
           <p:nvPr/>
         </p:nvSpPr>
@@ -13537,9 +14729,9 @@
                 <a:solidFill>
                   <a:schemeClr val="accent1"/>
                 </a:solidFill>
-                <a:latin typeface="Cambria" pitchFamily="34" charset="0"/>
-                <a:ea typeface="Cambria" pitchFamily="34" charset="-122"/>
-                <a:cs typeface="Cambria" pitchFamily="34" charset="-120"/>
+                <a:latin typeface="Georgia" pitchFamily="34" charset="0"/>
+                <a:ea typeface="Georgia" pitchFamily="34" charset="-122"/>
+                <a:cs typeface="Georgia" pitchFamily="34" charset="-120"/>
               </a:rPr>
               <a:t>5,260</a:t>
             </a:r>
@@ -13549,7 +14741,7 @@
       </p:sp>
       <p:sp>
         <p:nvSpPr>
-          <p:cNvPr id="26" name="Text 24"/>
+          <p:cNvPr id="27" name="Text 24"/>
           <p:cNvSpPr txBox="1"/>
           <p:nvPr/>
         </p:nvSpPr>
@@ -13585,7 +14777,7 @@
       </p:sp>
       <p:sp>
         <p:nvSpPr>
-          <p:cNvPr id="27" name="Stat card"/>
+          <p:cNvPr id="28" name="Stat card"/>
           <p:cNvSpPr/>
           <p:nvPr/>
         </p:nvSpPr>
@@ -13612,7 +14804,7 @@
       </p:sp>
       <p:sp>
         <p:nvSpPr>
-          <p:cNvPr id="28" name="Text 26"/>
+          <p:cNvPr id="29" name="Text 26"/>
           <p:cNvSpPr txBox="1"/>
           <p:nvPr/>
         </p:nvSpPr>
@@ -13639,9 +14831,9 @@
                 <a:solidFill>
                   <a:schemeClr val="accent1"/>
                 </a:solidFill>
-                <a:latin typeface="Cambria" pitchFamily="34" charset="0"/>
-                <a:ea typeface="Cambria" pitchFamily="34" charset="-122"/>
-                <a:cs typeface="Cambria" pitchFamily="34" charset="-120"/>
+                <a:latin typeface="Georgia" pitchFamily="34" charset="0"/>
+                <a:ea typeface="Georgia" pitchFamily="34" charset="-122"/>
+                <a:cs typeface="Georgia" pitchFamily="34" charset="-120"/>
               </a:rPr>
               <a:t>266</a:t>
             </a:r>
@@ -13651,7 +14843,7 @@
       </p:sp>
       <p:sp>
         <p:nvSpPr>
-          <p:cNvPr id="29" name="Text 27"/>
+          <p:cNvPr id="30" name="Text 27"/>
           <p:cNvSpPr txBox="1"/>
           <p:nvPr/>
         </p:nvSpPr>
@@ -14686,9 +15878,9 @@
                 <a:solidFill>
                   <a:schemeClr val="accent1"/>
                 </a:solidFill>
-                <a:latin typeface="Cambria" pitchFamily="34" charset="0"/>
-                <a:ea typeface="Cambria" pitchFamily="34" charset="-122"/>
-                <a:cs typeface="Cambria" pitchFamily="34" charset="-120"/>
+                <a:latin typeface="Georgia" pitchFamily="34" charset="0"/>
+                <a:ea typeface="Georgia" pitchFamily="34" charset="-122"/>
+                <a:cs typeface="Georgia" pitchFamily="34" charset="-120"/>
               </a:rPr>
               <a:t>17,547</a:t>
             </a:r>
@@ -14788,9 +15980,9 @@
                 <a:solidFill>
                   <a:schemeClr val="accent1"/>
                 </a:solidFill>
-                <a:latin typeface="Cambria" pitchFamily="34" charset="0"/>
-                <a:ea typeface="Cambria" pitchFamily="34" charset="-122"/>
-                <a:cs typeface="Cambria" pitchFamily="34" charset="-120"/>
+                <a:latin typeface="Georgia" pitchFamily="34" charset="0"/>
+                <a:ea typeface="Georgia" pitchFamily="34" charset="-122"/>
+                <a:cs typeface="Georgia" pitchFamily="34" charset="-120"/>
               </a:rPr>
               <a:t>57.1</a:t>
             </a:r>
@@ -14890,9 +16082,9 @@
                 <a:solidFill>
                   <a:schemeClr val="accent1"/>
                 </a:solidFill>
-                <a:latin typeface="Cambria" pitchFamily="34" charset="0"/>
-                <a:ea typeface="Cambria" pitchFamily="34" charset="-122"/>
-                <a:cs typeface="Cambria" pitchFamily="34" charset="-120"/>
+                <a:latin typeface="Georgia" pitchFamily="34" charset="0"/>
+                <a:ea typeface="Georgia" pitchFamily="34" charset="-122"/>
+                <a:cs typeface="Georgia" pitchFamily="34" charset="-120"/>
               </a:rPr>
               <a:t>+36.9</a:t>
             </a:r>
@@ -16869,7 +18061,7 @@
                   <a:schemeClr val="tx1"/>
                 </a:solidFill>
               </a:rPr>
-              <a:t>Run it:  ./run_app.sh (Mac)  ·  run_app.bat (Windows)  ·  Colab demo notebook with a public link  ·  model stored privately on Hugging Face</a:t>
+              <a:t>Run it:  ./run_app.sh (Mac)  ·  run_app.bat (Windows)  ·  Colab demo notebook with a public link  ·  model on Hugging Face</a:t>
             </a:r>
             <a:endParaRPr lang="en-US" sz="1400" dirty="0"/>
           </a:p>
@@ -17075,9 +18267,9 @@
                 <a:solidFill>
                   <a:schemeClr val="accent1"/>
                 </a:solidFill>
-                <a:latin typeface="Cambria" pitchFamily="34" charset="0"/>
-                <a:ea typeface="Cambria" pitchFamily="34" charset="-122"/>
-                <a:cs typeface="Cambria" pitchFamily="34" charset="-120"/>
+                <a:latin typeface="Georgia" pitchFamily="34" charset="0"/>
+                <a:ea typeface="Georgia" pitchFamily="34" charset="-122"/>
+                <a:cs typeface="Georgia" pitchFamily="34" charset="-120"/>
               </a:rPr>
               <a:t>91</a:t>
             </a:r>
@@ -17213,9 +18405,9 @@
                 <a:solidFill>
                   <a:schemeClr val="accent1"/>
                 </a:solidFill>
-                <a:latin typeface="Cambria" pitchFamily="34" charset="0"/>
-                <a:ea typeface="Cambria" pitchFamily="34" charset="-122"/>
-                <a:cs typeface="Cambria" pitchFamily="34" charset="-120"/>
+                <a:latin typeface="Georgia" pitchFamily="34" charset="0"/>
+                <a:ea typeface="Georgia" pitchFamily="34" charset="-122"/>
+                <a:cs typeface="Georgia" pitchFamily="34" charset="-120"/>
               </a:rPr>
               <a:t>1</a:t>
             </a:r>
@@ -17351,9 +18543,9 @@
                 <a:solidFill>
                   <a:schemeClr val="accent1"/>
                 </a:solidFill>
-                <a:latin typeface="Cambria" pitchFamily="34" charset="0"/>
-                <a:ea typeface="Cambria" pitchFamily="34" charset="-122"/>
-                <a:cs typeface="Cambria" pitchFamily="34" charset="-120"/>
+                <a:latin typeface="Georgia" pitchFamily="34" charset="0"/>
+                <a:ea typeface="Georgia" pitchFamily="34" charset="-122"/>
+                <a:cs typeface="Georgia" pitchFamily="34" charset="-120"/>
               </a:rPr>
               <a:t>Git</a:t>
             </a:r>
@@ -18923,8 +20115,8 @@
         </p:nvSpPr>
         <p:spPr>
           <a:xfrm>
-            <a:off x="731520" y="2011680"/>
-            <a:ext cx="7498080" cy="2011680"/>
+            <a:off x="731520" y="1828800"/>
+            <a:ext cx="7132320" cy="2194560"/>
           </a:xfrm>
           <a:prstGeom prst="rect">
             <a:avLst/>
@@ -18940,14 +20132,14 @@
               <a:buNone/>
             </a:pPr>
             <a:r>
-              <a:rPr lang="en-US" sz="5000" b="1" dirty="0">
+              <a:rPr lang="en-US" sz="4400" b="1" dirty="0">
                 <a:solidFill>
                   <a:schemeClr val="bg1"/>
                 </a:solidFill>
               </a:rPr>
               <a:t>Thank you</a:t>
             </a:r>
-            <a:endParaRPr lang="en-US" sz="5000" dirty="0"/>
+            <a:endParaRPr lang="en-US" sz="4400" dirty="0"/>
           </a:p>
         </p:txBody>
       </p:sp>
@@ -19242,14 +20434,14 @@
                         <a:buNone/>
                       </a:pPr>
                       <a:r>
-                        <a:rPr lang="en-US" sz="1200" b="1" dirty="0">
+                        <a:rPr lang="en-US" sz="1100" b="1" dirty="0">
                           <a:solidFill>
                             <a:srgbClr val="FFFFFF"/>
                           </a:solidFill>
                         </a:rPr>
                         <a:t>Technique</a:t>
                       </a:r>
-                      <a:endParaRPr lang="en-US" sz="1200" dirty="0"/>
+                      <a:endParaRPr lang="en-US" sz="1100" dirty="0"/>
                     </a:p>
                   </a:txBody>
                   <a:tcPr marL="91440" marR="91440" marT="36576" marB="36576" anchor="ctr">
@@ -19303,14 +20495,14 @@
                         <a:buNone/>
                       </a:pPr>
                       <a:r>
-                        <a:rPr lang="en-US" sz="1200" b="1" dirty="0">
+                        <a:rPr lang="en-US" sz="1100" b="1" dirty="0">
                           <a:solidFill>
                             <a:srgbClr val="FFFFFF"/>
                           </a:solidFill>
                         </a:rPr>
                         <a:t>How it works in our project</a:t>
                       </a:r>
-                      <a:endParaRPr lang="en-US" sz="1200" dirty="0"/>
+                      <a:endParaRPr lang="en-US" sz="1100" dirty="0"/>
                     </a:p>
                   </a:txBody>
                   <a:tcPr marL="91440" marR="91440" marT="36576" marB="36576" anchor="ctr">
@@ -19364,14 +20556,14 @@
                         <a:buNone/>
                       </a:pPr>
                       <a:r>
-                        <a:rPr lang="en-US" sz="1200" b="1" dirty="0">
+                        <a:rPr lang="en-US" sz="1100" b="1" dirty="0">
                           <a:solidFill>
                             <a:srgbClr val="FFFFFF"/>
                           </a:solidFill>
                         </a:rPr>
                         <a:t>Evidence</a:t>
                       </a:r>
-                      <a:endParaRPr lang="en-US" sz="1200" dirty="0"/>
+                      <a:endParaRPr lang="en-US" sz="1100" dirty="0"/>
                     </a:p>
                   </a:txBody>
                   <a:tcPr marL="91440" marR="91440" marT="36576" marB="36576" anchor="ctr">
@@ -20825,39 +22017,28 @@
       </p:sp>
       <p:sp>
         <p:nvSpPr>
-          <p:cNvPr id="9" name="Text 6"/>
-          <p:cNvSpPr txBox="1"/>
-          <p:nvPr/>
-        </p:nvSpPr>
-        <p:spPr>
-          <a:xfrm>
-            <a:off x="2560320" y="2697480"/>
-            <a:ext cx="228600" cy="457200"/>
-          </a:xfrm>
-          <a:prstGeom prst="rect">
-            <a:avLst/>
-          </a:prstGeom>
-          <a:noFill/>
-          <a:ln/>
-        </p:spPr>
-        <p:txBody>
-          <a:bodyPr wrap="square" lIns="0" tIns="0" rIns="0" bIns="0" rtlCol="0" anchor="ctr"/>
-          <a:lstStyle/>
-          <a:p>
-            <a:pPr algn="ctr" indent="0" marL="0">
-              <a:buNone/>
-            </a:pPr>
-            <a:r>
-              <a:rPr lang="en-US" sz="2400" b="1" dirty="0">
-                <a:solidFill>
-                  <a:schemeClr val="accent1"/>
-                </a:solidFill>
-              </a:rPr>
-              <a:t>→</a:t>
-            </a:r>
-            <a:endParaRPr lang="en-US" sz="2400" dirty="0"/>
-          </a:p>
-        </p:txBody>
+          <p:cNvPr id="9" name="Flow arrow"/>
+          <p:cNvSpPr/>
+          <p:nvPr/>
+        </p:nvSpPr>
+        <p:spPr>
+          <a:xfrm>
+            <a:off x="2569464" y="2788920"/>
+            <a:ext cx="201168" cy="256032"/>
+          </a:xfrm>
+          <a:prstGeom prst="rightArrow">
+            <a:avLst/>
+          </a:prstGeom>
+          <a:solidFill>
+            <a:schemeClr val="accent1"/>
+          </a:solidFill>
+          <a:ln w="12700">
+            <a:solidFill>
+              <a:schemeClr val="accent1"/>
+            </a:solidFill>
+            <a:prstDash val="solid"/>
+          </a:ln>
+        </p:spPr>
       </p:sp>
       <p:sp>
         <p:nvSpPr>
@@ -21009,39 +22190,28 @@
       </p:sp>
       <p:sp>
         <p:nvSpPr>
-          <p:cNvPr id="15" name="Text 11"/>
-          <p:cNvSpPr txBox="1"/>
-          <p:nvPr/>
-        </p:nvSpPr>
-        <p:spPr>
-          <a:xfrm>
-            <a:off x="4800600" y="2697480"/>
-            <a:ext cx="228600" cy="457200"/>
-          </a:xfrm>
-          <a:prstGeom prst="rect">
-            <a:avLst/>
-          </a:prstGeom>
-          <a:noFill/>
-          <a:ln/>
-        </p:spPr>
-        <p:txBody>
-          <a:bodyPr wrap="square" lIns="0" tIns="0" rIns="0" bIns="0" rtlCol="0" anchor="ctr"/>
-          <a:lstStyle/>
-          <a:p>
-            <a:pPr algn="ctr" indent="0" marL="0">
-              <a:buNone/>
-            </a:pPr>
-            <a:r>
-              <a:rPr lang="en-US" sz="2400" b="1" dirty="0">
-                <a:solidFill>
-                  <a:schemeClr val="accent1"/>
-                </a:solidFill>
-              </a:rPr>
-              <a:t>→</a:t>
-            </a:r>
-            <a:endParaRPr lang="en-US" sz="2400" dirty="0"/>
-          </a:p>
-        </p:txBody>
+          <p:cNvPr id="15" name="Flow arrow"/>
+          <p:cNvSpPr/>
+          <p:nvPr/>
+        </p:nvSpPr>
+        <p:spPr>
+          <a:xfrm>
+            <a:off x="4809744" y="2788920"/>
+            <a:ext cx="201168" cy="256032"/>
+          </a:xfrm>
+          <a:prstGeom prst="rightArrow">
+            <a:avLst/>
+          </a:prstGeom>
+          <a:solidFill>
+            <a:schemeClr val="accent1"/>
+          </a:solidFill>
+          <a:ln w="12700">
+            <a:solidFill>
+              <a:schemeClr val="accent1"/>
+            </a:solidFill>
+            <a:prstDash val="solid"/>
+          </a:ln>
+        </p:spPr>
       </p:sp>
       <p:sp>
         <p:nvSpPr>
@@ -21193,39 +22363,28 @@
       </p:sp>
       <p:sp>
         <p:nvSpPr>
-          <p:cNvPr id="21" name="Text 16"/>
-          <p:cNvSpPr txBox="1"/>
-          <p:nvPr/>
-        </p:nvSpPr>
-        <p:spPr>
-          <a:xfrm>
-            <a:off x="7040880" y="2697480"/>
-            <a:ext cx="228600" cy="457200"/>
-          </a:xfrm>
-          <a:prstGeom prst="rect">
-            <a:avLst/>
-          </a:prstGeom>
-          <a:noFill/>
-          <a:ln/>
-        </p:spPr>
-        <p:txBody>
-          <a:bodyPr wrap="square" lIns="0" tIns="0" rIns="0" bIns="0" rtlCol="0" anchor="ctr"/>
-          <a:lstStyle/>
-          <a:p>
-            <a:pPr algn="ctr" indent="0" marL="0">
-              <a:buNone/>
-            </a:pPr>
-            <a:r>
-              <a:rPr lang="en-US" sz="2400" b="1" dirty="0">
-                <a:solidFill>
-                  <a:schemeClr val="accent1"/>
-                </a:solidFill>
-              </a:rPr>
-              <a:t>→</a:t>
-            </a:r>
-            <a:endParaRPr lang="en-US" sz="2400" dirty="0"/>
-          </a:p>
-        </p:txBody>
+          <p:cNvPr id="21" name="Flow arrow"/>
+          <p:cNvSpPr/>
+          <p:nvPr/>
+        </p:nvSpPr>
+        <p:spPr>
+          <a:xfrm>
+            <a:off x="7050024" y="2788920"/>
+            <a:ext cx="201168" cy="256032"/>
+          </a:xfrm>
+          <a:prstGeom prst="rightArrow">
+            <a:avLst/>
+          </a:prstGeom>
+          <a:solidFill>
+            <a:schemeClr val="accent1"/>
+          </a:solidFill>
+          <a:ln w="12700">
+            <a:solidFill>
+              <a:schemeClr val="accent1"/>
+            </a:solidFill>
+            <a:prstDash val="solid"/>
+          </a:ln>
+        </p:spPr>
       </p:sp>
       <p:sp>
         <p:nvSpPr>
@@ -21377,39 +22536,28 @@
       </p:sp>
       <p:sp>
         <p:nvSpPr>
-          <p:cNvPr id="27" name="Text 21"/>
-          <p:cNvSpPr txBox="1"/>
-          <p:nvPr/>
-        </p:nvSpPr>
-        <p:spPr>
-          <a:xfrm>
-            <a:off x="9281160" y="2697480"/>
-            <a:ext cx="228600" cy="457200"/>
-          </a:xfrm>
-          <a:prstGeom prst="rect">
-            <a:avLst/>
-          </a:prstGeom>
-          <a:noFill/>
-          <a:ln/>
-        </p:spPr>
-        <p:txBody>
-          <a:bodyPr wrap="square" lIns="0" tIns="0" rIns="0" bIns="0" rtlCol="0" anchor="ctr"/>
-          <a:lstStyle/>
-          <a:p>
-            <a:pPr algn="ctr" indent="0" marL="0">
-              <a:buNone/>
-            </a:pPr>
-            <a:r>
-              <a:rPr lang="en-US" sz="2400" b="1" dirty="0">
-                <a:solidFill>
-                  <a:schemeClr val="accent1"/>
-                </a:solidFill>
-              </a:rPr>
-              <a:t>→</a:t>
-            </a:r>
-            <a:endParaRPr lang="en-US" sz="2400" dirty="0"/>
-          </a:p>
-        </p:txBody>
+          <p:cNvPr id="27" name="Flow arrow"/>
+          <p:cNvSpPr/>
+          <p:nvPr/>
+        </p:nvSpPr>
+        <p:spPr>
+          <a:xfrm>
+            <a:off x="9290304" y="2788920"/>
+            <a:ext cx="201168" cy="256032"/>
+          </a:xfrm>
+          <a:prstGeom prst="rightArrow">
+            <a:avLst/>
+          </a:prstGeom>
+          <a:solidFill>
+            <a:schemeClr val="accent1"/>
+          </a:solidFill>
+          <a:ln w="12700">
+            <a:solidFill>
+              <a:schemeClr val="accent1"/>
+            </a:solidFill>
+            <a:prstDash val="solid"/>
+          </a:ln>
+        </p:spPr>
       </p:sp>
       <p:sp>
         <p:nvSpPr>
@@ -21840,14 +22988,14 @@
                         <a:buNone/>
                       </a:pPr>
                       <a:r>
-                        <a:rPr lang="en-US" sz="1200" b="1" dirty="0">
+                        <a:rPr lang="en-US" sz="1100" b="1" dirty="0">
                           <a:solidFill>
                             <a:srgbClr val="FFFFFF"/>
                           </a:solidFill>
                         </a:rPr>
                         <a:t>Source</a:t>
                       </a:r>
-                      <a:endParaRPr lang="en-US" sz="1200" dirty="0"/>
+                      <a:endParaRPr lang="en-US" sz="1100" dirty="0"/>
                     </a:p>
                   </a:txBody>
                   <a:tcPr marL="91440" marR="91440" marT="36576" marB="36576" anchor="ctr">
@@ -21901,14 +23049,14 @@
                         <a:buNone/>
                       </a:pPr>
                       <a:r>
-                        <a:rPr lang="en-US" sz="1200" b="1" dirty="0">
+                        <a:rPr lang="en-US" sz="1100" b="1" dirty="0">
                           <a:solidFill>
                             <a:srgbClr val="FFFFFF"/>
                           </a:solidFill>
                         </a:rPr>
                         <a:t>What it is</a:t>
                       </a:r>
-                      <a:endParaRPr lang="en-US" sz="1200" dirty="0"/>
+                      <a:endParaRPr lang="en-US" sz="1100" dirty="0"/>
                     </a:p>
                   </a:txBody>
                   <a:tcPr marL="91440" marR="91440" marT="36576" marB="36576" anchor="ctr">
@@ -21962,14 +23110,14 @@
                         <a:buNone/>
                       </a:pPr>
                       <a:r>
-                        <a:rPr lang="en-US" sz="1200" b="1" dirty="0">
+                        <a:rPr lang="en-US" sz="1100" b="1" dirty="0">
                           <a:solidFill>
                             <a:srgbClr val="FFFFFF"/>
                           </a:solidFill>
                         </a:rPr>
                         <a:t>Pairs used</a:t>
                       </a:r>
-                      <a:endParaRPr lang="en-US" sz="1200" dirty="0"/>
+                      <a:endParaRPr lang="en-US" sz="1100" dirty="0"/>
                     </a:p>
                   </a:txBody>
                   <a:tcPr marL="91440" marR="91440" marT="36576" marB="36576" anchor="ctr">
@@ -22023,14 +23171,14 @@
                         <a:buNone/>
                       </a:pPr>
                       <a:r>
-                        <a:rPr lang="en-US" sz="1200" b="1" dirty="0">
+                        <a:rPr lang="en-US" sz="1100" b="1" dirty="0">
                           <a:solidFill>
                             <a:srgbClr val="FFFFFF"/>
                           </a:solidFill>
                         </a:rPr>
                         <a:t>Licence / origin</a:t>
                       </a:r>
-                      <a:endParaRPr lang="en-US" sz="1200" dirty="0"/>
+                      <a:endParaRPr lang="en-US" sz="1100" dirty="0"/>
                     </a:p>
                   </a:txBody>
                   <a:tcPr marL="91440" marR="91440" marT="36576" marB="36576" anchor="ctr">
@@ -24192,25 +25340,882 @@
           </a:p>
         </p:txBody>
       </p:sp>
-      <p:graphicFrame>
-        <p:nvGraphicFramePr>
-          <p:cNvPr id="4" name="Chart 0" descr=""/>
-          <p:cNvGraphicFramePr/>
-          <p:nvPr/>
-        </p:nvGraphicFramePr>
-        <p:xfrm>
-          <a:off x="548640" y="1371600"/>
-          <a:ext cx="7223760" cy="4846320"/>
-        </p:xfrm>
-        <a:graphic xmlns:a="http://schemas.openxmlformats.org/drawingml/2006/main">
-          <a:graphicData uri="http://schemas.openxmlformats.org/drawingml/2006/chart">
-            <c:chart xmlns:c="http://schemas.openxmlformats.org/drawingml/2006/chart" r:id="rId1"/>
-          </a:graphicData>
-        </a:graphic>
-      </p:graphicFrame>
-      <p:sp>
-        <p:nvSpPr>
-          <p:cNvPr id="5" name="Stat card"/>
+      <p:sp>
+        <p:nvSpPr>
+          <p:cNvPr id="4" name="Text 2"/>
+          <p:cNvSpPr txBox="1"/>
+          <p:nvPr/>
+        </p:nvSpPr>
+        <p:spPr>
+          <a:xfrm>
+            <a:off x="548640" y="1473911"/>
+            <a:ext cx="2468880" cy="333858"/>
+          </a:xfrm>
+          <a:prstGeom prst="rect">
+            <a:avLst/>
+          </a:prstGeom>
+          <a:noFill/>
+          <a:ln/>
+        </p:spPr>
+        <p:txBody>
+          <a:bodyPr wrap="square" lIns="0" tIns="0" rIns="0" bIns="0" rtlCol="0" anchor="ctr"/>
+          <a:lstStyle/>
+          <a:p>
+            <a:pPr algn="r" indent="0" marL="0">
+              <a:buNone/>
+            </a:pPr>
+            <a:r>
+              <a:rPr lang="en-US" sz="1300" dirty="0">
+                <a:solidFill>
+                  <a:schemeClr val="tx1"/>
+                </a:solidFill>
+              </a:rPr>
+              <a:t>Quran verses</a:t>
+            </a:r>
+            <a:endParaRPr lang="en-US" sz="1300" dirty="0"/>
+          </a:p>
+        </p:txBody>
+      </p:sp>
+      <p:sp>
+        <p:nvSpPr>
+          <p:cNvPr id="5" name="Bar Quran verses"/>
+          <p:cNvSpPr/>
+          <p:nvPr/>
+        </p:nvSpPr>
+        <p:spPr>
+          <a:xfrm>
+            <a:off x="3154680" y="1473911"/>
+            <a:ext cx="3305202" cy="333858"/>
+          </a:xfrm>
+          <a:prstGeom prst="rect">
+            <a:avLst/>
+          </a:prstGeom>
+          <a:solidFill>
+            <a:srgbClr val="0D9488"/>
+          </a:solidFill>
+          <a:ln w="12700">
+            <a:solidFill>
+              <a:srgbClr val="0D9488"/>
+            </a:solidFill>
+            <a:prstDash val="solid"/>
+          </a:ln>
+        </p:spPr>
+      </p:sp>
+      <p:sp>
+        <p:nvSpPr>
+          <p:cNvPr id="6" name="Text 4"/>
+          <p:cNvSpPr txBox="1"/>
+          <p:nvPr/>
+        </p:nvSpPr>
+        <p:spPr>
+          <a:xfrm>
+            <a:off x="6551322" y="1473911"/>
+            <a:ext cx="777240" cy="333858"/>
+          </a:xfrm>
+          <a:prstGeom prst="rect">
+            <a:avLst/>
+          </a:prstGeom>
+          <a:noFill/>
+          <a:ln/>
+        </p:spPr>
+        <p:txBody>
+          <a:bodyPr wrap="square" lIns="0" tIns="0" rIns="0" bIns="0" rtlCol="0" anchor="ctr"/>
+          <a:lstStyle/>
+          <a:p>
+            <a:pPr indent="0" marL="0">
+              <a:buNone/>
+            </a:pPr>
+            <a:r>
+              <a:rPr lang="en-US" sz="1300" b="1" dirty="0">
+                <a:solidFill>
+                  <a:schemeClr val="tx1"/>
+                </a:solidFill>
+              </a:rPr>
+              <a:t>5,466</a:t>
+            </a:r>
+            <a:endParaRPr lang="en-US" sz="1300" dirty="0"/>
+          </a:p>
+        </p:txBody>
+      </p:sp>
+      <p:sp>
+        <p:nvSpPr>
+          <p:cNvPr id="7" name="Text 5"/>
+          <p:cNvSpPr txBox="1"/>
+          <p:nvPr/>
+        </p:nvSpPr>
+        <p:spPr>
+          <a:xfrm>
+            <a:off x="548640" y="2012391"/>
+            <a:ext cx="2468880" cy="333858"/>
+          </a:xfrm>
+          <a:prstGeom prst="rect">
+            <a:avLst/>
+          </a:prstGeom>
+          <a:noFill/>
+          <a:ln/>
+        </p:spPr>
+        <p:txBody>
+          <a:bodyPr wrap="square" lIns="0" tIns="0" rIns="0" bIns="0" rtlCol="0" anchor="ctr"/>
+          <a:lstStyle/>
+          <a:p>
+            <a:pPr algn="r" indent="0" marL="0">
+              <a:buNone/>
+            </a:pPr>
+            <a:r>
+              <a:rPr lang="en-US" sz="1300" dirty="0">
+                <a:solidFill>
+                  <a:schemeClr val="tx1"/>
+                </a:solidFill>
+              </a:rPr>
+              <a:t>NLLB-Seed pivot (about)</a:t>
+            </a:r>
+            <a:endParaRPr lang="en-US" sz="1300" dirty="0"/>
+          </a:p>
+        </p:txBody>
+      </p:sp>
+      <p:sp>
+        <p:nvSpPr>
+          <p:cNvPr id="8" name="Bar NLLB-Seed pivot (about)"/>
+          <p:cNvSpPr/>
+          <p:nvPr/>
+        </p:nvSpPr>
+        <p:spPr>
+          <a:xfrm>
+            <a:off x="3154680" y="2012391"/>
+            <a:ext cx="3466653" cy="333858"/>
+          </a:xfrm>
+          <a:prstGeom prst="rect">
+            <a:avLst/>
+          </a:prstGeom>
+          <a:solidFill>
+            <a:srgbClr val="0D9488"/>
+          </a:solidFill>
+          <a:ln w="12700">
+            <a:solidFill>
+              <a:srgbClr val="0D9488"/>
+            </a:solidFill>
+            <a:prstDash val="solid"/>
+          </a:ln>
+        </p:spPr>
+      </p:sp>
+      <p:sp>
+        <p:nvSpPr>
+          <p:cNvPr id="9" name="Text 7"/>
+          <p:cNvSpPr txBox="1"/>
+          <p:nvPr/>
+        </p:nvSpPr>
+        <p:spPr>
+          <a:xfrm>
+            <a:off x="6712773" y="2012391"/>
+            <a:ext cx="777240" cy="333858"/>
+          </a:xfrm>
+          <a:prstGeom prst="rect">
+            <a:avLst/>
+          </a:prstGeom>
+          <a:noFill/>
+          <a:ln/>
+        </p:spPr>
+        <p:txBody>
+          <a:bodyPr wrap="square" lIns="0" tIns="0" rIns="0" bIns="0" rtlCol="0" anchor="ctr"/>
+          <a:lstStyle/>
+          <a:p>
+            <a:pPr indent="0" marL="0">
+              <a:buNone/>
+            </a:pPr>
+            <a:r>
+              <a:rPr lang="en-US" sz="1300" b="1" dirty="0">
+                <a:solidFill>
+                  <a:schemeClr val="tx1"/>
+                </a:solidFill>
+              </a:rPr>
+              <a:t>5,733</a:t>
+            </a:r>
+            <a:endParaRPr lang="en-US" sz="1300" dirty="0"/>
+          </a:p>
+        </p:txBody>
+      </p:sp>
+      <p:sp>
+        <p:nvSpPr>
+          <p:cNvPr id="10" name="Text 8"/>
+          <p:cNvSpPr txBox="1"/>
+          <p:nvPr/>
+        </p:nvSpPr>
+        <p:spPr>
+          <a:xfrm>
+            <a:off x="548640" y="2550871"/>
+            <a:ext cx="2468880" cy="333858"/>
+          </a:xfrm>
+          <a:prstGeom prst="rect">
+            <a:avLst/>
+          </a:prstGeom>
+          <a:noFill/>
+          <a:ln/>
+        </p:spPr>
+        <p:txBody>
+          <a:bodyPr wrap="square" lIns="0" tIns="0" rIns="0" bIns="0" rtlCol="0" anchor="ctr"/>
+          <a:lstStyle/>
+          <a:p>
+            <a:pPr algn="r" indent="0" marL="0">
+              <a:buNone/>
+            </a:pPr>
+            <a:r>
+              <a:rPr lang="en-US" sz="1300" dirty="0">
+                <a:solidFill>
+                  <a:schemeClr val="tx1"/>
+                </a:solidFill>
+              </a:rPr>
+              <a:t>Team: Andrie's pairs</a:t>
+            </a:r>
+            <a:endParaRPr lang="en-US" sz="1300" dirty="0"/>
+          </a:p>
+        </p:txBody>
+      </p:sp>
+      <p:sp>
+        <p:nvSpPr>
+          <p:cNvPr id="11" name="Bar Team: Andrie's pairs"/>
+          <p:cNvSpPr/>
+          <p:nvPr/>
+        </p:nvSpPr>
+        <p:spPr>
+          <a:xfrm>
+            <a:off x="3154680" y="2550871"/>
+            <a:ext cx="1691905" cy="333858"/>
+          </a:xfrm>
+          <a:prstGeom prst="rect">
+            <a:avLst/>
+          </a:prstGeom>
+          <a:solidFill>
+            <a:srgbClr val="0D9488"/>
+          </a:solidFill>
+          <a:ln w="12700">
+            <a:solidFill>
+              <a:srgbClr val="0D9488"/>
+            </a:solidFill>
+            <a:prstDash val="solid"/>
+          </a:ln>
+        </p:spPr>
+      </p:sp>
+      <p:sp>
+        <p:nvSpPr>
+          <p:cNvPr id="12" name="Text 10"/>
+          <p:cNvSpPr txBox="1"/>
+          <p:nvPr/>
+        </p:nvSpPr>
+        <p:spPr>
+          <a:xfrm>
+            <a:off x="4938025" y="2550871"/>
+            <a:ext cx="777240" cy="333858"/>
+          </a:xfrm>
+          <a:prstGeom prst="rect">
+            <a:avLst/>
+          </a:prstGeom>
+          <a:noFill/>
+          <a:ln/>
+        </p:spPr>
+        <p:txBody>
+          <a:bodyPr wrap="square" lIns="0" tIns="0" rIns="0" bIns="0" rtlCol="0" anchor="ctr"/>
+          <a:lstStyle/>
+          <a:p>
+            <a:pPr indent="0" marL="0">
+              <a:buNone/>
+            </a:pPr>
+            <a:r>
+              <a:rPr lang="en-US" sz="1300" b="1" dirty="0">
+                <a:solidFill>
+                  <a:schemeClr val="tx1"/>
+                </a:solidFill>
+              </a:rPr>
+              <a:t>2,798</a:t>
+            </a:r>
+            <a:endParaRPr lang="en-US" sz="1300" dirty="0"/>
+          </a:p>
+        </p:txBody>
+      </p:sp>
+      <p:sp>
+        <p:nvSpPr>
+          <p:cNvPr id="13" name="Text 11"/>
+          <p:cNvSpPr txBox="1"/>
+          <p:nvPr/>
+        </p:nvSpPr>
+        <p:spPr>
+          <a:xfrm>
+            <a:off x="548640" y="3089351"/>
+            <a:ext cx="2468880" cy="333858"/>
+          </a:xfrm>
+          <a:prstGeom prst="rect">
+            <a:avLst/>
+          </a:prstGeom>
+          <a:noFill/>
+          <a:ln/>
+        </p:spPr>
+        <p:txBody>
+          <a:bodyPr wrap="square" lIns="0" tIns="0" rIns="0" bIns="0" rtlCol="0" anchor="ctr"/>
+          <a:lstStyle/>
+          <a:p>
+            <a:pPr algn="r" indent="0" marL="0">
+              <a:buNone/>
+            </a:pPr>
+            <a:r>
+              <a:rPr lang="en-US" sz="1300" dirty="0">
+                <a:solidFill>
+                  <a:schemeClr val="tx1"/>
+                </a:solidFill>
+              </a:rPr>
+              <a:t>Hikayat Abu Sammah</a:t>
+            </a:r>
+            <a:endParaRPr lang="en-US" sz="1300" dirty="0"/>
+          </a:p>
+        </p:txBody>
+      </p:sp>
+      <p:sp>
+        <p:nvSpPr>
+          <p:cNvPr id="14" name="Bar Hikayat Abu Sammah"/>
+          <p:cNvSpPr/>
+          <p:nvPr/>
+        </p:nvSpPr>
+        <p:spPr>
+          <a:xfrm>
+            <a:off x="3154680" y="3089351"/>
+            <a:ext cx="865907" cy="333858"/>
+          </a:xfrm>
+          <a:prstGeom prst="rect">
+            <a:avLst/>
+          </a:prstGeom>
+          <a:solidFill>
+            <a:srgbClr val="0D9488"/>
+          </a:solidFill>
+          <a:ln w="12700">
+            <a:solidFill>
+              <a:srgbClr val="0D9488"/>
+            </a:solidFill>
+            <a:prstDash val="solid"/>
+          </a:ln>
+        </p:spPr>
+      </p:sp>
+      <p:sp>
+        <p:nvSpPr>
+          <p:cNvPr id="15" name="Text 13"/>
+          <p:cNvSpPr txBox="1"/>
+          <p:nvPr/>
+        </p:nvSpPr>
+        <p:spPr>
+          <a:xfrm>
+            <a:off x="4112027" y="3089351"/>
+            <a:ext cx="777240" cy="333858"/>
+          </a:xfrm>
+          <a:prstGeom prst="rect">
+            <a:avLst/>
+          </a:prstGeom>
+          <a:noFill/>
+          <a:ln/>
+        </p:spPr>
+        <p:txBody>
+          <a:bodyPr wrap="square" lIns="0" tIns="0" rIns="0" bIns="0" rtlCol="0" anchor="ctr"/>
+          <a:lstStyle/>
+          <a:p>
+            <a:pPr indent="0" marL="0">
+              <a:buNone/>
+            </a:pPr>
+            <a:r>
+              <a:rPr lang="en-US" sz="1300" b="1" dirty="0">
+                <a:solidFill>
+                  <a:schemeClr val="tx1"/>
+                </a:solidFill>
+              </a:rPr>
+              <a:t>1,432</a:t>
+            </a:r>
+            <a:endParaRPr lang="en-US" sz="1300" dirty="0"/>
+          </a:p>
+        </p:txBody>
+      </p:sp>
+      <p:sp>
+        <p:nvSpPr>
+          <p:cNvPr id="16" name="Text 14"/>
+          <p:cNvSpPr txBox="1"/>
+          <p:nvPr/>
+        </p:nvSpPr>
+        <p:spPr>
+          <a:xfrm>
+            <a:off x="548640" y="3627831"/>
+            <a:ext cx="2468880" cy="333858"/>
+          </a:xfrm>
+          <a:prstGeom prst="rect">
+            <a:avLst/>
+          </a:prstGeom>
+          <a:noFill/>
+          <a:ln/>
+        </p:spPr>
+        <p:txBody>
+          <a:bodyPr wrap="square" lIns="0" tIns="0" rIns="0" bIns="0" rtlCol="0" anchor="ctr"/>
+          <a:lstStyle/>
+          <a:p>
+            <a:pPr algn="r" indent="0" marL="0">
+              <a:buNone/>
+            </a:pPr>
+            <a:r>
+              <a:rPr lang="en-US" sz="1300" dirty="0">
+                <a:solidFill>
+                  <a:schemeClr val="tx1"/>
+                </a:solidFill>
+              </a:rPr>
+              <a:t>FLORES dev</a:t>
+            </a:r>
+            <a:endParaRPr lang="en-US" sz="1300" dirty="0"/>
+          </a:p>
+        </p:txBody>
+      </p:sp>
+      <p:sp>
+        <p:nvSpPr>
+          <p:cNvPr id="17" name="Bar FLORES dev"/>
+          <p:cNvSpPr/>
+          <p:nvPr/>
+        </p:nvSpPr>
+        <p:spPr>
+          <a:xfrm>
+            <a:off x="3154680" y="3627831"/>
+            <a:ext cx="481933" cy="333858"/>
+          </a:xfrm>
+          <a:prstGeom prst="rect">
+            <a:avLst/>
+          </a:prstGeom>
+          <a:solidFill>
+            <a:srgbClr val="0D9488"/>
+          </a:solidFill>
+          <a:ln w="12700">
+            <a:solidFill>
+              <a:srgbClr val="0D9488"/>
+            </a:solidFill>
+            <a:prstDash val="solid"/>
+          </a:ln>
+        </p:spPr>
+      </p:sp>
+      <p:sp>
+        <p:nvSpPr>
+          <p:cNvPr id="18" name="Text 16"/>
+          <p:cNvSpPr txBox="1"/>
+          <p:nvPr/>
+        </p:nvSpPr>
+        <p:spPr>
+          <a:xfrm>
+            <a:off x="3728053" y="3627831"/>
+            <a:ext cx="777240" cy="333858"/>
+          </a:xfrm>
+          <a:prstGeom prst="rect">
+            <a:avLst/>
+          </a:prstGeom>
+          <a:noFill/>
+          <a:ln/>
+        </p:spPr>
+        <p:txBody>
+          <a:bodyPr wrap="square" lIns="0" tIns="0" rIns="0" bIns="0" rtlCol="0" anchor="ctr"/>
+          <a:lstStyle/>
+          <a:p>
+            <a:pPr indent="0" marL="0">
+              <a:buNone/>
+            </a:pPr>
+            <a:r>
+              <a:rPr lang="en-US" sz="1300" b="1" dirty="0">
+                <a:solidFill>
+                  <a:schemeClr val="tx1"/>
+                </a:solidFill>
+              </a:rPr>
+              <a:t>797</a:t>
+            </a:r>
+            <a:endParaRPr lang="en-US" sz="1300" dirty="0"/>
+          </a:p>
+        </p:txBody>
+      </p:sp>
+      <p:sp>
+        <p:nvSpPr>
+          <p:cNvPr id="19" name="Text 17"/>
+          <p:cNvSpPr txBox="1"/>
+          <p:nvPr/>
+        </p:nvSpPr>
+        <p:spPr>
+          <a:xfrm>
+            <a:off x="548640" y="4166311"/>
+            <a:ext cx="2468880" cy="333858"/>
+          </a:xfrm>
+          <a:prstGeom prst="rect">
+            <a:avLst/>
+          </a:prstGeom>
+          <a:noFill/>
+          <a:ln/>
+        </p:spPr>
+        <p:txBody>
+          <a:bodyPr wrap="square" lIns="0" tIns="0" rIns="0" bIns="0" rtlCol="0" anchor="ctr"/>
+          <a:lstStyle/>
+          <a:p>
+            <a:pPr algn="r" indent="0" marL="0">
+              <a:buNone/>
+            </a:pPr>
+            <a:r>
+              <a:rPr lang="en-US" sz="1300" dirty="0">
+                <a:solidFill>
+                  <a:schemeClr val="tx1"/>
+                </a:solidFill>
+              </a:rPr>
+              <a:t>NusaX train</a:t>
+            </a:r>
+            <a:endParaRPr lang="en-US" sz="1300" dirty="0"/>
+          </a:p>
+        </p:txBody>
+      </p:sp>
+      <p:sp>
+        <p:nvSpPr>
+          <p:cNvPr id="20" name="Bar NusaX train"/>
+          <p:cNvSpPr/>
+          <p:nvPr/>
+        </p:nvSpPr>
+        <p:spPr>
+          <a:xfrm>
+            <a:off x="3154680" y="4166311"/>
+            <a:ext cx="302342" cy="333858"/>
+          </a:xfrm>
+          <a:prstGeom prst="rect">
+            <a:avLst/>
+          </a:prstGeom>
+          <a:solidFill>
+            <a:srgbClr val="0D9488"/>
+          </a:solidFill>
+          <a:ln w="12700">
+            <a:solidFill>
+              <a:srgbClr val="0D9488"/>
+            </a:solidFill>
+            <a:prstDash val="solid"/>
+          </a:ln>
+        </p:spPr>
+      </p:sp>
+      <p:sp>
+        <p:nvSpPr>
+          <p:cNvPr id="21" name="Text 19"/>
+          <p:cNvSpPr txBox="1"/>
+          <p:nvPr/>
+        </p:nvSpPr>
+        <p:spPr>
+          <a:xfrm>
+            <a:off x="3548462" y="4166311"/>
+            <a:ext cx="777240" cy="333858"/>
+          </a:xfrm>
+          <a:prstGeom prst="rect">
+            <a:avLst/>
+          </a:prstGeom>
+          <a:noFill/>
+          <a:ln/>
+        </p:spPr>
+        <p:txBody>
+          <a:bodyPr wrap="square" lIns="0" tIns="0" rIns="0" bIns="0" rtlCol="0" anchor="ctr"/>
+          <a:lstStyle/>
+          <a:p>
+            <a:pPr indent="0" marL="0">
+              <a:buNone/>
+            </a:pPr>
+            <a:r>
+              <a:rPr lang="en-US" sz="1300" b="1" dirty="0">
+                <a:solidFill>
+                  <a:schemeClr val="tx1"/>
+                </a:solidFill>
+              </a:rPr>
+              <a:t>500</a:t>
+            </a:r>
+            <a:endParaRPr lang="en-US" sz="1300" dirty="0"/>
+          </a:p>
+        </p:txBody>
+      </p:sp>
+      <p:sp>
+        <p:nvSpPr>
+          <p:cNvPr id="22" name="Text 20"/>
+          <p:cNvSpPr txBox="1"/>
+          <p:nvPr/>
+        </p:nvSpPr>
+        <p:spPr>
+          <a:xfrm>
+            <a:off x="548640" y="4704791"/>
+            <a:ext cx="2468880" cy="333858"/>
+          </a:xfrm>
+          <a:prstGeom prst="rect">
+            <a:avLst/>
+          </a:prstGeom>
+          <a:noFill/>
+          <a:ln/>
+        </p:spPr>
+        <p:txBody>
+          <a:bodyPr wrap="square" lIns="0" tIns="0" rIns="0" bIns="0" rtlCol="0" anchor="ctr"/>
+          <a:lstStyle/>
+          <a:p>
+            <a:pPr algn="r" indent="0" marL="0">
+              <a:buNone/>
+            </a:pPr>
+            <a:r>
+              <a:rPr lang="en-US" sz="1300" dirty="0">
+                <a:solidFill>
+                  <a:schemeClr val="tx1"/>
+                </a:solidFill>
+              </a:rPr>
+              <a:t>Wikipedia</a:t>
+            </a:r>
+            <a:endParaRPr lang="en-US" sz="1300" dirty="0"/>
+          </a:p>
+        </p:txBody>
+      </p:sp>
+      <p:sp>
+        <p:nvSpPr>
+          <p:cNvPr id="23" name="Bar Wikipedia"/>
+          <p:cNvSpPr/>
+          <p:nvPr/>
+        </p:nvSpPr>
+        <p:spPr>
+          <a:xfrm>
+            <a:off x="3154680" y="4704791"/>
+            <a:ext cx="226756" cy="333858"/>
+          </a:xfrm>
+          <a:prstGeom prst="rect">
+            <a:avLst/>
+          </a:prstGeom>
+          <a:solidFill>
+            <a:srgbClr val="0D9488"/>
+          </a:solidFill>
+          <a:ln w="12700">
+            <a:solidFill>
+              <a:srgbClr val="0D9488"/>
+            </a:solidFill>
+            <a:prstDash val="solid"/>
+          </a:ln>
+        </p:spPr>
+      </p:sp>
+      <p:sp>
+        <p:nvSpPr>
+          <p:cNvPr id="24" name="Text 22"/>
+          <p:cNvSpPr txBox="1"/>
+          <p:nvPr/>
+        </p:nvSpPr>
+        <p:spPr>
+          <a:xfrm>
+            <a:off x="3472876" y="4704791"/>
+            <a:ext cx="777240" cy="333858"/>
+          </a:xfrm>
+          <a:prstGeom prst="rect">
+            <a:avLst/>
+          </a:prstGeom>
+          <a:noFill/>
+          <a:ln/>
+        </p:spPr>
+        <p:txBody>
+          <a:bodyPr wrap="square" lIns="0" tIns="0" rIns="0" bIns="0" rtlCol="0" anchor="ctr"/>
+          <a:lstStyle/>
+          <a:p>
+            <a:pPr indent="0" marL="0">
+              <a:buNone/>
+            </a:pPr>
+            <a:r>
+              <a:rPr lang="en-US" sz="1300" b="1" dirty="0">
+                <a:solidFill>
+                  <a:schemeClr val="tx1"/>
+                </a:solidFill>
+              </a:rPr>
+              <a:t>375</a:t>
+            </a:r>
+            <a:endParaRPr lang="en-US" sz="1300" dirty="0"/>
+          </a:p>
+        </p:txBody>
+      </p:sp>
+      <p:sp>
+        <p:nvSpPr>
+          <p:cNvPr id="25" name="Text 23"/>
+          <p:cNvSpPr txBox="1"/>
+          <p:nvPr/>
+        </p:nvSpPr>
+        <p:spPr>
+          <a:xfrm>
+            <a:off x="548640" y="5243271"/>
+            <a:ext cx="2468880" cy="333858"/>
+          </a:xfrm>
+          <a:prstGeom prst="rect">
+            <a:avLst/>
+          </a:prstGeom>
+          <a:noFill/>
+          <a:ln/>
+        </p:spPr>
+        <p:txBody>
+          <a:bodyPr wrap="square" lIns="0" tIns="0" rIns="0" bIns="0" rtlCol="0" anchor="ctr"/>
+          <a:lstStyle/>
+          <a:p>
+            <a:pPr algn="r" indent="0" marL="0">
+              <a:buNone/>
+            </a:pPr>
+            <a:r>
+              <a:rPr lang="en-US" sz="1300" dirty="0">
+                <a:solidFill>
+                  <a:schemeClr val="tx1"/>
+                </a:solidFill>
+              </a:rPr>
+              <a:t>Hikayat Malik Mawot</a:t>
+            </a:r>
+            <a:endParaRPr lang="en-US" sz="1300" dirty="0"/>
+          </a:p>
+        </p:txBody>
+      </p:sp>
+      <p:sp>
+        <p:nvSpPr>
+          <p:cNvPr id="26" name="Bar Hikayat Malik Mawot"/>
+          <p:cNvSpPr/>
+          <p:nvPr/>
+        </p:nvSpPr>
+        <p:spPr>
+          <a:xfrm>
+            <a:off x="3154680" y="5243271"/>
+            <a:ext cx="211639" cy="333858"/>
+          </a:xfrm>
+          <a:prstGeom prst="rect">
+            <a:avLst/>
+          </a:prstGeom>
+          <a:solidFill>
+            <a:srgbClr val="0D9488"/>
+          </a:solidFill>
+          <a:ln w="12700">
+            <a:solidFill>
+              <a:srgbClr val="0D9488"/>
+            </a:solidFill>
+            <a:prstDash val="solid"/>
+          </a:ln>
+        </p:spPr>
+      </p:sp>
+      <p:sp>
+        <p:nvSpPr>
+          <p:cNvPr id="27" name="Text 25"/>
+          <p:cNvSpPr txBox="1"/>
+          <p:nvPr/>
+        </p:nvSpPr>
+        <p:spPr>
+          <a:xfrm>
+            <a:off x="3457759" y="5243271"/>
+            <a:ext cx="777240" cy="333858"/>
+          </a:xfrm>
+          <a:prstGeom prst="rect">
+            <a:avLst/>
+          </a:prstGeom>
+          <a:noFill/>
+          <a:ln/>
+        </p:spPr>
+        <p:txBody>
+          <a:bodyPr wrap="square" lIns="0" tIns="0" rIns="0" bIns="0" rtlCol="0" anchor="ctr"/>
+          <a:lstStyle/>
+          <a:p>
+            <a:pPr indent="0" marL="0">
+              <a:buNone/>
+            </a:pPr>
+            <a:r>
+              <a:rPr lang="en-US" sz="1300" b="1" dirty="0">
+                <a:solidFill>
+                  <a:schemeClr val="tx1"/>
+                </a:solidFill>
+              </a:rPr>
+              <a:t>350</a:t>
+            </a:r>
+            <a:endParaRPr lang="en-US" sz="1300" dirty="0"/>
+          </a:p>
+        </p:txBody>
+      </p:sp>
+      <p:sp>
+        <p:nvSpPr>
+          <p:cNvPr id="28" name="Text 26"/>
+          <p:cNvSpPr txBox="1"/>
+          <p:nvPr/>
+        </p:nvSpPr>
+        <p:spPr>
+          <a:xfrm>
+            <a:off x="548640" y="5781751"/>
+            <a:ext cx="2468880" cy="333858"/>
+          </a:xfrm>
+          <a:prstGeom prst="rect">
+            <a:avLst/>
+          </a:prstGeom>
+          <a:noFill/>
+          <a:ln/>
+        </p:spPr>
+        <p:txBody>
+          <a:bodyPr wrap="square" lIns="0" tIns="0" rIns="0" bIns="0" rtlCol="0" anchor="ctr"/>
+          <a:lstStyle/>
+          <a:p>
+            <a:pPr algn="r" indent="0" marL="0">
+              <a:buNone/>
+            </a:pPr>
+            <a:r>
+              <a:rPr lang="en-US" sz="1300" dirty="0">
+                <a:solidFill>
+                  <a:schemeClr val="tx1"/>
+                </a:solidFill>
+              </a:rPr>
+              <a:t>Team: stories</a:t>
+            </a:r>
+            <a:endParaRPr lang="en-US" sz="1300" dirty="0"/>
+          </a:p>
+        </p:txBody>
+      </p:sp>
+      <p:sp>
+        <p:nvSpPr>
+          <p:cNvPr id="29" name="Bar Team: stories"/>
+          <p:cNvSpPr/>
+          <p:nvPr/>
+        </p:nvSpPr>
+        <p:spPr>
+          <a:xfrm>
+            <a:off x="3154680" y="5781751"/>
+            <a:ext cx="58050" cy="333858"/>
+          </a:xfrm>
+          <a:prstGeom prst="rect">
+            <a:avLst/>
+          </a:prstGeom>
+          <a:solidFill>
+            <a:srgbClr val="0D9488"/>
+          </a:solidFill>
+          <a:ln w="12700">
+            <a:solidFill>
+              <a:srgbClr val="0D9488"/>
+            </a:solidFill>
+            <a:prstDash val="solid"/>
+          </a:ln>
+        </p:spPr>
+      </p:sp>
+      <p:sp>
+        <p:nvSpPr>
+          <p:cNvPr id="30" name="Text 28"/>
+          <p:cNvSpPr txBox="1"/>
+          <p:nvPr/>
+        </p:nvSpPr>
+        <p:spPr>
+          <a:xfrm>
+            <a:off x="3304170" y="5781751"/>
+            <a:ext cx="777240" cy="333858"/>
+          </a:xfrm>
+          <a:prstGeom prst="rect">
+            <a:avLst/>
+          </a:prstGeom>
+          <a:noFill/>
+          <a:ln/>
+        </p:spPr>
+        <p:txBody>
+          <a:bodyPr wrap="square" lIns="0" tIns="0" rIns="0" bIns="0" rtlCol="0" anchor="ctr"/>
+          <a:lstStyle/>
+          <a:p>
+            <a:pPr indent="0" marL="0">
+              <a:buNone/>
+            </a:pPr>
+            <a:r>
+              <a:rPr lang="en-US" sz="1300" b="1" dirty="0">
+                <a:solidFill>
+                  <a:schemeClr val="tx1"/>
+                </a:solidFill>
+              </a:rPr>
+              <a:t>96</a:t>
+            </a:r>
+            <a:endParaRPr lang="en-US" sz="1300" dirty="0"/>
+          </a:p>
+        </p:txBody>
+      </p:sp>
+      <p:sp>
+        <p:nvSpPr>
+          <p:cNvPr id="31" name="Stat card"/>
           <p:cNvSpPr/>
           <p:nvPr/>
         </p:nvSpPr>
@@ -24237,7 +26242,7 @@
       </p:sp>
       <p:sp>
         <p:nvSpPr>
-          <p:cNvPr id="6" name="Stat validation sentences (pick the best epoch)"/>
+          <p:cNvPr id="32" name="Stat validation sentences (pick the best epoch)"/>
           <p:cNvSpPr txBox="1"/>
           <p:nvPr/>
         </p:nvSpPr>
@@ -24264,9 +26269,9 @@
                 <a:solidFill>
                   <a:schemeClr val="accent1"/>
                 </a:solidFill>
-                <a:latin typeface="Cambria" pitchFamily="34" charset="0"/>
-                <a:ea typeface="Cambria" pitchFamily="34" charset="-122"/>
-                <a:cs typeface="Cambria" pitchFamily="34" charset="-120"/>
+                <a:latin typeface="Georgia" pitchFamily="34" charset="0"/>
+                <a:ea typeface="Georgia" pitchFamily="34" charset="-122"/>
+                <a:cs typeface="Georgia" pitchFamily="34" charset="-120"/>
               </a:rPr>
               <a:t>379</a:t>
             </a:r>
@@ -24276,7 +26281,7 @@
       </p:sp>
       <p:sp>
         <p:nvSpPr>
-          <p:cNvPr id="7" name="Text 4"/>
+          <p:cNvPr id="33" name="Text 31"/>
           <p:cNvSpPr txBox="1"/>
           <p:nvPr/>
         </p:nvSpPr>
@@ -24312,7 +26317,7 @@
       </p:sp>
       <p:sp>
         <p:nvSpPr>
-          <p:cNvPr id="8" name="Stat card"/>
+          <p:cNvPr id="34" name="Stat card"/>
           <p:cNvSpPr/>
           <p:nvPr/>
         </p:nvSpPr>
@@ -24339,7 +26344,7 @@
       </p:sp>
       <p:sp>
         <p:nvSpPr>
-          <p:cNvPr id="9" name="Text 6"/>
+          <p:cNvPr id="35" name="Text 33"/>
           <p:cNvSpPr txBox="1"/>
           <p:nvPr/>
         </p:nvSpPr>
@@ -24375,7 +26380,7 @@
       </p:sp>
       <p:sp>
         <p:nvSpPr>
-          <p:cNvPr id="10" name="Text 7"/>
+          <p:cNvPr id="36" name="Text 34"/>
           <p:cNvSpPr txBox="1"/>
           <p:nvPr/>
         </p:nvSpPr>
@@ -24402,9 +26407,9 @@
                 <a:solidFill>
                   <a:schemeClr val="accent1"/>
                 </a:solidFill>
-                <a:latin typeface="Cambria" pitchFamily="34" charset="0"/>
-                <a:ea typeface="Cambria" pitchFamily="34" charset="-122"/>
-                <a:cs typeface="Cambria" pitchFamily="34" charset="-120"/>
+                <a:latin typeface="Georgia" pitchFamily="34" charset="0"/>
+                <a:ea typeface="Georgia" pitchFamily="34" charset="-122"/>
+                <a:cs typeface="Georgia" pitchFamily="34" charset="-120"/>
               </a:rPr>
               <a:t>400</a:t>
             </a:r>
@@ -24414,7 +26419,7 @@
       </p:sp>
       <p:sp>
         <p:nvSpPr>
-          <p:cNvPr id="11" name="Text 8"/>
+          <p:cNvPr id="37" name="Text 35"/>
           <p:cNvSpPr txBox="1"/>
           <p:nvPr/>
         </p:nvSpPr>
@@ -24450,7 +26455,7 @@
       </p:sp>
       <p:sp>
         <p:nvSpPr>
-          <p:cNvPr id="12" name="Text 9"/>
+          <p:cNvPr id="38" name="Text 36"/>
           <p:cNvSpPr txBox="1"/>
           <p:nvPr/>
         </p:nvSpPr>
@@ -24477,9 +26482,9 @@
                 <a:solidFill>
                   <a:schemeClr val="accent1"/>
                 </a:solidFill>
-                <a:latin typeface="Cambria" pitchFamily="34" charset="0"/>
-                <a:ea typeface="Cambria" pitchFamily="34" charset="-122"/>
-                <a:cs typeface="Cambria" pitchFamily="34" charset="-120"/>
+                <a:latin typeface="Georgia" pitchFamily="34" charset="0"/>
+                <a:ea typeface="Georgia" pitchFamily="34" charset="-122"/>
+                <a:cs typeface="Georgia" pitchFamily="34" charset="-120"/>
               </a:rPr>
               <a:t>1,012</a:t>
             </a:r>
@@ -24489,7 +26494,7 @@
       </p:sp>
       <p:sp>
         <p:nvSpPr>
-          <p:cNvPr id="13" name="Text 10"/>
+          <p:cNvPr id="39" name="Text 37"/>
           <p:cNvSpPr txBox="1"/>
           <p:nvPr/>
         </p:nvSpPr>
@@ -24525,7 +26530,7 @@
       </p:sp>
       <p:sp>
         <p:nvSpPr>
-          <p:cNvPr id="14" name="Text 11"/>
+          <p:cNvPr id="40" name="Text 38"/>
           <p:cNvSpPr txBox="1"/>
           <p:nvPr/>
         </p:nvSpPr>
@@ -24552,9 +26557,9 @@
                 <a:solidFill>
                   <a:schemeClr val="accent1"/>
                 </a:solidFill>
-                <a:latin typeface="Cambria" pitchFamily="34" charset="0"/>
-                <a:ea typeface="Cambria" pitchFamily="34" charset="-122"/>
-                <a:cs typeface="Cambria" pitchFamily="34" charset="-120"/>
+                <a:latin typeface="Georgia" pitchFamily="34" charset="0"/>
+                <a:ea typeface="Georgia" pitchFamily="34" charset="-122"/>
+                <a:cs typeface="Georgia" pitchFamily="34" charset="-120"/>
               </a:rPr>
               <a:t>143</a:t>
             </a:r>
@@ -24564,7 +26569,7 @@
       </p:sp>
       <p:sp>
         <p:nvSpPr>
-          <p:cNvPr id="15" name="Text 12"/>
+          <p:cNvPr id="41" name="Text 39"/>
           <p:cNvSpPr txBox="1"/>
           <p:nvPr/>
         </p:nvSpPr>
@@ -25376,17 +27381,17 @@
               <a:buNone/>
             </a:pPr>
             <a:r>
-              <a:rPr lang="en-US" sz="2400" b="1" dirty="0">
+              <a:rPr lang="en-US" sz="2000" b="1" dirty="0">
                 <a:solidFill>
                   <a:schemeClr val="accent1"/>
                 </a:solidFill>
-                <a:latin typeface="Cambria" pitchFamily="34" charset="0"/>
-                <a:ea typeface="Cambria" pitchFamily="34" charset="-122"/>
-                <a:cs typeface="Cambria" pitchFamily="34" charset="-120"/>
+                <a:latin typeface="Georgia" pitchFamily="34" charset="0"/>
+                <a:ea typeface="Georgia" pitchFamily="34" charset="-122"/>
+                <a:cs typeface="Georgia" pitchFamily="34" charset="-120"/>
               </a:rPr>
               <a:t>11.3% → 0.8%</a:t>
             </a:r>
-            <a:endParaRPr lang="en-US" sz="2400" dirty="0"/>
+            <a:endParaRPr lang="en-US" sz="2000" dirty="0"/>
           </a:p>
         </p:txBody>
       </p:sp>
@@ -25482,9 +27487,9 @@
                 <a:solidFill>
                   <a:schemeClr val="accent1"/>
                 </a:solidFill>
-                <a:latin typeface="Cambria" pitchFamily="34" charset="0"/>
-                <a:ea typeface="Cambria" pitchFamily="34" charset="-122"/>
-                <a:cs typeface="Cambria" pitchFamily="34" charset="-120"/>
+                <a:latin typeface="Georgia" pitchFamily="34" charset="0"/>
+                <a:ea typeface="Georgia" pitchFamily="34" charset="-122"/>
+                <a:cs typeface="Georgia" pitchFamily="34" charset="-120"/>
               </a:rPr>
               <a:t>1,856</a:t>
             </a:r>
@@ -25584,9 +27589,9 @@
                 <a:solidFill>
                   <a:schemeClr val="accent1"/>
                 </a:solidFill>
-                <a:latin typeface="Cambria" pitchFamily="34" charset="0"/>
-                <a:ea typeface="Cambria" pitchFamily="34" charset="-122"/>
-                <a:cs typeface="Cambria" pitchFamily="34" charset="-120"/>
+                <a:latin typeface="Georgia" pitchFamily="34" charset="0"/>
+                <a:ea typeface="Georgia" pitchFamily="34" charset="-122"/>
+                <a:cs typeface="Georgia" pitchFamily="34" charset="-120"/>
               </a:rPr>
               <a:t>1,654</a:t>
             </a:r>
@@ -25686,9 +27691,9 @@
                 <a:solidFill>
                   <a:schemeClr val="accent1"/>
                 </a:solidFill>
-                <a:latin typeface="Cambria" pitchFamily="34" charset="0"/>
-                <a:ea typeface="Cambria" pitchFamily="34" charset="-122"/>
-                <a:cs typeface="Cambria" pitchFamily="34" charset="-120"/>
+                <a:latin typeface="Georgia" pitchFamily="34" charset="0"/>
+                <a:ea typeface="Georgia" pitchFamily="34" charset="-122"/>
+                <a:cs typeface="Georgia" pitchFamily="34" charset="-120"/>
               </a:rPr>
               <a:t>40 of 40</a:t>
             </a:r>
@@ -26017,9 +28022,9 @@
                 <a:solidFill>
                   <a:schemeClr val="accent5"/>
                 </a:solidFill>
-                <a:latin typeface="Cambria" pitchFamily="34" charset="0"/>
-                <a:ea typeface="Cambria" pitchFamily="34" charset="-122"/>
-                <a:cs typeface="Cambria" pitchFamily="34" charset="-120"/>
+                <a:latin typeface="Georgia" pitchFamily="34" charset="0"/>
+                <a:ea typeface="Georgia" pitchFamily="34" charset="-122"/>
+                <a:cs typeface="Georgia" pitchFamily="34" charset="-120"/>
               </a:rPr>
               <a:t>1,030</a:t>
             </a:r>
@@ -26092,9 +28097,9 @@
                 <a:solidFill>
                   <a:schemeClr val="accent1"/>
                 </a:solidFill>
-                <a:latin typeface="Cambria" pitchFamily="34" charset="0"/>
-                <a:ea typeface="Cambria" pitchFamily="34" charset="-122"/>
-                <a:cs typeface="Cambria" pitchFamily="34" charset="-120"/>
+                <a:latin typeface="Georgia" pitchFamily="34" charset="0"/>
+                <a:ea typeface="Georgia" pitchFamily="34" charset="-122"/>
+                <a:cs typeface="Georgia" pitchFamily="34" charset="-120"/>
               </a:rPr>
               <a:t>350</a:t>
             </a:r>
@@ -26315,9 +28320,9 @@
                 <a:solidFill>
                   <a:schemeClr val="accent5"/>
                 </a:solidFill>
-                <a:latin typeface="Cambria" pitchFamily="34" charset="0"/>
-                <a:ea typeface="Cambria" pitchFamily="34" charset="-122"/>
-                <a:cs typeface="Cambria" pitchFamily="34" charset="-120"/>
+                <a:latin typeface="Georgia" pitchFamily="34" charset="0"/>
+                <a:ea typeface="Georgia" pitchFamily="34" charset="-122"/>
+                <a:cs typeface="Georgia" pitchFamily="34" charset="-120"/>
               </a:rPr>
               <a:t>5,000</a:t>
             </a:r>
@@ -26390,9 +28395,9 @@
                 <a:solidFill>
                   <a:schemeClr val="accent1"/>
                 </a:solidFill>
-                <a:latin typeface="Cambria" pitchFamily="34" charset="0"/>
-                <a:ea typeface="Cambria" pitchFamily="34" charset="-122"/>
-                <a:cs typeface="Cambria" pitchFamily="34" charset="-120"/>
+                <a:latin typeface="Georgia" pitchFamily="34" charset="0"/>
+                <a:ea typeface="Georgia" pitchFamily="34" charset="-122"/>
+                <a:cs typeface="Georgia" pitchFamily="34" charset="-120"/>
               </a:rPr>
               <a:t>2,798</a:t>
             </a:r>
@@ -26613,9 +28618,9 @@
                 <a:solidFill>
                   <a:schemeClr val="accent5"/>
                 </a:solidFill>
-                <a:latin typeface="Cambria" pitchFamily="34" charset="0"/>
-                <a:ea typeface="Cambria" pitchFamily="34" charset="-122"/>
-                <a:cs typeface="Cambria" pitchFamily="34" charset="-120"/>
+                <a:latin typeface="Georgia" pitchFamily="34" charset="0"/>
+                <a:ea typeface="Georgia" pitchFamily="34" charset="-122"/>
+                <a:cs typeface="Georgia" pitchFamily="34" charset="-120"/>
               </a:rPr>
               <a:t>103</a:t>
             </a:r>
@@ -26688,9 +28693,9 @@
                 <a:solidFill>
                   <a:schemeClr val="accent1"/>
                 </a:solidFill>
-                <a:latin typeface="Cambria" pitchFamily="34" charset="0"/>
-                <a:ea typeface="Cambria" pitchFamily="34" charset="-122"/>
-                <a:cs typeface="Cambria" pitchFamily="34" charset="-120"/>
+                <a:latin typeface="Georgia" pitchFamily="34" charset="0"/>
+                <a:ea typeface="Georgia" pitchFamily="34" charset="-122"/>
+                <a:cs typeface="Georgia" pitchFamily="34" charset="-120"/>
               </a:rPr>
               <a:t>96</a:t>
             </a:r>
@@ -27015,39 +29020,28 @@
       </p:sp>
       <p:sp>
         <p:nvSpPr>
-          <p:cNvPr id="7" name="Text 5"/>
-          <p:cNvSpPr txBox="1"/>
-          <p:nvPr/>
-        </p:nvSpPr>
-        <p:spPr>
-          <a:xfrm>
-            <a:off x="3108960" y="2103120"/>
-            <a:ext cx="274320" cy="457200"/>
-          </a:xfrm>
-          <a:prstGeom prst="rect">
-            <a:avLst/>
-          </a:prstGeom>
-          <a:noFill/>
-          <a:ln/>
-        </p:spPr>
-        <p:txBody>
-          <a:bodyPr wrap="square" lIns="0" tIns="0" rIns="0" bIns="0" rtlCol="0" anchor="ctr"/>
-          <a:lstStyle/>
-          <a:p>
-            <a:pPr algn="ctr" indent="0" marL="0">
-              <a:buNone/>
-            </a:pPr>
-            <a:r>
-              <a:rPr lang="en-US" sz="2400" b="1" dirty="0">
-                <a:solidFill>
-                  <a:schemeClr val="accent1"/>
-                </a:solidFill>
-              </a:rPr>
-              <a:t>→</a:t>
-            </a:r>
-            <a:endParaRPr lang="en-US" sz="2400" dirty="0"/>
-          </a:p>
-        </p:txBody>
+          <p:cNvPr id="7" name="Flow arrow"/>
+          <p:cNvSpPr/>
+          <p:nvPr/>
+        </p:nvSpPr>
+        <p:spPr>
+          <a:xfrm>
+            <a:off x="3118104" y="2194560"/>
+            <a:ext cx="201168" cy="256032"/>
+          </a:xfrm>
+          <a:prstGeom prst="rightArrow">
+            <a:avLst/>
+          </a:prstGeom>
+          <a:solidFill>
+            <a:schemeClr val="accent1"/>
+          </a:solidFill>
+          <a:ln w="12700">
+            <a:solidFill>
+              <a:schemeClr val="accent1"/>
+            </a:solidFill>
+            <a:prstDash val="solid"/>
+          </a:ln>
+        </p:spPr>
       </p:sp>
       <p:sp>
         <p:nvSpPr>
@@ -27150,39 +29144,28 @@
       </p:sp>
       <p:sp>
         <p:nvSpPr>
-          <p:cNvPr id="11" name="Text 9"/>
-          <p:cNvSpPr txBox="1"/>
-          <p:nvPr/>
-        </p:nvSpPr>
-        <p:spPr>
-          <a:xfrm>
-            <a:off x="5943600" y="2103120"/>
-            <a:ext cx="274320" cy="457200"/>
-          </a:xfrm>
-          <a:prstGeom prst="rect">
-            <a:avLst/>
-          </a:prstGeom>
-          <a:noFill/>
-          <a:ln/>
-        </p:spPr>
-        <p:txBody>
-          <a:bodyPr wrap="square" lIns="0" tIns="0" rIns="0" bIns="0" rtlCol="0" anchor="ctr"/>
-          <a:lstStyle/>
-          <a:p>
-            <a:pPr algn="ctr" indent="0" marL="0">
-              <a:buNone/>
-            </a:pPr>
-            <a:r>
-              <a:rPr lang="en-US" sz="2400" b="1" dirty="0">
-                <a:solidFill>
-                  <a:schemeClr val="accent1"/>
-                </a:solidFill>
-              </a:rPr>
-              <a:t>→</a:t>
-            </a:r>
-            <a:endParaRPr lang="en-US" sz="2400" dirty="0"/>
-          </a:p>
-        </p:txBody>
+          <p:cNvPr id="11" name="Flow arrow"/>
+          <p:cNvSpPr/>
+          <p:nvPr/>
+        </p:nvSpPr>
+        <p:spPr>
+          <a:xfrm>
+            <a:off x="5952744" y="2194560"/>
+            <a:ext cx="201168" cy="256032"/>
+          </a:xfrm>
+          <a:prstGeom prst="rightArrow">
+            <a:avLst/>
+          </a:prstGeom>
+          <a:solidFill>
+            <a:schemeClr val="accent1"/>
+          </a:solidFill>
+          <a:ln w="12700">
+            <a:solidFill>
+              <a:schemeClr val="accent1"/>
+            </a:solidFill>
+            <a:prstDash val="solid"/>
+          </a:ln>
+        </p:spPr>
       </p:sp>
       <p:sp>
         <p:nvSpPr>
@@ -27285,39 +29268,28 @@
       </p:sp>
       <p:sp>
         <p:nvSpPr>
-          <p:cNvPr id="15" name="Text 13"/>
-          <p:cNvSpPr txBox="1"/>
-          <p:nvPr/>
-        </p:nvSpPr>
-        <p:spPr>
-          <a:xfrm>
-            <a:off x="8778240" y="2103120"/>
-            <a:ext cx="274320" cy="457200"/>
-          </a:xfrm>
-          <a:prstGeom prst="rect">
-            <a:avLst/>
-          </a:prstGeom>
-          <a:noFill/>
-          <a:ln/>
-        </p:spPr>
-        <p:txBody>
-          <a:bodyPr wrap="square" lIns="0" tIns="0" rIns="0" bIns="0" rtlCol="0" anchor="ctr"/>
-          <a:lstStyle/>
-          <a:p>
-            <a:pPr algn="ctr" indent="0" marL="0">
-              <a:buNone/>
-            </a:pPr>
-            <a:r>
-              <a:rPr lang="en-US" sz="2400" b="1" dirty="0">
-                <a:solidFill>
-                  <a:schemeClr val="accent1"/>
-                </a:solidFill>
-              </a:rPr>
-              <a:t>→</a:t>
-            </a:r>
-            <a:endParaRPr lang="en-US" sz="2400" dirty="0"/>
-          </a:p>
-        </p:txBody>
+          <p:cNvPr id="15" name="Flow arrow"/>
+          <p:cNvSpPr/>
+          <p:nvPr/>
+        </p:nvSpPr>
+        <p:spPr>
+          <a:xfrm>
+            <a:off x="8787384" y="2194560"/>
+            <a:ext cx="201168" cy="256032"/>
+          </a:xfrm>
+          <a:prstGeom prst="rightArrow">
+            <a:avLst/>
+          </a:prstGeom>
+          <a:solidFill>
+            <a:schemeClr val="accent1"/>
+          </a:solidFill>
+          <a:ln w="12700">
+            <a:solidFill>
+              <a:schemeClr val="accent1"/>
+            </a:solidFill>
+            <a:prstDash val="solid"/>
+          </a:ln>
+        </p:spPr>
       </p:sp>
       <p:sp>
         <p:nvSpPr>
@@ -27631,9 +29603,9 @@
                 <a:solidFill>
                   <a:schemeClr val="accent1"/>
                 </a:solidFill>
-                <a:latin typeface="Cambria" pitchFamily="34" charset="0"/>
-                <a:ea typeface="Cambria" pitchFamily="34" charset="-122"/>
-                <a:cs typeface="Cambria" pitchFamily="34" charset="-120"/>
+                <a:latin typeface="Georgia" pitchFamily="34" charset="0"/>
+                <a:ea typeface="Georgia" pitchFamily="34" charset="-122"/>
+                <a:cs typeface="Georgia" pitchFamily="34" charset="-120"/>
               </a:rPr>
               <a:t>5,750</a:t>
             </a:r>
@@ -27706,9 +29678,9 @@
                 <a:solidFill>
                   <a:schemeClr val="accent1"/>
                 </a:solidFill>
-                <a:latin typeface="Cambria" pitchFamily="34" charset="0"/>
-                <a:ea typeface="Cambria" pitchFamily="34" charset="-122"/>
-                <a:cs typeface="Cambria" pitchFamily="34" charset="-120"/>
+                <a:latin typeface="Georgia" pitchFamily="34" charset="0"/>
+                <a:ea typeface="Georgia" pitchFamily="34" charset="-122"/>
+                <a:cs typeface="Georgia" pitchFamily="34" charset="-120"/>
               </a:rPr>
               <a:t>5,733</a:t>
             </a:r>
@@ -27884,7 +29856,7 @@
     </a:clrScheme>
     <a:fontScheme name="Aceh Translator">
       <a:majorFont>
-        <a:latin typeface="Cambria"/>
+        <a:latin typeface="Georgia"/>
         <a:ea typeface=""/>
         <a:cs typeface=""/>
         <a:font script="Jpan" typeface="游ゴシック Light"/>
@@ -27936,7 +29908,7 @@
         <a:font script="Tfng" typeface="Ebrima"/>
       </a:majorFont>
       <a:minorFont>
-        <a:latin typeface="Calibri"/>
+        <a:latin typeface="Arial"/>
         <a:ea typeface=""/>
         <a:cs typeface=""/>
         <a:font script="Jpan" typeface="游ゴシック"/>
